--- a/Báo Cáo Đồ Án CN - Mytee Studio.pptx
+++ b/Báo Cáo Đồ Án CN - Mytee Studio.pptx
@@ -5,7 +5,7 @@
     <p:sldMasterId id="2147483672" r:id="rId1"/>
   </p:sldMasterIdLst>
   <p:notesMasterIdLst>
-    <p:notesMasterId r:id="rId20"/>
+    <p:notesMasterId r:id="rId17"/>
   </p:notesMasterIdLst>
   <p:sldIdLst>
     <p:sldId id="256" r:id="rId2"/>
@@ -14,72 +14,69 @@
     <p:sldId id="259" r:id="rId5"/>
     <p:sldId id="260" r:id="rId6"/>
     <p:sldId id="261" r:id="rId7"/>
-    <p:sldId id="262" r:id="rId8"/>
-    <p:sldId id="263" r:id="rId9"/>
-    <p:sldId id="264" r:id="rId10"/>
-    <p:sldId id="265" r:id="rId11"/>
-    <p:sldId id="266" r:id="rId12"/>
-    <p:sldId id="267" r:id="rId13"/>
-    <p:sldId id="268" r:id="rId14"/>
-    <p:sldId id="269" r:id="rId15"/>
-    <p:sldId id="270" r:id="rId16"/>
-    <p:sldId id="271" r:id="rId17"/>
-    <p:sldId id="272" r:id="rId18"/>
-    <p:sldId id="273" r:id="rId19"/>
+    <p:sldId id="263" r:id="rId8"/>
+    <p:sldId id="264" r:id="rId9"/>
+    <p:sldId id="269" r:id="rId10"/>
+    <p:sldId id="274" r:id="rId11"/>
+    <p:sldId id="275" r:id="rId12"/>
+    <p:sldId id="270" r:id="rId13"/>
+    <p:sldId id="271" r:id="rId14"/>
+    <p:sldId id="272" r:id="rId15"/>
+    <p:sldId id="273" r:id="rId16"/>
   </p:sldIdLst>
   <p:sldSz cx="12192000" cy="6858000"/>
   <p:notesSz cx="6858000" cy="9144000"/>
   <p:embeddedFontLst>
     <p:embeddedFont>
-      <p:font typeface="Roboto" charset="0"/>
-      <p:regular r:id="rId21"/>
-      <p:bold r:id="rId22"/>
-      <p:italic r:id="rId23"/>
-      <p:boldItalic r:id="rId24"/>
+      <p:font typeface="Calibri" pitchFamily="34" charset="0"/>
+      <p:regular r:id="rId18"/>
+      <p:bold r:id="rId19"/>
+      <p:italic r:id="rId20"/>
+      <p:boldItalic r:id="rId21"/>
+    </p:embeddedFont>
+    <p:embeddedFont>
+      <p:font typeface="Rockwell" pitchFamily="18" charset="0"/>
+      <p:regular r:id="rId22"/>
+      <p:bold r:id="rId23"/>
+      <p:italic r:id="rId24"/>
+      <p:boldItalic r:id="rId25"/>
     </p:embeddedFont>
     <p:embeddedFont>
       <p:font typeface="Open Sans" charset="0"/>
-      <p:regular r:id="rId25"/>
-      <p:bold r:id="rId26"/>
-      <p:italic r:id="rId27"/>
-      <p:boldItalic r:id="rId28"/>
+      <p:regular r:id="rId26"/>
+      <p:bold r:id="rId27"/>
+      <p:italic r:id="rId28"/>
+      <p:boldItalic r:id="rId29"/>
+    </p:embeddedFont>
+    <p:embeddedFont>
+      <p:font typeface="Open Sans SemiBold" charset="0"/>
+      <p:regular r:id="rId30"/>
+      <p:bold r:id="rId31"/>
+      <p:italic r:id="rId32"/>
+      <p:boldItalic r:id="rId33"/>
     </p:embeddedFont>
     <p:embeddedFont>
       <p:font typeface="Roboto Black" charset="0"/>
-      <p:bold r:id="rId29"/>
-      <p:boldItalic r:id="rId30"/>
+      <p:bold r:id="rId34"/>
+      <p:boldItalic r:id="rId35"/>
     </p:embeddedFont>
     <p:embeddedFont>
-      <p:font typeface="Rockwell" pitchFamily="18" charset="0"/>
-      <p:regular r:id="rId31"/>
-      <p:bold r:id="rId32"/>
-      <p:italic r:id="rId33"/>
-      <p:boldItalic r:id="rId34"/>
-    </p:embeddedFont>
-    <p:embeddedFont>
-      <p:font typeface="Open Sans SemiBold" charset="0"/>
-      <p:regular r:id="rId35"/>
-      <p:bold r:id="rId36"/>
-      <p:italic r:id="rId37"/>
-      <p:boldItalic r:id="rId38"/>
-    </p:embeddedFont>
-    <p:embeddedFont>
-      <p:font typeface="Calibri" pitchFamily="34" charset="0"/>
-      <p:regular r:id="rId39"/>
-      <p:bold r:id="rId40"/>
-      <p:italic r:id="rId41"/>
-      <p:boldItalic r:id="rId42"/>
+      <p:font typeface="Wingdings 2" pitchFamily="18" charset="2"/>
+      <p:regular r:id="rId36"/>
     </p:embeddedFont>
     <p:embeddedFont>
       <p:font typeface="Open Sans Light" charset="0"/>
-      <p:regular r:id="rId43"/>
-      <p:bold r:id="rId44"/>
-      <p:italic r:id="rId45"/>
-      <p:boldItalic r:id="rId46"/>
+      <p:regular r:id="rId37"/>
+      <p:bold r:id="rId38"/>
+      <p:italic r:id="rId39"/>
+      <p:boldItalic r:id="rId40"/>
     </p:embeddedFont>
     <p:embeddedFont>
-      <p:font typeface="Wingdings 2" pitchFamily="18" charset="2"/>
-      <p:regular r:id="rId47"/>
+      <p:font typeface="Roboto" charset="0"/>
+      <p:regular r:id="rId41"/>
+      <p:bold r:id="rId42"/>
+      <p:italic r:id="rId43"/>
+      <p:boldItalic r:id="rId44"/>
     </p:embeddedFont>
   </p:embeddedFontLst>
   <p:defaultTextStyle>
@@ -885,7 +882,7 @@
   <p:cSld>
     <p:spTree>
       <p:nvGrpSpPr>
-        <p:cNvPr id="1" name="Shape 288"/>
+        <p:cNvPr id="1" name="Shape 366"/>
         <p:cNvGrpSpPr/>
         <p:nvPr/>
       </p:nvGrpSpPr>
@@ -899,7 +896,7 @@
       </p:grpSpPr>
       <p:sp>
         <p:nvSpPr>
-          <p:cNvPr id="289" name="Google Shape;289;p10:notes"/>
+          <p:cNvPr id="367" name="Google Shape;367;p14:notes"/>
           <p:cNvSpPr txBox="1">
             <a:spLocks noGrp="1"/>
           </p:cNvSpPr>
@@ -937,7 +934,7 @@
       </p:sp>
       <p:sp>
         <p:nvSpPr>
-          <p:cNvPr id="290" name="Google Shape;290;p10:notes"/>
+          <p:cNvPr id="368" name="Google Shape;368;p14:notes"/>
           <p:cNvSpPr>
             <a:spLocks noGrp="1" noRot="1" noChangeAspect="1"/>
           </p:cNvSpPr>
@@ -989,7 +986,7 @@
   <p:cSld>
     <p:spTree>
       <p:nvGrpSpPr>
-        <p:cNvPr id="1" name="Shape 312"/>
+        <p:cNvPr id="1" name="Shape 366"/>
         <p:cNvGrpSpPr/>
         <p:nvPr/>
       </p:nvGrpSpPr>
@@ -1003,7 +1000,7 @@
       </p:grpSpPr>
       <p:sp>
         <p:nvSpPr>
-          <p:cNvPr id="313" name="Google Shape;313;p11:notes"/>
+          <p:cNvPr id="367" name="Google Shape;367;p14:notes"/>
           <p:cNvSpPr txBox="1">
             <a:spLocks noGrp="1"/>
           </p:cNvSpPr>
@@ -1041,7 +1038,7 @@
       </p:sp>
       <p:sp>
         <p:nvSpPr>
-          <p:cNvPr id="314" name="Google Shape;314;p11:notes"/>
+          <p:cNvPr id="368" name="Google Shape;368;p14:notes"/>
           <p:cNvSpPr>
             <a:spLocks noGrp="1" noRot="1" noChangeAspect="1"/>
           </p:cNvSpPr>
@@ -1093,7 +1090,7 @@
   <p:cSld>
     <p:spTree>
       <p:nvGrpSpPr>
-        <p:cNvPr id="1" name="Shape 335"/>
+        <p:cNvPr id="1" name="Shape 399"/>
         <p:cNvGrpSpPr/>
         <p:nvPr/>
       </p:nvGrpSpPr>
@@ -1107,7 +1104,7 @@
       </p:grpSpPr>
       <p:sp>
         <p:nvSpPr>
-          <p:cNvPr id="336" name="Google Shape;336;p12:notes"/>
+          <p:cNvPr id="400" name="Google Shape;400;p15:notes"/>
           <p:cNvSpPr txBox="1">
             <a:spLocks noGrp="1"/>
           </p:cNvSpPr>
@@ -1145,7 +1142,7 @@
       </p:sp>
       <p:sp>
         <p:nvSpPr>
-          <p:cNvPr id="337" name="Google Shape;337;p12:notes"/>
+          <p:cNvPr id="401" name="Google Shape;401;p15:notes"/>
           <p:cNvSpPr>
             <a:spLocks noGrp="1" noRot="1" noChangeAspect="1"/>
           </p:cNvSpPr>
@@ -1197,7 +1194,7 @@
   <p:cSld>
     <p:spTree>
       <p:nvGrpSpPr>
-        <p:cNvPr id="1" name="Shape 350"/>
+        <p:cNvPr id="1" name="Shape 431"/>
         <p:cNvGrpSpPr/>
         <p:nvPr/>
       </p:nvGrpSpPr>
@@ -1211,7 +1208,7 @@
       </p:grpSpPr>
       <p:sp>
         <p:nvSpPr>
-          <p:cNvPr id="351" name="Google Shape;351;p13:notes"/>
+          <p:cNvPr id="432" name="Google Shape;432;p16:notes"/>
           <p:cNvSpPr txBox="1">
             <a:spLocks noGrp="1"/>
           </p:cNvSpPr>
@@ -1249,7 +1246,7 @@
       </p:sp>
       <p:sp>
         <p:nvSpPr>
-          <p:cNvPr id="352" name="Google Shape;352;p13:notes"/>
+          <p:cNvPr id="433" name="Google Shape;433;p16:notes"/>
           <p:cNvSpPr>
             <a:spLocks noGrp="1" noRot="1" noChangeAspect="1"/>
           </p:cNvSpPr>
@@ -1301,7 +1298,7 @@
   <p:cSld>
     <p:spTree>
       <p:nvGrpSpPr>
-        <p:cNvPr id="1" name="Shape 366"/>
+        <p:cNvPr id="1" name="Shape 460"/>
         <p:cNvGrpSpPr/>
         <p:nvPr/>
       </p:nvGrpSpPr>
@@ -1315,7 +1312,7 @@
       </p:grpSpPr>
       <p:sp>
         <p:nvSpPr>
-          <p:cNvPr id="367" name="Google Shape;367;p14:notes"/>
+          <p:cNvPr id="461" name="Google Shape;461;p17:notes"/>
           <p:cNvSpPr txBox="1">
             <a:spLocks noGrp="1"/>
           </p:cNvSpPr>
@@ -1353,7 +1350,7 @@
       </p:sp>
       <p:sp>
         <p:nvSpPr>
-          <p:cNvPr id="368" name="Google Shape;368;p14:notes"/>
+          <p:cNvPr id="462" name="Google Shape;462;p17:notes"/>
           <p:cNvSpPr>
             <a:spLocks noGrp="1" noRot="1" noChangeAspect="1"/>
           </p:cNvSpPr>
@@ -1401,318 +1398,6 @@
 </file>
 
 <file path=ppt/notesSlides/notesSlide15.xml><?xml version="1.0" encoding="utf-8"?>
-<p:notes xmlns:a="http://schemas.openxmlformats.org/drawingml/2006/main" xmlns:r="http://schemas.openxmlformats.org/officeDocument/2006/relationships" xmlns:p="http://schemas.openxmlformats.org/presentationml/2006/main" showMasterSp="0" showMasterPhAnim="0">
-  <p:cSld>
-    <p:spTree>
-      <p:nvGrpSpPr>
-        <p:cNvPr id="1" name="Shape 399"/>
-        <p:cNvGrpSpPr/>
-        <p:nvPr/>
-      </p:nvGrpSpPr>
-      <p:grpSpPr>
-        <a:xfrm>
-          <a:off x="0" y="0"/>
-          <a:ext cx="0" cy="0"/>
-          <a:chOff x="0" y="0"/>
-          <a:chExt cx="0" cy="0"/>
-        </a:xfrm>
-      </p:grpSpPr>
-      <p:sp>
-        <p:nvSpPr>
-          <p:cNvPr id="400" name="Google Shape;400;p15:notes"/>
-          <p:cNvSpPr txBox="1">
-            <a:spLocks noGrp="1"/>
-          </p:cNvSpPr>
-          <p:nvPr>
-            <p:ph type="body" idx="1"/>
-          </p:nvPr>
-        </p:nvSpPr>
-        <p:spPr>
-          <a:xfrm>
-            <a:off x="685800" y="4343400"/>
-            <a:ext cx="5486400" cy="4114800"/>
-          </a:xfrm>
-          <a:prstGeom prst="rect">
-            <a:avLst/>
-          </a:prstGeom>
-        </p:spPr>
-        <p:txBody>
-          <a:bodyPr spcFirstLastPara="1" wrap="square" lIns="91425" tIns="91425" rIns="91425" bIns="91425" anchor="t" anchorCtr="0">
-            <a:noAutofit/>
-          </a:bodyPr>
-          <a:lstStyle/>
-          <a:p>
-            <a:pPr marL="0" lvl="0" indent="0" algn="l" rtl="0">
-              <a:spcBef>
-                <a:spcPts val="0"/>
-              </a:spcBef>
-              <a:spcAft>
-                <a:spcPts val="0"/>
-              </a:spcAft>
-              <a:buNone/>
-            </a:pPr>
-            <a:endParaRPr/>
-          </a:p>
-        </p:txBody>
-      </p:sp>
-      <p:sp>
-        <p:nvSpPr>
-          <p:cNvPr id="401" name="Google Shape;401;p15:notes"/>
-          <p:cNvSpPr>
-            <a:spLocks noGrp="1" noRot="1" noChangeAspect="1"/>
-          </p:cNvSpPr>
-          <p:nvPr>
-            <p:ph type="sldImg" idx="2"/>
-          </p:nvPr>
-        </p:nvSpPr>
-        <p:spPr>
-          <a:xfrm>
-            <a:off x="381000" y="685800"/>
-            <a:ext cx="6096000" cy="3429000"/>
-          </a:xfrm>
-          <a:custGeom>
-            <a:avLst/>
-            <a:gdLst/>
-            <a:ahLst/>
-            <a:cxnLst/>
-            <a:rect l="l" t="t" r="r" b="b"/>
-            <a:pathLst>
-              <a:path w="120000" h="120000" extrusionOk="0">
-                <a:moveTo>
-                  <a:pt x="0" y="0"/>
-                </a:moveTo>
-                <a:lnTo>
-                  <a:pt x="120000" y="0"/>
-                </a:lnTo>
-                <a:lnTo>
-                  <a:pt x="120000" y="120000"/>
-                </a:lnTo>
-                <a:lnTo>
-                  <a:pt x="0" y="120000"/>
-                </a:lnTo>
-                <a:close/>
-              </a:path>
-            </a:pathLst>
-          </a:custGeom>
-        </p:spPr>
-      </p:sp>
-    </p:spTree>
-  </p:cSld>
-  <p:clrMapOvr>
-    <a:masterClrMapping/>
-  </p:clrMapOvr>
-</p:notes>
-</file>
-
-<file path=ppt/notesSlides/notesSlide16.xml><?xml version="1.0" encoding="utf-8"?>
-<p:notes xmlns:a="http://schemas.openxmlformats.org/drawingml/2006/main" xmlns:r="http://schemas.openxmlformats.org/officeDocument/2006/relationships" xmlns:p="http://schemas.openxmlformats.org/presentationml/2006/main" showMasterSp="0" showMasterPhAnim="0">
-  <p:cSld>
-    <p:spTree>
-      <p:nvGrpSpPr>
-        <p:cNvPr id="1" name="Shape 431"/>
-        <p:cNvGrpSpPr/>
-        <p:nvPr/>
-      </p:nvGrpSpPr>
-      <p:grpSpPr>
-        <a:xfrm>
-          <a:off x="0" y="0"/>
-          <a:ext cx="0" cy="0"/>
-          <a:chOff x="0" y="0"/>
-          <a:chExt cx="0" cy="0"/>
-        </a:xfrm>
-      </p:grpSpPr>
-      <p:sp>
-        <p:nvSpPr>
-          <p:cNvPr id="432" name="Google Shape;432;p16:notes"/>
-          <p:cNvSpPr txBox="1">
-            <a:spLocks noGrp="1"/>
-          </p:cNvSpPr>
-          <p:nvPr>
-            <p:ph type="body" idx="1"/>
-          </p:nvPr>
-        </p:nvSpPr>
-        <p:spPr>
-          <a:xfrm>
-            <a:off x="685800" y="4343400"/>
-            <a:ext cx="5486400" cy="4114800"/>
-          </a:xfrm>
-          <a:prstGeom prst="rect">
-            <a:avLst/>
-          </a:prstGeom>
-        </p:spPr>
-        <p:txBody>
-          <a:bodyPr spcFirstLastPara="1" wrap="square" lIns="91425" tIns="91425" rIns="91425" bIns="91425" anchor="t" anchorCtr="0">
-            <a:noAutofit/>
-          </a:bodyPr>
-          <a:lstStyle/>
-          <a:p>
-            <a:pPr marL="0" lvl="0" indent="0" algn="l" rtl="0">
-              <a:spcBef>
-                <a:spcPts val="0"/>
-              </a:spcBef>
-              <a:spcAft>
-                <a:spcPts val="0"/>
-              </a:spcAft>
-              <a:buNone/>
-            </a:pPr>
-            <a:endParaRPr/>
-          </a:p>
-        </p:txBody>
-      </p:sp>
-      <p:sp>
-        <p:nvSpPr>
-          <p:cNvPr id="433" name="Google Shape;433;p16:notes"/>
-          <p:cNvSpPr>
-            <a:spLocks noGrp="1" noRot="1" noChangeAspect="1"/>
-          </p:cNvSpPr>
-          <p:nvPr>
-            <p:ph type="sldImg" idx="2"/>
-          </p:nvPr>
-        </p:nvSpPr>
-        <p:spPr>
-          <a:xfrm>
-            <a:off x="381000" y="685800"/>
-            <a:ext cx="6096000" cy="3429000"/>
-          </a:xfrm>
-          <a:custGeom>
-            <a:avLst/>
-            <a:gdLst/>
-            <a:ahLst/>
-            <a:cxnLst/>
-            <a:rect l="l" t="t" r="r" b="b"/>
-            <a:pathLst>
-              <a:path w="120000" h="120000" extrusionOk="0">
-                <a:moveTo>
-                  <a:pt x="0" y="0"/>
-                </a:moveTo>
-                <a:lnTo>
-                  <a:pt x="120000" y="0"/>
-                </a:lnTo>
-                <a:lnTo>
-                  <a:pt x="120000" y="120000"/>
-                </a:lnTo>
-                <a:lnTo>
-                  <a:pt x="0" y="120000"/>
-                </a:lnTo>
-                <a:close/>
-              </a:path>
-            </a:pathLst>
-          </a:custGeom>
-        </p:spPr>
-      </p:sp>
-    </p:spTree>
-  </p:cSld>
-  <p:clrMapOvr>
-    <a:masterClrMapping/>
-  </p:clrMapOvr>
-</p:notes>
-</file>
-
-<file path=ppt/notesSlides/notesSlide17.xml><?xml version="1.0" encoding="utf-8"?>
-<p:notes xmlns:a="http://schemas.openxmlformats.org/drawingml/2006/main" xmlns:r="http://schemas.openxmlformats.org/officeDocument/2006/relationships" xmlns:p="http://schemas.openxmlformats.org/presentationml/2006/main" showMasterSp="0" showMasterPhAnim="0">
-  <p:cSld>
-    <p:spTree>
-      <p:nvGrpSpPr>
-        <p:cNvPr id="1" name="Shape 460"/>
-        <p:cNvGrpSpPr/>
-        <p:nvPr/>
-      </p:nvGrpSpPr>
-      <p:grpSpPr>
-        <a:xfrm>
-          <a:off x="0" y="0"/>
-          <a:ext cx="0" cy="0"/>
-          <a:chOff x="0" y="0"/>
-          <a:chExt cx="0" cy="0"/>
-        </a:xfrm>
-      </p:grpSpPr>
-      <p:sp>
-        <p:nvSpPr>
-          <p:cNvPr id="461" name="Google Shape;461;p17:notes"/>
-          <p:cNvSpPr txBox="1">
-            <a:spLocks noGrp="1"/>
-          </p:cNvSpPr>
-          <p:nvPr>
-            <p:ph type="body" idx="1"/>
-          </p:nvPr>
-        </p:nvSpPr>
-        <p:spPr>
-          <a:xfrm>
-            <a:off x="685800" y="4343400"/>
-            <a:ext cx="5486400" cy="4114800"/>
-          </a:xfrm>
-          <a:prstGeom prst="rect">
-            <a:avLst/>
-          </a:prstGeom>
-        </p:spPr>
-        <p:txBody>
-          <a:bodyPr spcFirstLastPara="1" wrap="square" lIns="91425" tIns="91425" rIns="91425" bIns="91425" anchor="t" anchorCtr="0">
-            <a:noAutofit/>
-          </a:bodyPr>
-          <a:lstStyle/>
-          <a:p>
-            <a:pPr marL="0" lvl="0" indent="0" algn="l" rtl="0">
-              <a:spcBef>
-                <a:spcPts val="0"/>
-              </a:spcBef>
-              <a:spcAft>
-                <a:spcPts val="0"/>
-              </a:spcAft>
-              <a:buNone/>
-            </a:pPr>
-            <a:endParaRPr/>
-          </a:p>
-        </p:txBody>
-      </p:sp>
-      <p:sp>
-        <p:nvSpPr>
-          <p:cNvPr id="462" name="Google Shape;462;p17:notes"/>
-          <p:cNvSpPr>
-            <a:spLocks noGrp="1" noRot="1" noChangeAspect="1"/>
-          </p:cNvSpPr>
-          <p:nvPr>
-            <p:ph type="sldImg" idx="2"/>
-          </p:nvPr>
-        </p:nvSpPr>
-        <p:spPr>
-          <a:xfrm>
-            <a:off x="381000" y="685800"/>
-            <a:ext cx="6096000" cy="3429000"/>
-          </a:xfrm>
-          <a:custGeom>
-            <a:avLst/>
-            <a:gdLst/>
-            <a:ahLst/>
-            <a:cxnLst/>
-            <a:rect l="l" t="t" r="r" b="b"/>
-            <a:pathLst>
-              <a:path w="120000" h="120000" extrusionOk="0">
-                <a:moveTo>
-                  <a:pt x="0" y="0"/>
-                </a:moveTo>
-                <a:lnTo>
-                  <a:pt x="120000" y="0"/>
-                </a:lnTo>
-                <a:lnTo>
-                  <a:pt x="120000" y="120000"/>
-                </a:lnTo>
-                <a:lnTo>
-                  <a:pt x="0" y="120000"/>
-                </a:lnTo>
-                <a:close/>
-              </a:path>
-            </a:pathLst>
-          </a:custGeom>
-        </p:spPr>
-      </p:sp>
-    </p:spTree>
-  </p:cSld>
-  <p:clrMapOvr>
-    <a:masterClrMapping/>
-  </p:clrMapOvr>
-</p:notes>
-</file>
-
-<file path=ppt/notesSlides/notesSlide18.xml><?xml version="1.0" encoding="utf-8"?>
 <p:notes xmlns:a="http://schemas.openxmlformats.org/drawingml/2006/main" xmlns:r="http://schemas.openxmlformats.org/officeDocument/2006/relationships" xmlns:p="http://schemas.openxmlformats.org/presentationml/2006/main" showMasterSp="0" showMasterPhAnim="0">
   <p:cSld>
     <p:spTree>
@@ -2341,7 +2026,7 @@
   <p:cSld>
     <p:spTree>
       <p:nvGrpSpPr>
-        <p:cNvPr id="1" name="Shape 218"/>
+        <p:cNvPr id="1" name="Shape 238"/>
         <p:cNvGrpSpPr/>
         <p:nvPr/>
       </p:nvGrpSpPr>
@@ -2355,7 +2040,7 @@
       </p:grpSpPr>
       <p:sp>
         <p:nvSpPr>
-          <p:cNvPr id="219" name="Google Shape;219;p7:notes"/>
+          <p:cNvPr id="239" name="Google Shape;239;p8:notes"/>
           <p:cNvSpPr txBox="1">
             <a:spLocks noGrp="1"/>
           </p:cNvSpPr>
@@ -2393,7 +2078,7 @@
       </p:sp>
       <p:sp>
         <p:nvSpPr>
-          <p:cNvPr id="220" name="Google Shape;220;p7:notes"/>
+          <p:cNvPr id="240" name="Google Shape;240;p8:notes"/>
           <p:cNvSpPr>
             <a:spLocks noGrp="1" noRot="1" noChangeAspect="1"/>
           </p:cNvSpPr>
@@ -2445,7 +2130,7 @@
   <p:cSld>
     <p:spTree>
       <p:nvGrpSpPr>
-        <p:cNvPr id="1" name="Shape 238"/>
+        <p:cNvPr id="1" name="Shape 264"/>
         <p:cNvGrpSpPr/>
         <p:nvPr/>
       </p:nvGrpSpPr>
@@ -2459,7 +2144,7 @@
       </p:grpSpPr>
       <p:sp>
         <p:nvSpPr>
-          <p:cNvPr id="239" name="Google Shape;239;p8:notes"/>
+          <p:cNvPr id="265" name="Google Shape;265;p9:notes"/>
           <p:cNvSpPr txBox="1">
             <a:spLocks noGrp="1"/>
           </p:cNvSpPr>
@@ -2497,7 +2182,7 @@
       </p:sp>
       <p:sp>
         <p:nvSpPr>
-          <p:cNvPr id="240" name="Google Shape;240;p8:notes"/>
+          <p:cNvPr id="266" name="Google Shape;266;p9:notes"/>
           <p:cNvSpPr>
             <a:spLocks noGrp="1" noRot="1" noChangeAspect="1"/>
           </p:cNvSpPr>
@@ -2549,7 +2234,7 @@
   <p:cSld>
     <p:spTree>
       <p:nvGrpSpPr>
-        <p:cNvPr id="1" name="Shape 264"/>
+        <p:cNvPr id="1" name="Shape 366"/>
         <p:cNvGrpSpPr/>
         <p:nvPr/>
       </p:nvGrpSpPr>
@@ -2563,7 +2248,7 @@
       </p:grpSpPr>
       <p:sp>
         <p:nvSpPr>
-          <p:cNvPr id="265" name="Google Shape;265;p9:notes"/>
+          <p:cNvPr id="367" name="Google Shape;367;p14:notes"/>
           <p:cNvSpPr txBox="1">
             <a:spLocks noGrp="1"/>
           </p:cNvSpPr>
@@ -2601,7 +2286,7 @@
       </p:sp>
       <p:sp>
         <p:nvSpPr>
-          <p:cNvPr id="266" name="Google Shape;266;p9:notes"/>
+          <p:cNvPr id="368" name="Google Shape;368;p14:notes"/>
           <p:cNvSpPr>
             <a:spLocks noGrp="1" noRot="1" noChangeAspect="1"/>
           </p:cNvSpPr>
@@ -7069,60 +6754,6 @@
           </a:p>
         </p:txBody>
       </p:sp>
-      <p:sp>
-        <p:nvSpPr>
-          <p:cNvPr id="2" name="Rectangle 1"/>
-          <p:cNvSpPr/>
-          <p:nvPr/>
-        </p:nvSpPr>
-        <p:spPr>
-          <a:xfrm>
-            <a:off x="11229405" y="6448624"/>
-            <a:ext cx="732893" cy="307777"/>
-          </a:xfrm>
-          <a:prstGeom prst="rect">
-            <a:avLst/>
-          </a:prstGeom>
-        </p:spPr>
-        <p:txBody>
-          <a:bodyPr wrap="none">
-            <a:spAutoFit/>
-          </a:bodyPr>
-          <a:lstStyle/>
-          <a:p>
-            <a:pPr lvl="0"/>
-            <a:r>
-              <a:rPr lang="en-US" dirty="0">
-                <a:solidFill>
-                  <a:schemeClr val="tx1"/>
-                </a:solidFill>
-                <a:latin typeface="Open Sans"/>
-                <a:ea typeface="Open Sans"/>
-                <a:cs typeface="Open Sans"/>
-                <a:sym typeface="Open Sans"/>
-              </a:rPr>
-              <a:t>Slide </a:t>
-            </a:r>
-            <a:r>
-              <a:rPr lang="en-US" dirty="0" smtClean="0">
-                <a:solidFill>
-                  <a:schemeClr val="tx1"/>
-                </a:solidFill>
-                <a:latin typeface="Open Sans"/>
-                <a:ea typeface="Open Sans"/>
-                <a:cs typeface="Open Sans"/>
-                <a:sym typeface="Open Sans"/>
-              </a:rPr>
-              <a:t>1</a:t>
-            </a:r>
-            <a:endParaRPr lang="en-US" dirty="0">
-              <a:solidFill>
-                <a:schemeClr val="tx1"/>
-              </a:solidFill>
-            </a:endParaRPr>
-          </a:p>
-        </p:txBody>
-      </p:sp>
     </p:spTree>
   </p:cSld>
   <p:clrMapOvr>
@@ -7141,2895 +6772,6 @@
 <file path=ppt/slides/slide10.xml><?xml version="1.0" encoding="utf-8"?>
 <p:sld xmlns:a="http://schemas.openxmlformats.org/drawingml/2006/main" xmlns:r="http://schemas.openxmlformats.org/officeDocument/2006/relationships" xmlns:p="http://schemas.openxmlformats.org/presentationml/2006/main">
   <p:cSld>
-    <p:bg>
-      <p:bgPr>
-        <a:solidFill>
-          <a:srgbClr val="FFFFFF"/>
-        </a:solidFill>
-        <a:effectLst/>
-      </p:bgPr>
-    </p:bg>
-    <p:spTree>
-      <p:nvGrpSpPr>
-        <p:cNvPr id="1" name="Shape 291"/>
-        <p:cNvGrpSpPr/>
-        <p:nvPr/>
-      </p:nvGrpSpPr>
-      <p:grpSpPr>
-        <a:xfrm>
-          <a:off x="0" y="0"/>
-          <a:ext cx="0" cy="0"/>
-          <a:chOff x="0" y="0"/>
-          <a:chExt cx="0" cy="0"/>
-        </a:xfrm>
-      </p:grpSpPr>
-      <p:pic>
-        <p:nvPicPr>
-          <p:cNvPr id="292" name="Google Shape;292;p22" descr="image.png"/>
-          <p:cNvPicPr preferRelativeResize="0"/>
-          <p:nvPr/>
-        </p:nvPicPr>
-        <p:blipFill rotWithShape="1">
-          <a:blip r:embed="rId3">
-            <a:alphaModFix/>
-          </a:blip>
-          <a:srcRect/>
-          <a:stretch/>
-        </p:blipFill>
-        <p:spPr>
-          <a:xfrm>
-            <a:off x="0" y="0"/>
-            <a:ext cx="12192000" cy="6858000"/>
-          </a:xfrm>
-          <a:prstGeom prst="rect">
-            <a:avLst/>
-          </a:prstGeom>
-          <a:noFill/>
-          <a:ln>
-            <a:noFill/>
-          </a:ln>
-        </p:spPr>
-      </p:pic>
-      <p:pic>
-        <p:nvPicPr>
-          <p:cNvPr id="293" name="Google Shape;293;p22" descr="image.png"/>
-          <p:cNvPicPr preferRelativeResize="0"/>
-          <p:nvPr/>
-        </p:nvPicPr>
-        <p:blipFill rotWithShape="1">
-          <a:blip r:embed="rId4">
-            <a:alphaModFix/>
-          </a:blip>
-          <a:srcRect/>
-          <a:stretch/>
-        </p:blipFill>
-        <p:spPr>
-          <a:xfrm>
-            <a:off x="1676400" y="2309812"/>
-            <a:ext cx="8839200" cy="2990850"/>
-          </a:xfrm>
-          <a:prstGeom prst="rect">
-            <a:avLst/>
-          </a:prstGeom>
-          <a:noFill/>
-          <a:ln>
-            <a:noFill/>
-          </a:ln>
-        </p:spPr>
-      </p:pic>
-      <p:pic>
-        <p:nvPicPr>
-          <p:cNvPr id="294" name="Google Shape;294;p22" descr="image.png"/>
-          <p:cNvPicPr preferRelativeResize="0"/>
-          <p:nvPr/>
-        </p:nvPicPr>
-        <p:blipFill rotWithShape="1">
-          <a:blip r:embed="rId5">
-            <a:alphaModFix/>
-          </a:blip>
-          <a:srcRect/>
-          <a:stretch/>
-        </p:blipFill>
-        <p:spPr>
-          <a:xfrm>
-            <a:off x="0" y="6381750"/>
-            <a:ext cx="12192000" cy="476250"/>
-          </a:xfrm>
-          <a:prstGeom prst="rect">
-            <a:avLst/>
-          </a:prstGeom>
-          <a:noFill/>
-          <a:ln>
-            <a:noFill/>
-          </a:ln>
-        </p:spPr>
-      </p:pic>
-      <p:sp>
-        <p:nvSpPr>
-          <p:cNvPr id="295" name="Google Shape;295;p22"/>
-          <p:cNvSpPr txBox="1"/>
-          <p:nvPr/>
-        </p:nvSpPr>
-        <p:spPr>
-          <a:xfrm>
-            <a:off x="571500" y="381001"/>
-            <a:ext cx="3657600" cy="969496"/>
-          </a:xfrm>
-          <a:prstGeom prst="rect">
-            <a:avLst/>
-          </a:prstGeom>
-          <a:noFill/>
-          <a:ln>
-            <a:noFill/>
-          </a:ln>
-        </p:spPr>
-        <p:txBody>
-          <a:bodyPr spcFirstLastPara="1" wrap="square" lIns="0" tIns="0" rIns="0" bIns="0" anchor="t" anchorCtr="0">
-            <a:spAutoFit/>
-          </a:bodyPr>
-          <a:lstStyle/>
-          <a:p>
-            <a:pPr marL="0" marR="0" lvl="0" indent="0" algn="l" rtl="0">
-              <a:spcBef>
-                <a:spcPts val="0"/>
-              </a:spcBef>
-              <a:spcAft>
-                <a:spcPts val="0"/>
-              </a:spcAft>
-              <a:buNone/>
-            </a:pPr>
-            <a:r>
-              <a:rPr lang="en-US" sz="3150" b="1" i="0" u="none" strike="noStrike" cap="none">
-                <a:solidFill>
-                  <a:srgbClr val="003366"/>
-                </a:solidFill>
-                <a:latin typeface="Roboto"/>
-                <a:ea typeface="Roboto"/>
-                <a:cs typeface="Roboto"/>
-                <a:sym typeface="Roboto"/>
-              </a:rPr>
-              <a:t>Chi Tiết Bảng: Users</a:t>
-            </a:r>
-            <a:endParaRPr/>
-          </a:p>
-        </p:txBody>
-      </p:sp>
-      <p:sp>
-        <p:nvSpPr>
-          <p:cNvPr id="296" name="Google Shape;296;p22"/>
-          <p:cNvSpPr txBox="1"/>
-          <p:nvPr/>
-        </p:nvSpPr>
-        <p:spPr>
-          <a:xfrm>
-            <a:off x="628651" y="6463061"/>
-            <a:ext cx="876300" cy="323165"/>
-          </a:xfrm>
-          <a:prstGeom prst="rect">
-            <a:avLst/>
-          </a:prstGeom>
-          <a:noFill/>
-          <a:ln>
-            <a:noFill/>
-          </a:ln>
-        </p:spPr>
-        <p:txBody>
-          <a:bodyPr spcFirstLastPara="1" wrap="square" lIns="0" tIns="0" rIns="0" bIns="0" anchor="ctr" anchorCtr="0">
-            <a:spAutoFit/>
-          </a:bodyPr>
-          <a:lstStyle/>
-          <a:p>
-            <a:pPr marL="0" marR="0" lvl="0" indent="0" algn="l" rtl="0">
-              <a:spcBef>
-                <a:spcPts val="0"/>
-              </a:spcBef>
-              <a:spcAft>
-                <a:spcPts val="0"/>
-              </a:spcAft>
-              <a:buNone/>
-            </a:pPr>
-            <a:r>
-              <a:rPr lang="en-US" sz="1050" b="1" i="0" u="none" strike="noStrike" cap="none">
-                <a:solidFill>
-                  <a:srgbClr val="003366"/>
-                </a:solidFill>
-                <a:latin typeface="Open Sans SemiBold"/>
-                <a:ea typeface="Open Sans SemiBold"/>
-                <a:cs typeface="Open Sans SemiBold"/>
-                <a:sym typeface="Open Sans SemiBold"/>
-              </a:rPr>
-              <a:t>Mytee Studio</a:t>
-            </a:r>
-            <a:endParaRPr/>
-          </a:p>
-        </p:txBody>
-      </p:sp>
-      <p:sp>
-        <p:nvSpPr>
-          <p:cNvPr id="297" name="Google Shape;297;p22"/>
-          <p:cNvSpPr txBox="1"/>
-          <p:nvPr/>
-        </p:nvSpPr>
-        <p:spPr>
-          <a:xfrm>
-            <a:off x="11306180" y="6534156"/>
-            <a:ext cx="504825" cy="161583"/>
-          </a:xfrm>
-          <a:prstGeom prst="rect">
-            <a:avLst/>
-          </a:prstGeom>
-          <a:noFill/>
-          <a:ln>
-            <a:noFill/>
-          </a:ln>
-        </p:spPr>
-        <p:txBody>
-          <a:bodyPr spcFirstLastPara="1" wrap="square" lIns="0" tIns="0" rIns="0" bIns="0" anchor="t" anchorCtr="0">
-            <a:spAutoFit/>
-          </a:bodyPr>
-          <a:lstStyle/>
-          <a:p>
-            <a:pPr marL="0" marR="0" lvl="0" indent="0" algn="l" rtl="0">
-              <a:spcBef>
-                <a:spcPts val="0"/>
-              </a:spcBef>
-              <a:spcAft>
-                <a:spcPts val="0"/>
-              </a:spcAft>
-              <a:buNone/>
-            </a:pPr>
-            <a:r>
-              <a:rPr lang="en-US" sz="1050" b="0" i="0" u="none" strike="noStrike" cap="none">
-                <a:solidFill>
-                  <a:srgbClr val="64748B"/>
-                </a:solidFill>
-                <a:latin typeface="Open Sans"/>
-                <a:ea typeface="Open Sans"/>
-                <a:cs typeface="Open Sans"/>
-                <a:sym typeface="Open Sans"/>
-              </a:rPr>
-              <a:t>Slide 10</a:t>
-            </a:r>
-            <a:endParaRPr/>
-          </a:p>
-        </p:txBody>
-      </p:sp>
-      <p:sp>
-        <p:nvSpPr>
-          <p:cNvPr id="299" name="Google Shape;299;p22"/>
-          <p:cNvSpPr txBox="1"/>
-          <p:nvPr/>
-        </p:nvSpPr>
-        <p:spPr>
-          <a:xfrm>
-            <a:off x="2009778" y="2595568"/>
-            <a:ext cx="8631079" cy="276225"/>
-          </a:xfrm>
-          <a:prstGeom prst="rect">
-            <a:avLst/>
-          </a:prstGeom>
-          <a:noFill/>
-          <a:ln>
-            <a:noFill/>
-          </a:ln>
-        </p:spPr>
-        <p:txBody>
-          <a:bodyPr spcFirstLastPara="1" wrap="square" lIns="0" tIns="0" rIns="0" bIns="0" anchor="t" anchorCtr="0">
-            <a:spAutoFit/>
-          </a:bodyPr>
-          <a:lstStyle/>
-          <a:p>
-            <a:pPr marL="0" marR="0" lvl="0" indent="0" algn="l" rtl="0">
-              <a:spcBef>
-                <a:spcPts val="0"/>
-              </a:spcBef>
-              <a:spcAft>
-                <a:spcPts val="0"/>
-              </a:spcAft>
-              <a:buNone/>
-            </a:pPr>
-            <a:r>
-              <a:rPr lang="en-US" sz="1800" b="1" i="0" u="none" strike="noStrike" cap="none">
-                <a:solidFill>
-                  <a:srgbClr val="003366"/>
-                </a:solidFill>
-                <a:latin typeface="Roboto"/>
-                <a:ea typeface="Roboto"/>
-                <a:cs typeface="Roboto"/>
-                <a:sym typeface="Roboto"/>
-              </a:rPr>
-              <a:t>Schema Structure</a:t>
-            </a:r>
-            <a:endParaRPr/>
-          </a:p>
-        </p:txBody>
-      </p:sp>
-      <p:sp>
-        <p:nvSpPr>
-          <p:cNvPr id="300" name="Google Shape;300;p22"/>
-          <p:cNvSpPr/>
-          <p:nvPr/>
-        </p:nvSpPr>
-        <p:spPr>
-          <a:xfrm>
-            <a:off x="2009777" y="2957518"/>
-            <a:ext cx="8220075" cy="9525"/>
-          </a:xfrm>
-          <a:prstGeom prst="rect">
-            <a:avLst/>
-          </a:prstGeom>
-          <a:solidFill>
-            <a:srgbClr val="CBD5E1"/>
-          </a:solidFill>
-          <a:ln>
-            <a:noFill/>
-          </a:ln>
-        </p:spPr>
-        <p:txBody>
-          <a:bodyPr spcFirstLastPara="1" wrap="square" lIns="91425" tIns="45700" rIns="91425" bIns="45700" anchor="ctr" anchorCtr="0">
-            <a:noAutofit/>
-          </a:bodyPr>
-          <a:lstStyle/>
-          <a:p>
-            <a:pPr marL="0" marR="0" lvl="0" indent="0" algn="ctr" rtl="0">
-              <a:spcBef>
-                <a:spcPts val="0"/>
-              </a:spcBef>
-              <a:spcAft>
-                <a:spcPts val="0"/>
-              </a:spcAft>
-              <a:buNone/>
-            </a:pPr>
-            <a:endParaRPr sz="1800" b="0" i="0" u="none" strike="noStrike" cap="none">
-              <a:solidFill>
-                <a:schemeClr val="dk1"/>
-              </a:solidFill>
-              <a:latin typeface="Calibri"/>
-              <a:ea typeface="Calibri"/>
-              <a:cs typeface="Calibri"/>
-              <a:sym typeface="Calibri"/>
-            </a:endParaRPr>
-          </a:p>
-        </p:txBody>
-      </p:sp>
-      <p:pic>
-        <p:nvPicPr>
-          <p:cNvPr id="301" name="Google Shape;301;p22" descr="image.png"/>
-          <p:cNvPicPr preferRelativeResize="0"/>
-          <p:nvPr/>
-        </p:nvPicPr>
-        <p:blipFill rotWithShape="1">
-          <a:blip r:embed="rId6">
-            <a:alphaModFix/>
-          </a:blip>
-          <a:srcRect/>
-          <a:stretch/>
-        </p:blipFill>
-        <p:spPr>
-          <a:xfrm>
-            <a:off x="381000" y="6557962"/>
-            <a:ext cx="152400" cy="133350"/>
-          </a:xfrm>
-          <a:prstGeom prst="rect">
-            <a:avLst/>
-          </a:prstGeom>
-          <a:noFill/>
-          <a:ln>
-            <a:noFill/>
-          </a:ln>
-        </p:spPr>
-      </p:pic>
-      <p:sp>
-        <p:nvSpPr>
-          <p:cNvPr id="302" name="Google Shape;302;p22"/>
-          <p:cNvSpPr txBox="1"/>
-          <p:nvPr/>
-        </p:nvSpPr>
-        <p:spPr>
-          <a:xfrm>
-            <a:off x="2009775" y="3157538"/>
-            <a:ext cx="1905000" cy="230832"/>
-          </a:xfrm>
-          <a:prstGeom prst="rect">
-            <a:avLst/>
-          </a:prstGeom>
-          <a:noFill/>
-          <a:ln>
-            <a:noFill/>
-          </a:ln>
-        </p:spPr>
-        <p:txBody>
-          <a:bodyPr spcFirstLastPara="1" wrap="square" lIns="0" tIns="0" rIns="0" bIns="0" anchor="t" anchorCtr="0">
-            <a:spAutoFit/>
-          </a:bodyPr>
-          <a:lstStyle/>
-          <a:p>
-            <a:pPr marL="0" marR="0" lvl="0" indent="0" algn="l" rtl="0">
-              <a:spcBef>
-                <a:spcPts val="0"/>
-              </a:spcBef>
-              <a:spcAft>
-                <a:spcPts val="0"/>
-              </a:spcAft>
-              <a:buNone/>
-            </a:pPr>
-            <a:r>
-              <a:rPr lang="en-US" sz="1500" b="0" i="0" u="none" strike="noStrike" cap="none">
-                <a:solidFill>
-                  <a:srgbClr val="000000"/>
-                </a:solidFill>
-                <a:latin typeface="Courier New"/>
-                <a:ea typeface="Courier New"/>
-                <a:cs typeface="Courier New"/>
-                <a:sym typeface="Courier New"/>
-              </a:rPr>
-              <a:t>id</a:t>
-            </a:r>
-            <a:endParaRPr/>
-          </a:p>
-        </p:txBody>
-      </p:sp>
-      <p:sp>
-        <p:nvSpPr>
-          <p:cNvPr id="303" name="Google Shape;303;p22"/>
-          <p:cNvSpPr txBox="1"/>
-          <p:nvPr/>
-        </p:nvSpPr>
-        <p:spPr>
-          <a:xfrm>
-            <a:off x="4105279" y="3157538"/>
-            <a:ext cx="6124575" cy="230832"/>
-          </a:xfrm>
-          <a:prstGeom prst="rect">
-            <a:avLst/>
-          </a:prstGeom>
-          <a:noFill/>
-          <a:ln>
-            <a:noFill/>
-          </a:ln>
-        </p:spPr>
-        <p:txBody>
-          <a:bodyPr spcFirstLastPara="1" wrap="square" lIns="0" tIns="0" rIns="0" bIns="0" anchor="t" anchorCtr="0">
-            <a:spAutoFit/>
-          </a:bodyPr>
-          <a:lstStyle/>
-          <a:p>
-            <a:pPr marL="0" marR="0" lvl="0" indent="0" algn="l" rtl="0">
-              <a:spcBef>
-                <a:spcPts val="0"/>
-              </a:spcBef>
-              <a:spcAft>
-                <a:spcPts val="0"/>
-              </a:spcAft>
-              <a:buNone/>
-            </a:pPr>
-            <a:r>
-              <a:rPr lang="en-US" sz="1500" b="0" i="0" u="none" strike="noStrike" cap="none">
-                <a:solidFill>
-                  <a:srgbClr val="64748B"/>
-                </a:solidFill>
-                <a:latin typeface="Courier New"/>
-                <a:ea typeface="Courier New"/>
-                <a:cs typeface="Courier New"/>
-                <a:sym typeface="Courier New"/>
-              </a:rPr>
-              <a:t>PK, BigInt, Auto Increment</a:t>
-            </a:r>
-            <a:endParaRPr/>
-          </a:p>
-        </p:txBody>
-      </p:sp>
-      <p:sp>
-        <p:nvSpPr>
-          <p:cNvPr id="304" name="Google Shape;304;p22"/>
-          <p:cNvSpPr txBox="1"/>
-          <p:nvPr/>
-        </p:nvSpPr>
-        <p:spPr>
-          <a:xfrm>
-            <a:off x="2009775" y="3567113"/>
-            <a:ext cx="1905000" cy="230832"/>
-          </a:xfrm>
-          <a:prstGeom prst="rect">
-            <a:avLst/>
-          </a:prstGeom>
-          <a:noFill/>
-          <a:ln>
-            <a:noFill/>
-          </a:ln>
-        </p:spPr>
-        <p:txBody>
-          <a:bodyPr spcFirstLastPara="1" wrap="square" lIns="0" tIns="0" rIns="0" bIns="0" anchor="t" anchorCtr="0">
-            <a:spAutoFit/>
-          </a:bodyPr>
-          <a:lstStyle/>
-          <a:p>
-            <a:pPr marL="0" marR="0" lvl="0" indent="0" algn="l" rtl="0">
-              <a:spcBef>
-                <a:spcPts val="0"/>
-              </a:spcBef>
-              <a:spcAft>
-                <a:spcPts val="0"/>
-              </a:spcAft>
-              <a:buNone/>
-            </a:pPr>
-            <a:r>
-              <a:rPr lang="en-US" sz="1500" b="0" i="0" u="none" strike="noStrike" cap="none">
-                <a:solidFill>
-                  <a:srgbClr val="000000"/>
-                </a:solidFill>
-                <a:latin typeface="Courier New"/>
-                <a:ea typeface="Courier New"/>
-                <a:cs typeface="Courier New"/>
-                <a:sym typeface="Courier New"/>
-              </a:rPr>
-              <a:t>name</a:t>
-            </a:r>
-            <a:endParaRPr/>
-          </a:p>
-        </p:txBody>
-      </p:sp>
-      <p:sp>
-        <p:nvSpPr>
-          <p:cNvPr id="305" name="Google Shape;305;p22"/>
-          <p:cNvSpPr txBox="1"/>
-          <p:nvPr/>
-        </p:nvSpPr>
-        <p:spPr>
-          <a:xfrm>
-            <a:off x="4105279" y="3567113"/>
-            <a:ext cx="6124575" cy="230832"/>
-          </a:xfrm>
-          <a:prstGeom prst="rect">
-            <a:avLst/>
-          </a:prstGeom>
-          <a:noFill/>
-          <a:ln>
-            <a:noFill/>
-          </a:ln>
-        </p:spPr>
-        <p:txBody>
-          <a:bodyPr spcFirstLastPara="1" wrap="square" lIns="0" tIns="0" rIns="0" bIns="0" anchor="t" anchorCtr="0">
-            <a:spAutoFit/>
-          </a:bodyPr>
-          <a:lstStyle/>
-          <a:p>
-            <a:pPr marL="0" marR="0" lvl="0" indent="0" algn="l" rtl="0">
-              <a:spcBef>
-                <a:spcPts val="0"/>
-              </a:spcBef>
-              <a:spcAft>
-                <a:spcPts val="0"/>
-              </a:spcAft>
-              <a:buNone/>
-            </a:pPr>
-            <a:r>
-              <a:rPr lang="en-US" sz="1500" b="0" i="0" u="none" strike="noStrike" cap="none">
-                <a:solidFill>
-                  <a:srgbClr val="64748B"/>
-                </a:solidFill>
-                <a:latin typeface="Courier New"/>
-                <a:ea typeface="Courier New"/>
-                <a:cs typeface="Courier New"/>
-                <a:sym typeface="Courier New"/>
-              </a:rPr>
-              <a:t>Varchar(255) - Tên hiển thị</a:t>
-            </a:r>
-            <a:endParaRPr/>
-          </a:p>
-        </p:txBody>
-      </p:sp>
-      <p:sp>
-        <p:nvSpPr>
-          <p:cNvPr id="306" name="Google Shape;306;p22"/>
-          <p:cNvSpPr txBox="1"/>
-          <p:nvPr/>
-        </p:nvSpPr>
-        <p:spPr>
-          <a:xfrm>
-            <a:off x="2009775" y="3976688"/>
-            <a:ext cx="1905000" cy="230832"/>
-          </a:xfrm>
-          <a:prstGeom prst="rect">
-            <a:avLst/>
-          </a:prstGeom>
-          <a:noFill/>
-          <a:ln>
-            <a:noFill/>
-          </a:ln>
-        </p:spPr>
-        <p:txBody>
-          <a:bodyPr spcFirstLastPara="1" wrap="square" lIns="0" tIns="0" rIns="0" bIns="0" anchor="t" anchorCtr="0">
-            <a:spAutoFit/>
-          </a:bodyPr>
-          <a:lstStyle/>
-          <a:p>
-            <a:pPr marL="0" marR="0" lvl="0" indent="0" algn="l" rtl="0">
-              <a:spcBef>
-                <a:spcPts val="0"/>
-              </a:spcBef>
-              <a:spcAft>
-                <a:spcPts val="0"/>
-              </a:spcAft>
-              <a:buNone/>
-            </a:pPr>
-            <a:r>
-              <a:rPr lang="en-US" sz="1500" b="0" i="0" u="none" strike="noStrike" cap="none">
-                <a:solidFill>
-                  <a:srgbClr val="000000"/>
-                </a:solidFill>
-                <a:latin typeface="Courier New"/>
-                <a:ea typeface="Courier New"/>
-                <a:cs typeface="Courier New"/>
-                <a:sym typeface="Courier New"/>
-              </a:rPr>
-              <a:t>email</a:t>
-            </a:r>
-            <a:endParaRPr/>
-          </a:p>
-        </p:txBody>
-      </p:sp>
-      <p:sp>
-        <p:nvSpPr>
-          <p:cNvPr id="307" name="Google Shape;307;p22"/>
-          <p:cNvSpPr txBox="1"/>
-          <p:nvPr/>
-        </p:nvSpPr>
-        <p:spPr>
-          <a:xfrm>
-            <a:off x="4105279" y="3976688"/>
-            <a:ext cx="6124575" cy="230832"/>
-          </a:xfrm>
-          <a:prstGeom prst="rect">
-            <a:avLst/>
-          </a:prstGeom>
-          <a:noFill/>
-          <a:ln>
-            <a:noFill/>
-          </a:ln>
-        </p:spPr>
-        <p:txBody>
-          <a:bodyPr spcFirstLastPara="1" wrap="square" lIns="0" tIns="0" rIns="0" bIns="0" anchor="t" anchorCtr="0">
-            <a:spAutoFit/>
-          </a:bodyPr>
-          <a:lstStyle/>
-          <a:p>
-            <a:pPr marL="0" marR="0" lvl="0" indent="0" algn="l" rtl="0">
-              <a:spcBef>
-                <a:spcPts val="0"/>
-              </a:spcBef>
-              <a:spcAft>
-                <a:spcPts val="0"/>
-              </a:spcAft>
-              <a:buNone/>
-            </a:pPr>
-            <a:r>
-              <a:rPr lang="en-US" sz="1500" b="0" i="0" u="none" strike="noStrike" cap="none">
-                <a:solidFill>
-                  <a:srgbClr val="64748B"/>
-                </a:solidFill>
-                <a:latin typeface="Courier New"/>
-                <a:ea typeface="Courier New"/>
-                <a:cs typeface="Courier New"/>
-                <a:sym typeface="Courier New"/>
-              </a:rPr>
-              <a:t>Varchar(255) - Unique, Đăng nhập</a:t>
-            </a:r>
-            <a:endParaRPr/>
-          </a:p>
-        </p:txBody>
-      </p:sp>
-      <p:sp>
-        <p:nvSpPr>
-          <p:cNvPr id="308" name="Google Shape;308;p22"/>
-          <p:cNvSpPr txBox="1"/>
-          <p:nvPr/>
-        </p:nvSpPr>
-        <p:spPr>
-          <a:xfrm>
-            <a:off x="2009775" y="4386263"/>
-            <a:ext cx="1905000" cy="230832"/>
-          </a:xfrm>
-          <a:prstGeom prst="rect">
-            <a:avLst/>
-          </a:prstGeom>
-          <a:noFill/>
-          <a:ln>
-            <a:noFill/>
-          </a:ln>
-        </p:spPr>
-        <p:txBody>
-          <a:bodyPr spcFirstLastPara="1" wrap="square" lIns="0" tIns="0" rIns="0" bIns="0" anchor="t" anchorCtr="0">
-            <a:spAutoFit/>
-          </a:bodyPr>
-          <a:lstStyle/>
-          <a:p>
-            <a:pPr marL="0" marR="0" lvl="0" indent="0" algn="l" rtl="0">
-              <a:spcBef>
-                <a:spcPts val="0"/>
-              </a:spcBef>
-              <a:spcAft>
-                <a:spcPts val="0"/>
-              </a:spcAft>
-              <a:buNone/>
-            </a:pPr>
-            <a:r>
-              <a:rPr lang="en-US" sz="1500" b="0" i="0" u="none" strike="noStrike" cap="none">
-                <a:solidFill>
-                  <a:srgbClr val="000000"/>
-                </a:solidFill>
-                <a:latin typeface="Courier New"/>
-                <a:ea typeface="Courier New"/>
-                <a:cs typeface="Courier New"/>
-                <a:sym typeface="Courier New"/>
-              </a:rPr>
-              <a:t>password</a:t>
-            </a:r>
-            <a:endParaRPr/>
-          </a:p>
-        </p:txBody>
-      </p:sp>
-      <p:sp>
-        <p:nvSpPr>
-          <p:cNvPr id="309" name="Google Shape;309;p22"/>
-          <p:cNvSpPr txBox="1"/>
-          <p:nvPr/>
-        </p:nvSpPr>
-        <p:spPr>
-          <a:xfrm>
-            <a:off x="4105279" y="4386263"/>
-            <a:ext cx="6124575" cy="230832"/>
-          </a:xfrm>
-          <a:prstGeom prst="rect">
-            <a:avLst/>
-          </a:prstGeom>
-          <a:noFill/>
-          <a:ln>
-            <a:noFill/>
-          </a:ln>
-        </p:spPr>
-        <p:txBody>
-          <a:bodyPr spcFirstLastPara="1" wrap="square" lIns="0" tIns="0" rIns="0" bIns="0" anchor="t" anchorCtr="0">
-            <a:spAutoFit/>
-          </a:bodyPr>
-          <a:lstStyle/>
-          <a:p>
-            <a:pPr marL="0" marR="0" lvl="0" indent="0" algn="l" rtl="0">
-              <a:spcBef>
-                <a:spcPts val="0"/>
-              </a:spcBef>
-              <a:spcAft>
-                <a:spcPts val="0"/>
-              </a:spcAft>
-              <a:buNone/>
-            </a:pPr>
-            <a:r>
-              <a:rPr lang="en-US" sz="1500" b="0" i="0" u="none" strike="noStrike" cap="none">
-                <a:solidFill>
-                  <a:srgbClr val="64748B"/>
-                </a:solidFill>
-                <a:latin typeface="Courier New"/>
-                <a:ea typeface="Courier New"/>
-                <a:cs typeface="Courier New"/>
-                <a:sym typeface="Courier New"/>
-              </a:rPr>
-              <a:t>Varchar - Hash bảo mật</a:t>
-            </a:r>
-            <a:endParaRPr/>
-          </a:p>
-        </p:txBody>
-      </p:sp>
-      <p:sp>
-        <p:nvSpPr>
-          <p:cNvPr id="310" name="Google Shape;310;p22"/>
-          <p:cNvSpPr txBox="1"/>
-          <p:nvPr/>
-        </p:nvSpPr>
-        <p:spPr>
-          <a:xfrm>
-            <a:off x="2009775" y="4795838"/>
-            <a:ext cx="1905000" cy="230832"/>
-          </a:xfrm>
-          <a:prstGeom prst="rect">
-            <a:avLst/>
-          </a:prstGeom>
-          <a:noFill/>
-          <a:ln>
-            <a:noFill/>
-          </a:ln>
-        </p:spPr>
-        <p:txBody>
-          <a:bodyPr spcFirstLastPara="1" wrap="square" lIns="0" tIns="0" rIns="0" bIns="0" anchor="t" anchorCtr="0">
-            <a:spAutoFit/>
-          </a:bodyPr>
-          <a:lstStyle/>
-          <a:p>
-            <a:pPr marL="0" marR="0" lvl="0" indent="0" algn="l" rtl="0">
-              <a:spcBef>
-                <a:spcPts val="0"/>
-              </a:spcBef>
-              <a:spcAft>
-                <a:spcPts val="0"/>
-              </a:spcAft>
-              <a:buNone/>
-            </a:pPr>
-            <a:r>
-              <a:rPr lang="en-US" sz="1500" b="0" i="0" u="none" strike="noStrike" cap="none">
-                <a:solidFill>
-                  <a:srgbClr val="000000"/>
-                </a:solidFill>
-                <a:latin typeface="Courier New"/>
-                <a:ea typeface="Courier New"/>
-                <a:cs typeface="Courier New"/>
-                <a:sym typeface="Courier New"/>
-              </a:rPr>
-              <a:t>role</a:t>
-            </a:r>
-            <a:endParaRPr/>
-          </a:p>
-        </p:txBody>
-      </p:sp>
-      <p:sp>
-        <p:nvSpPr>
-          <p:cNvPr id="311" name="Google Shape;311;p22"/>
-          <p:cNvSpPr txBox="1"/>
-          <p:nvPr/>
-        </p:nvSpPr>
-        <p:spPr>
-          <a:xfrm>
-            <a:off x="4105279" y="4795838"/>
-            <a:ext cx="6124575" cy="230832"/>
-          </a:xfrm>
-          <a:prstGeom prst="rect">
-            <a:avLst/>
-          </a:prstGeom>
-          <a:noFill/>
-          <a:ln>
-            <a:noFill/>
-          </a:ln>
-        </p:spPr>
-        <p:txBody>
-          <a:bodyPr spcFirstLastPara="1" wrap="square" lIns="0" tIns="0" rIns="0" bIns="0" anchor="t" anchorCtr="0">
-            <a:spAutoFit/>
-          </a:bodyPr>
-          <a:lstStyle/>
-          <a:p>
-            <a:pPr marL="0" marR="0" lvl="0" indent="0" algn="l" rtl="0">
-              <a:spcBef>
-                <a:spcPts val="0"/>
-              </a:spcBef>
-              <a:spcAft>
-                <a:spcPts val="0"/>
-              </a:spcAft>
-              <a:buNone/>
-            </a:pPr>
-            <a:r>
-              <a:rPr lang="en-US" sz="1500" b="0" i="0" u="none" strike="noStrike" cap="none">
-                <a:solidFill>
-                  <a:srgbClr val="64748B"/>
-                </a:solidFill>
-                <a:latin typeface="Courier New"/>
-                <a:ea typeface="Courier New"/>
-                <a:cs typeface="Courier New"/>
-                <a:sym typeface="Courier New"/>
-              </a:rPr>
-              <a:t>Enum('admin', 'customer') - Phân quyền</a:t>
-            </a:r>
-            <a:endParaRPr/>
-          </a:p>
-        </p:txBody>
-      </p:sp>
-    </p:spTree>
-  </p:cSld>
-  <p:clrMapOvr>
-    <a:masterClrMapping/>
-  </p:clrMapOvr>
-  <p:timing>
-    <p:tnLst>
-      <p:par>
-        <p:cTn id="1" dur="indefinite" restart="never" nodeType="tmRoot"/>
-      </p:par>
-    </p:tnLst>
-  </p:timing>
-</p:sld>
-</file>
-
-<file path=ppt/slides/slide11.xml><?xml version="1.0" encoding="utf-8"?>
-<p:sld xmlns:a="http://schemas.openxmlformats.org/drawingml/2006/main" xmlns:r="http://schemas.openxmlformats.org/officeDocument/2006/relationships" xmlns:p="http://schemas.openxmlformats.org/presentationml/2006/main">
-  <p:cSld>
-    <p:bg>
-      <p:bgPr>
-        <a:solidFill>
-          <a:srgbClr val="FFFFFF"/>
-        </a:solidFill>
-        <a:effectLst/>
-      </p:bgPr>
-    </p:bg>
-    <p:spTree>
-      <p:nvGrpSpPr>
-        <p:cNvPr id="1" name="Shape 315"/>
-        <p:cNvGrpSpPr/>
-        <p:nvPr/>
-      </p:nvGrpSpPr>
-      <p:grpSpPr>
-        <a:xfrm>
-          <a:off x="0" y="0"/>
-          <a:ext cx="0" cy="0"/>
-          <a:chOff x="0" y="0"/>
-          <a:chExt cx="0" cy="0"/>
-        </a:xfrm>
-      </p:grpSpPr>
-      <p:pic>
-        <p:nvPicPr>
-          <p:cNvPr id="316" name="Google Shape;316;p23" descr="image.png"/>
-          <p:cNvPicPr preferRelativeResize="0"/>
-          <p:nvPr/>
-        </p:nvPicPr>
-        <p:blipFill rotWithShape="1">
-          <a:blip r:embed="rId3">
-            <a:alphaModFix/>
-          </a:blip>
-          <a:srcRect/>
-          <a:stretch/>
-        </p:blipFill>
-        <p:spPr>
-          <a:xfrm>
-            <a:off x="0" y="0"/>
-            <a:ext cx="12192000" cy="6858000"/>
-          </a:xfrm>
-          <a:prstGeom prst="rect">
-            <a:avLst/>
-          </a:prstGeom>
-          <a:noFill/>
-          <a:ln>
-            <a:noFill/>
-          </a:ln>
-        </p:spPr>
-      </p:pic>
-      <p:pic>
-        <p:nvPicPr>
-          <p:cNvPr id="317" name="Google Shape;317;p23" descr="image.png"/>
-          <p:cNvPicPr preferRelativeResize="0"/>
-          <p:nvPr/>
-        </p:nvPicPr>
-        <p:blipFill rotWithShape="1">
-          <a:blip r:embed="rId4">
-            <a:alphaModFix/>
-          </a:blip>
-          <a:srcRect/>
-          <a:stretch/>
-        </p:blipFill>
-        <p:spPr>
-          <a:xfrm>
-            <a:off x="571505" y="2786062"/>
-            <a:ext cx="5286375" cy="2038350"/>
-          </a:xfrm>
-          <a:prstGeom prst="rect">
-            <a:avLst/>
-          </a:prstGeom>
-          <a:noFill/>
-          <a:ln>
-            <a:noFill/>
-          </a:ln>
-        </p:spPr>
-      </p:pic>
-      <p:pic>
-        <p:nvPicPr>
-          <p:cNvPr id="318" name="Google Shape;318;p23" descr="image.png"/>
-          <p:cNvPicPr preferRelativeResize="0"/>
-          <p:nvPr/>
-        </p:nvPicPr>
-        <p:blipFill rotWithShape="1">
-          <a:blip r:embed="rId5">
-            <a:alphaModFix/>
-          </a:blip>
-          <a:srcRect/>
-          <a:stretch/>
-        </p:blipFill>
-        <p:spPr>
-          <a:xfrm>
-            <a:off x="0" y="6381750"/>
-            <a:ext cx="12192000" cy="476250"/>
-          </a:xfrm>
-          <a:prstGeom prst="rect">
-            <a:avLst/>
-          </a:prstGeom>
-          <a:noFill/>
-          <a:ln>
-            <a:noFill/>
-          </a:ln>
-        </p:spPr>
-      </p:pic>
-      <p:sp>
-        <p:nvSpPr>
-          <p:cNvPr id="319" name="Google Shape;319;p23"/>
-          <p:cNvSpPr txBox="1"/>
-          <p:nvPr/>
-        </p:nvSpPr>
-        <p:spPr>
-          <a:xfrm>
-            <a:off x="571504" y="381001"/>
-            <a:ext cx="4238625" cy="969496"/>
-          </a:xfrm>
-          <a:prstGeom prst="rect">
-            <a:avLst/>
-          </a:prstGeom>
-          <a:noFill/>
-          <a:ln>
-            <a:noFill/>
-          </a:ln>
-        </p:spPr>
-        <p:txBody>
-          <a:bodyPr spcFirstLastPara="1" wrap="square" lIns="0" tIns="0" rIns="0" bIns="0" anchor="t" anchorCtr="0">
-            <a:spAutoFit/>
-          </a:bodyPr>
-          <a:lstStyle/>
-          <a:p>
-            <a:pPr marL="0" marR="0" lvl="0" indent="0" algn="l" rtl="0">
-              <a:spcBef>
-                <a:spcPts val="0"/>
-              </a:spcBef>
-              <a:spcAft>
-                <a:spcPts val="0"/>
-              </a:spcAft>
-              <a:buNone/>
-            </a:pPr>
-            <a:r>
-              <a:rPr lang="en-US" sz="3150" b="1" i="0" u="none" strike="noStrike" cap="none">
-                <a:solidFill>
-                  <a:srgbClr val="003366"/>
-                </a:solidFill>
-                <a:latin typeface="Roboto"/>
-                <a:ea typeface="Roboto"/>
-                <a:cs typeface="Roboto"/>
-                <a:sym typeface="Roboto"/>
-              </a:rPr>
-              <a:t>Chi Tiết Bảng: Products</a:t>
-            </a:r>
-            <a:endParaRPr/>
-          </a:p>
-        </p:txBody>
-      </p:sp>
-      <p:sp>
-        <p:nvSpPr>
-          <p:cNvPr id="320" name="Google Shape;320;p23"/>
-          <p:cNvSpPr txBox="1"/>
-          <p:nvPr/>
-        </p:nvSpPr>
-        <p:spPr>
-          <a:xfrm>
-            <a:off x="628651" y="6463061"/>
-            <a:ext cx="876300" cy="323165"/>
-          </a:xfrm>
-          <a:prstGeom prst="rect">
-            <a:avLst/>
-          </a:prstGeom>
-          <a:noFill/>
-          <a:ln>
-            <a:noFill/>
-          </a:ln>
-        </p:spPr>
-        <p:txBody>
-          <a:bodyPr spcFirstLastPara="1" wrap="square" lIns="0" tIns="0" rIns="0" bIns="0" anchor="ctr" anchorCtr="0">
-            <a:spAutoFit/>
-          </a:bodyPr>
-          <a:lstStyle/>
-          <a:p>
-            <a:pPr marL="0" marR="0" lvl="0" indent="0" algn="l" rtl="0">
-              <a:spcBef>
-                <a:spcPts val="0"/>
-              </a:spcBef>
-              <a:spcAft>
-                <a:spcPts val="0"/>
-              </a:spcAft>
-              <a:buNone/>
-            </a:pPr>
-            <a:r>
-              <a:rPr lang="en-US" sz="1050" b="1" i="0" u="none" strike="noStrike" cap="none">
-                <a:solidFill>
-                  <a:srgbClr val="003366"/>
-                </a:solidFill>
-                <a:latin typeface="Open Sans SemiBold"/>
-                <a:ea typeface="Open Sans SemiBold"/>
-                <a:cs typeface="Open Sans SemiBold"/>
-                <a:sym typeface="Open Sans SemiBold"/>
-              </a:rPr>
-              <a:t>Mytee Studio</a:t>
-            </a:r>
-            <a:endParaRPr/>
-          </a:p>
-        </p:txBody>
-      </p:sp>
-      <p:sp>
-        <p:nvSpPr>
-          <p:cNvPr id="321" name="Google Shape;321;p23"/>
-          <p:cNvSpPr txBox="1"/>
-          <p:nvPr/>
-        </p:nvSpPr>
-        <p:spPr>
-          <a:xfrm>
-            <a:off x="11306180" y="6534156"/>
-            <a:ext cx="504825" cy="161583"/>
-          </a:xfrm>
-          <a:prstGeom prst="rect">
-            <a:avLst/>
-          </a:prstGeom>
-          <a:noFill/>
-          <a:ln>
-            <a:noFill/>
-          </a:ln>
-        </p:spPr>
-        <p:txBody>
-          <a:bodyPr spcFirstLastPara="1" wrap="square" lIns="0" tIns="0" rIns="0" bIns="0" anchor="t" anchorCtr="0">
-            <a:spAutoFit/>
-          </a:bodyPr>
-          <a:lstStyle/>
-          <a:p>
-            <a:pPr marL="0" marR="0" lvl="0" indent="0" algn="l" rtl="0">
-              <a:spcBef>
-                <a:spcPts val="0"/>
-              </a:spcBef>
-              <a:spcAft>
-                <a:spcPts val="0"/>
-              </a:spcAft>
-              <a:buNone/>
-            </a:pPr>
-            <a:r>
-              <a:rPr lang="en-US" sz="1050" b="0" i="0" u="none" strike="noStrike" cap="none">
-                <a:solidFill>
-                  <a:srgbClr val="64748B"/>
-                </a:solidFill>
-                <a:latin typeface="Open Sans"/>
-                <a:ea typeface="Open Sans"/>
-                <a:cs typeface="Open Sans"/>
-                <a:sym typeface="Open Sans"/>
-              </a:rPr>
-              <a:t>Slide 11</a:t>
-            </a:r>
-            <a:endParaRPr/>
-          </a:p>
-        </p:txBody>
-      </p:sp>
-      <p:sp>
-        <p:nvSpPr>
-          <p:cNvPr id="322" name="Google Shape;322;p23"/>
-          <p:cNvSpPr/>
-          <p:nvPr/>
-        </p:nvSpPr>
-        <p:spPr>
-          <a:xfrm>
-            <a:off x="2405063" y="595312"/>
-            <a:ext cx="571500" cy="38100"/>
-          </a:xfrm>
-          <a:prstGeom prst="rect">
-            <a:avLst/>
-          </a:prstGeom>
-          <a:solidFill>
-            <a:srgbClr val="F59E0B"/>
-          </a:solidFill>
-          <a:ln>
-            <a:noFill/>
-          </a:ln>
-        </p:spPr>
-        <p:txBody>
-          <a:bodyPr spcFirstLastPara="1" wrap="square" lIns="91425" tIns="45700" rIns="91425" bIns="45700" anchor="ctr" anchorCtr="0">
-            <a:noAutofit/>
-          </a:bodyPr>
-          <a:lstStyle/>
-          <a:p>
-            <a:pPr marL="0" marR="0" lvl="0" indent="0" algn="ctr" rtl="0">
-              <a:spcBef>
-                <a:spcPts val="0"/>
-              </a:spcBef>
-              <a:spcAft>
-                <a:spcPts val="0"/>
-              </a:spcAft>
-              <a:buNone/>
-            </a:pPr>
-            <a:endParaRPr sz="1800" b="0" i="0" u="none" strike="noStrike" cap="none">
-              <a:solidFill>
-                <a:schemeClr val="dk1"/>
-              </a:solidFill>
-              <a:latin typeface="Calibri"/>
-              <a:ea typeface="Calibri"/>
-              <a:cs typeface="Calibri"/>
-              <a:sym typeface="Calibri"/>
-            </a:endParaRPr>
-          </a:p>
-        </p:txBody>
-      </p:sp>
-      <p:pic>
-        <p:nvPicPr>
-          <p:cNvPr id="323" name="Google Shape;323;p23" descr="image.png"/>
-          <p:cNvPicPr preferRelativeResize="0"/>
-          <p:nvPr/>
-        </p:nvPicPr>
-        <p:blipFill rotWithShape="1">
-          <a:blip r:embed="rId6">
-            <a:alphaModFix/>
-          </a:blip>
-          <a:srcRect/>
-          <a:stretch/>
-        </p:blipFill>
-        <p:spPr>
-          <a:xfrm>
-            <a:off x="381000" y="6557962"/>
-            <a:ext cx="152400" cy="133350"/>
-          </a:xfrm>
-          <a:prstGeom prst="rect">
-            <a:avLst/>
-          </a:prstGeom>
-          <a:noFill/>
-          <a:ln>
-            <a:noFill/>
-          </a:ln>
-        </p:spPr>
-      </p:pic>
-      <p:sp>
-        <p:nvSpPr>
-          <p:cNvPr id="324" name="Google Shape;324;p23"/>
-          <p:cNvSpPr txBox="1"/>
-          <p:nvPr/>
-        </p:nvSpPr>
-        <p:spPr>
-          <a:xfrm>
-            <a:off x="904875" y="3071817"/>
-            <a:ext cx="4900612" cy="276999"/>
-          </a:xfrm>
-          <a:prstGeom prst="rect">
-            <a:avLst/>
-          </a:prstGeom>
-          <a:noFill/>
-          <a:ln>
-            <a:noFill/>
-          </a:ln>
-        </p:spPr>
-        <p:txBody>
-          <a:bodyPr spcFirstLastPara="1" wrap="square" lIns="0" tIns="0" rIns="0" bIns="0" anchor="t" anchorCtr="0">
-            <a:spAutoFit/>
-          </a:bodyPr>
-          <a:lstStyle/>
-          <a:p>
-            <a:pPr marL="0" marR="0" lvl="0" indent="0" algn="l" rtl="0">
-              <a:spcBef>
-                <a:spcPts val="0"/>
-              </a:spcBef>
-              <a:spcAft>
-                <a:spcPts val="0"/>
-              </a:spcAft>
-              <a:buNone/>
-            </a:pPr>
-            <a:r>
-              <a:rPr lang="en-US" sz="1800" b="1" i="0" u="none" strike="noStrike" cap="none">
-                <a:solidFill>
-                  <a:srgbClr val="003366"/>
-                </a:solidFill>
-                <a:latin typeface="Roboto"/>
-                <a:ea typeface="Roboto"/>
-                <a:cs typeface="Roboto"/>
-                <a:sym typeface="Roboto"/>
-              </a:rPr>
-              <a:t>Vai Trò</a:t>
-            </a:r>
-            <a:endParaRPr/>
-          </a:p>
-        </p:txBody>
-      </p:sp>
-      <p:sp>
-        <p:nvSpPr>
-          <p:cNvPr id="325" name="Google Shape;325;p23"/>
-          <p:cNvSpPr txBox="1"/>
-          <p:nvPr/>
-        </p:nvSpPr>
-        <p:spPr>
-          <a:xfrm>
-            <a:off x="904877" y="3481387"/>
-            <a:ext cx="4667251" cy="738664"/>
-          </a:xfrm>
-          <a:prstGeom prst="rect">
-            <a:avLst/>
-          </a:prstGeom>
-          <a:noFill/>
-          <a:ln>
-            <a:noFill/>
-          </a:ln>
-        </p:spPr>
-        <p:txBody>
-          <a:bodyPr spcFirstLastPara="1" wrap="square" lIns="0" tIns="0" rIns="0" bIns="0" anchor="t" anchorCtr="0">
-            <a:spAutoFit/>
-          </a:bodyPr>
-          <a:lstStyle/>
-          <a:p>
-            <a:pPr marL="0" marR="0" lvl="0" indent="0" algn="l" rtl="0">
-              <a:lnSpc>
-                <a:spcPct val="160000"/>
-              </a:lnSpc>
-              <a:spcBef>
-                <a:spcPts val="0"/>
-              </a:spcBef>
-              <a:spcAft>
-                <a:spcPts val="0"/>
-              </a:spcAft>
-              <a:buNone/>
-            </a:pPr>
-            <a:r>
-              <a:rPr lang="en-US" sz="1500" b="0" i="0" u="none" strike="noStrike" cap="none">
-                <a:solidFill>
-                  <a:srgbClr val="334155"/>
-                </a:solidFill>
-                <a:latin typeface="Open Sans"/>
-                <a:ea typeface="Open Sans"/>
-                <a:cs typeface="Open Sans"/>
-                <a:sym typeface="Open Sans"/>
-              </a:rPr>
-              <a:t>Lưu trữ thông tin gốc của các dòng áo (Base Product). Ví dụ: Áo thun cổ tròn, Áo Polo, Áo Hoodie.</a:t>
-            </a:r>
-            <a:endParaRPr/>
-          </a:p>
-        </p:txBody>
-      </p:sp>
-      <p:sp>
-        <p:nvSpPr>
-          <p:cNvPr id="326" name="Google Shape;326;p23"/>
-          <p:cNvSpPr txBox="1"/>
-          <p:nvPr/>
-        </p:nvSpPr>
-        <p:spPr>
-          <a:xfrm>
-            <a:off x="904877" y="4233862"/>
-            <a:ext cx="4667251" cy="369332"/>
-          </a:xfrm>
-          <a:prstGeom prst="rect">
-            <a:avLst/>
-          </a:prstGeom>
-          <a:noFill/>
-          <a:ln>
-            <a:noFill/>
-          </a:ln>
-        </p:spPr>
-        <p:txBody>
-          <a:bodyPr spcFirstLastPara="1" wrap="square" lIns="0" tIns="0" rIns="0" bIns="0" anchor="t" anchorCtr="0">
-            <a:spAutoFit/>
-          </a:bodyPr>
-          <a:lstStyle/>
-          <a:p>
-            <a:pPr marL="0" marR="0" lvl="0" indent="0" algn="l" rtl="0">
-              <a:lnSpc>
-                <a:spcPct val="160000"/>
-              </a:lnSpc>
-              <a:spcBef>
-                <a:spcPts val="0"/>
-              </a:spcBef>
-              <a:spcAft>
-                <a:spcPts val="0"/>
-              </a:spcAft>
-              <a:buNone/>
-            </a:pPr>
-            <a:r>
-              <a:rPr lang="en-US" sz="1500" b="0" i="0" u="none" strike="noStrike" cap="none">
-                <a:solidFill>
-                  <a:srgbClr val="334155"/>
-                </a:solidFill>
-                <a:latin typeface="Open Sans"/>
-                <a:ea typeface="Open Sans"/>
-                <a:cs typeface="Open Sans"/>
-                <a:sym typeface="Open Sans"/>
-              </a:rPr>
-              <a:t>Chưa bao gồm thông tin về màu sắc cụ thể.</a:t>
-            </a:r>
-            <a:endParaRPr/>
-          </a:p>
-        </p:txBody>
-      </p:sp>
-      <p:sp>
-        <p:nvSpPr>
-          <p:cNvPr id="327" name="Google Shape;327;p23"/>
-          <p:cNvSpPr txBox="1"/>
-          <p:nvPr/>
-        </p:nvSpPr>
-        <p:spPr>
-          <a:xfrm>
-            <a:off x="6667500" y="2909887"/>
-            <a:ext cx="4953000" cy="369332"/>
-          </a:xfrm>
-          <a:prstGeom prst="rect">
-            <a:avLst/>
-          </a:prstGeom>
-          <a:noFill/>
-          <a:ln>
-            <a:noFill/>
-          </a:ln>
-        </p:spPr>
-        <p:txBody>
-          <a:bodyPr spcFirstLastPara="1" wrap="square" lIns="0" tIns="0" rIns="0" bIns="0" anchor="t" anchorCtr="0">
-            <a:spAutoFit/>
-          </a:bodyPr>
-          <a:lstStyle/>
-          <a:p>
-            <a:pPr marL="0" marR="0" lvl="0" indent="0" algn="l" rtl="0">
-              <a:lnSpc>
-                <a:spcPct val="160000"/>
-              </a:lnSpc>
-              <a:spcBef>
-                <a:spcPts val="0"/>
-              </a:spcBef>
-              <a:spcAft>
-                <a:spcPts val="0"/>
-              </a:spcAft>
-              <a:buNone/>
-            </a:pPr>
-            <a:r>
-              <a:rPr lang="en-US" sz="1500" b="1" i="0" u="none" strike="noStrike" cap="none">
-                <a:solidFill>
-                  <a:srgbClr val="005B96"/>
-                </a:solidFill>
-                <a:latin typeface="Open Sans"/>
-                <a:ea typeface="Open Sans"/>
-                <a:cs typeface="Open Sans"/>
-                <a:sym typeface="Open Sans"/>
-              </a:rPr>
-              <a:t>name:</a:t>
-            </a:r>
-            <a:r>
-              <a:rPr lang="en-US" sz="1500" b="0" i="0" u="none" strike="noStrike" cap="none">
-                <a:solidFill>
-                  <a:srgbClr val="334155"/>
-                </a:solidFill>
-                <a:latin typeface="Open Sans"/>
-                <a:ea typeface="Open Sans"/>
-                <a:cs typeface="Open Sans"/>
-                <a:sym typeface="Open Sans"/>
-              </a:rPr>
-              <a:t> Tên sản phẩm.</a:t>
-            </a:r>
-            <a:endParaRPr/>
-          </a:p>
-        </p:txBody>
-      </p:sp>
-      <p:sp>
-        <p:nvSpPr>
-          <p:cNvPr id="328" name="Google Shape;328;p23"/>
-          <p:cNvSpPr txBox="1"/>
-          <p:nvPr/>
-        </p:nvSpPr>
-        <p:spPr>
-          <a:xfrm>
-            <a:off x="6667500" y="3357562"/>
-            <a:ext cx="4953000" cy="369332"/>
-          </a:xfrm>
-          <a:prstGeom prst="rect">
-            <a:avLst/>
-          </a:prstGeom>
-          <a:noFill/>
-          <a:ln>
-            <a:noFill/>
-          </a:ln>
-        </p:spPr>
-        <p:txBody>
-          <a:bodyPr spcFirstLastPara="1" wrap="square" lIns="0" tIns="0" rIns="0" bIns="0" anchor="t" anchorCtr="0">
-            <a:spAutoFit/>
-          </a:bodyPr>
-          <a:lstStyle/>
-          <a:p>
-            <a:pPr marL="0" marR="0" lvl="0" indent="0" algn="l" rtl="0">
-              <a:lnSpc>
-                <a:spcPct val="160000"/>
-              </a:lnSpc>
-              <a:spcBef>
-                <a:spcPts val="0"/>
-              </a:spcBef>
-              <a:spcAft>
-                <a:spcPts val="0"/>
-              </a:spcAft>
-              <a:buNone/>
-            </a:pPr>
-            <a:r>
-              <a:rPr lang="en-US" sz="1500" b="1" i="0" u="none" strike="noStrike" cap="none">
-                <a:solidFill>
-                  <a:srgbClr val="005B96"/>
-                </a:solidFill>
-                <a:latin typeface="Open Sans"/>
-                <a:ea typeface="Open Sans"/>
-                <a:cs typeface="Open Sans"/>
-                <a:sym typeface="Open Sans"/>
-              </a:rPr>
-              <a:t>description:</a:t>
-            </a:r>
-            <a:r>
-              <a:rPr lang="en-US" sz="1500" b="0" i="0" u="none" strike="noStrike" cap="none">
-                <a:solidFill>
-                  <a:srgbClr val="334155"/>
-                </a:solidFill>
-                <a:latin typeface="Open Sans"/>
-                <a:ea typeface="Open Sans"/>
-                <a:cs typeface="Open Sans"/>
-                <a:sym typeface="Open Sans"/>
-              </a:rPr>
-              <a:t> Mô tả chất liệu vải.</a:t>
-            </a:r>
-            <a:endParaRPr/>
-          </a:p>
-        </p:txBody>
-      </p:sp>
-      <p:sp>
-        <p:nvSpPr>
-          <p:cNvPr id="329" name="Google Shape;329;p23"/>
-          <p:cNvSpPr txBox="1"/>
-          <p:nvPr/>
-        </p:nvSpPr>
-        <p:spPr>
-          <a:xfrm>
-            <a:off x="6667500" y="3805237"/>
-            <a:ext cx="4953000" cy="369332"/>
-          </a:xfrm>
-          <a:prstGeom prst="rect">
-            <a:avLst/>
-          </a:prstGeom>
-          <a:noFill/>
-          <a:ln>
-            <a:noFill/>
-          </a:ln>
-        </p:spPr>
-        <p:txBody>
-          <a:bodyPr spcFirstLastPara="1" wrap="square" lIns="0" tIns="0" rIns="0" bIns="0" anchor="t" anchorCtr="0">
-            <a:spAutoFit/>
-          </a:bodyPr>
-          <a:lstStyle/>
-          <a:p>
-            <a:pPr marL="0" marR="0" lvl="0" indent="0" algn="l" rtl="0">
-              <a:lnSpc>
-                <a:spcPct val="160000"/>
-              </a:lnSpc>
-              <a:spcBef>
-                <a:spcPts val="0"/>
-              </a:spcBef>
-              <a:spcAft>
-                <a:spcPts val="0"/>
-              </a:spcAft>
-              <a:buNone/>
-            </a:pPr>
-            <a:r>
-              <a:rPr lang="en-US" sz="1500" b="1" i="0" u="none" strike="noStrike" cap="none">
-                <a:solidFill>
-                  <a:srgbClr val="005B96"/>
-                </a:solidFill>
-                <a:latin typeface="Open Sans"/>
-                <a:ea typeface="Open Sans"/>
-                <a:cs typeface="Open Sans"/>
-                <a:sym typeface="Open Sans"/>
-              </a:rPr>
-              <a:t>price:</a:t>
-            </a:r>
-            <a:r>
-              <a:rPr lang="en-US" sz="1500" b="0" i="0" u="none" strike="noStrike" cap="none">
-                <a:solidFill>
-                  <a:srgbClr val="334155"/>
-                </a:solidFill>
-                <a:latin typeface="Open Sans"/>
-                <a:ea typeface="Open Sans"/>
-                <a:cs typeface="Open Sans"/>
-                <a:sym typeface="Open Sans"/>
-              </a:rPr>
-              <a:t> Giá bán niêm yết.</a:t>
-            </a:r>
-            <a:endParaRPr/>
-          </a:p>
-        </p:txBody>
-      </p:sp>
-      <p:sp>
-        <p:nvSpPr>
-          <p:cNvPr id="330" name="Google Shape;330;p23"/>
-          <p:cNvSpPr txBox="1"/>
-          <p:nvPr/>
-        </p:nvSpPr>
-        <p:spPr>
-          <a:xfrm>
-            <a:off x="6667500" y="4252912"/>
-            <a:ext cx="4953000" cy="369332"/>
-          </a:xfrm>
-          <a:prstGeom prst="rect">
-            <a:avLst/>
-          </a:prstGeom>
-          <a:noFill/>
-          <a:ln>
-            <a:noFill/>
-          </a:ln>
-        </p:spPr>
-        <p:txBody>
-          <a:bodyPr spcFirstLastPara="1" wrap="square" lIns="0" tIns="0" rIns="0" bIns="0" anchor="t" anchorCtr="0">
-            <a:spAutoFit/>
-          </a:bodyPr>
-          <a:lstStyle/>
-          <a:p>
-            <a:pPr marL="0" marR="0" lvl="0" indent="0" algn="l" rtl="0">
-              <a:lnSpc>
-                <a:spcPct val="160000"/>
-              </a:lnSpc>
-              <a:spcBef>
-                <a:spcPts val="0"/>
-              </a:spcBef>
-              <a:spcAft>
-                <a:spcPts val="0"/>
-              </a:spcAft>
-              <a:buNone/>
-            </a:pPr>
-            <a:r>
-              <a:rPr lang="en-US" sz="1500" b="1" i="0" u="none" strike="noStrike" cap="none">
-                <a:solidFill>
-                  <a:srgbClr val="005B96"/>
-                </a:solidFill>
-                <a:latin typeface="Open Sans"/>
-                <a:ea typeface="Open Sans"/>
-                <a:cs typeface="Open Sans"/>
-                <a:sym typeface="Open Sans"/>
-              </a:rPr>
-              <a:t>import_price:</a:t>
-            </a:r>
-            <a:r>
-              <a:rPr lang="en-US" sz="1500" b="0" i="0" u="none" strike="noStrike" cap="none">
-                <a:solidFill>
-                  <a:srgbClr val="334155"/>
-                </a:solidFill>
-                <a:latin typeface="Open Sans"/>
-                <a:ea typeface="Open Sans"/>
-                <a:cs typeface="Open Sans"/>
-                <a:sym typeface="Open Sans"/>
-              </a:rPr>
-              <a:t> Giá nhập (cho thống kê lợi nhuận).</a:t>
-            </a:r>
-            <a:endParaRPr/>
-          </a:p>
-        </p:txBody>
-      </p:sp>
-      <p:pic>
-        <p:nvPicPr>
-          <p:cNvPr id="331" name="Google Shape;331;p23" descr="image.png"/>
-          <p:cNvPicPr preferRelativeResize="0"/>
-          <p:nvPr/>
-        </p:nvPicPr>
-        <p:blipFill rotWithShape="1">
-          <a:blip r:embed="rId7">
-            <a:alphaModFix/>
-          </a:blip>
-          <a:srcRect/>
-          <a:stretch/>
-        </p:blipFill>
-        <p:spPr>
-          <a:xfrm>
-            <a:off x="6334129" y="2928943"/>
-            <a:ext cx="104775" cy="219075"/>
-          </a:xfrm>
-          <a:prstGeom prst="rect">
-            <a:avLst/>
-          </a:prstGeom>
-          <a:noFill/>
-          <a:ln>
-            <a:noFill/>
-          </a:ln>
-        </p:spPr>
-      </p:pic>
-      <p:pic>
-        <p:nvPicPr>
-          <p:cNvPr id="332" name="Google Shape;332;p23" descr="image.png"/>
-          <p:cNvPicPr preferRelativeResize="0"/>
-          <p:nvPr/>
-        </p:nvPicPr>
-        <p:blipFill rotWithShape="1">
-          <a:blip r:embed="rId7">
-            <a:alphaModFix/>
-          </a:blip>
-          <a:srcRect/>
-          <a:stretch/>
-        </p:blipFill>
-        <p:spPr>
-          <a:xfrm>
-            <a:off x="6334129" y="3376613"/>
-            <a:ext cx="104775" cy="219075"/>
-          </a:xfrm>
-          <a:prstGeom prst="rect">
-            <a:avLst/>
-          </a:prstGeom>
-          <a:noFill/>
-          <a:ln>
-            <a:noFill/>
-          </a:ln>
-        </p:spPr>
-      </p:pic>
-      <p:pic>
-        <p:nvPicPr>
-          <p:cNvPr id="333" name="Google Shape;333;p23" descr="image.png"/>
-          <p:cNvPicPr preferRelativeResize="0"/>
-          <p:nvPr/>
-        </p:nvPicPr>
-        <p:blipFill rotWithShape="1">
-          <a:blip r:embed="rId7">
-            <a:alphaModFix/>
-          </a:blip>
-          <a:srcRect/>
-          <a:stretch/>
-        </p:blipFill>
-        <p:spPr>
-          <a:xfrm>
-            <a:off x="6334129" y="3824287"/>
-            <a:ext cx="104775" cy="219075"/>
-          </a:xfrm>
-          <a:prstGeom prst="rect">
-            <a:avLst/>
-          </a:prstGeom>
-          <a:noFill/>
-          <a:ln>
-            <a:noFill/>
-          </a:ln>
-        </p:spPr>
-      </p:pic>
-      <p:pic>
-        <p:nvPicPr>
-          <p:cNvPr id="334" name="Google Shape;334;p23" descr="image.png"/>
-          <p:cNvPicPr preferRelativeResize="0"/>
-          <p:nvPr/>
-        </p:nvPicPr>
-        <p:blipFill rotWithShape="1">
-          <a:blip r:embed="rId7">
-            <a:alphaModFix/>
-          </a:blip>
-          <a:srcRect/>
-          <a:stretch/>
-        </p:blipFill>
-        <p:spPr>
-          <a:xfrm>
-            <a:off x="6334129" y="4271968"/>
-            <a:ext cx="104775" cy="219075"/>
-          </a:xfrm>
-          <a:prstGeom prst="rect">
-            <a:avLst/>
-          </a:prstGeom>
-          <a:noFill/>
-          <a:ln>
-            <a:noFill/>
-          </a:ln>
-        </p:spPr>
-      </p:pic>
-    </p:spTree>
-  </p:cSld>
-  <p:clrMapOvr>
-    <a:masterClrMapping/>
-  </p:clrMapOvr>
-</p:sld>
-</file>
-
-<file path=ppt/slides/slide12.xml><?xml version="1.0" encoding="utf-8"?>
-<p:sld xmlns:a="http://schemas.openxmlformats.org/drawingml/2006/main" xmlns:r="http://schemas.openxmlformats.org/officeDocument/2006/relationships" xmlns:p="http://schemas.openxmlformats.org/presentationml/2006/main">
-  <p:cSld>
-    <p:bg>
-      <p:bgPr>
-        <a:solidFill>
-          <a:srgbClr val="FFFFFF"/>
-        </a:solidFill>
-        <a:effectLst/>
-      </p:bgPr>
-    </p:bg>
-    <p:spTree>
-      <p:nvGrpSpPr>
-        <p:cNvPr id="1" name="Shape 338"/>
-        <p:cNvGrpSpPr/>
-        <p:nvPr/>
-      </p:nvGrpSpPr>
-      <p:grpSpPr>
-        <a:xfrm>
-          <a:off x="0" y="0"/>
-          <a:ext cx="0" cy="0"/>
-          <a:chOff x="0" y="0"/>
-          <a:chExt cx="0" cy="0"/>
-        </a:xfrm>
-      </p:grpSpPr>
-      <p:pic>
-        <p:nvPicPr>
-          <p:cNvPr id="339" name="Google Shape;339;p24" descr="image.png"/>
-          <p:cNvPicPr preferRelativeResize="0"/>
-          <p:nvPr/>
-        </p:nvPicPr>
-        <p:blipFill rotWithShape="1">
-          <a:blip r:embed="rId3">
-            <a:alphaModFix/>
-          </a:blip>
-          <a:srcRect/>
-          <a:stretch/>
-        </p:blipFill>
-        <p:spPr>
-          <a:xfrm>
-            <a:off x="0" y="0"/>
-            <a:ext cx="12192000" cy="6858000"/>
-          </a:xfrm>
-          <a:prstGeom prst="rect">
-            <a:avLst/>
-          </a:prstGeom>
-          <a:noFill/>
-          <a:ln>
-            <a:noFill/>
-          </a:ln>
-        </p:spPr>
-      </p:pic>
-      <p:pic>
-        <p:nvPicPr>
-          <p:cNvPr id="340" name="Google Shape;340;p24" descr="image.png"/>
-          <p:cNvPicPr preferRelativeResize="0"/>
-          <p:nvPr/>
-        </p:nvPicPr>
-        <p:blipFill rotWithShape="1">
-          <a:blip r:embed="rId4">
-            <a:alphaModFix/>
-          </a:blip>
-          <a:srcRect/>
-          <a:stretch/>
-        </p:blipFill>
-        <p:spPr>
-          <a:xfrm>
-            <a:off x="6334129" y="2805112"/>
-            <a:ext cx="5286375" cy="2000250"/>
-          </a:xfrm>
-          <a:prstGeom prst="rect">
-            <a:avLst/>
-          </a:prstGeom>
-          <a:noFill/>
-          <a:ln>
-            <a:noFill/>
-          </a:ln>
-        </p:spPr>
-      </p:pic>
-      <p:pic>
-        <p:nvPicPr>
-          <p:cNvPr id="341" name="Google Shape;341;p24" descr="image.png"/>
-          <p:cNvPicPr preferRelativeResize="0"/>
-          <p:nvPr/>
-        </p:nvPicPr>
-        <p:blipFill rotWithShape="1">
-          <a:blip r:embed="rId5">
-            <a:alphaModFix/>
-          </a:blip>
-          <a:srcRect/>
-          <a:stretch/>
-        </p:blipFill>
-        <p:spPr>
-          <a:xfrm>
-            <a:off x="0" y="6381750"/>
-            <a:ext cx="12192000" cy="476250"/>
-          </a:xfrm>
-          <a:prstGeom prst="rect">
-            <a:avLst/>
-          </a:prstGeom>
-          <a:noFill/>
-          <a:ln>
-            <a:noFill/>
-          </a:ln>
-        </p:spPr>
-      </p:pic>
-      <p:sp>
-        <p:nvSpPr>
-          <p:cNvPr id="342" name="Google Shape;342;p24"/>
-          <p:cNvSpPr txBox="1"/>
-          <p:nvPr/>
-        </p:nvSpPr>
-        <p:spPr>
-          <a:xfrm>
-            <a:off x="571503" y="381001"/>
-            <a:ext cx="5295900" cy="969496"/>
-          </a:xfrm>
-          <a:prstGeom prst="rect">
-            <a:avLst/>
-          </a:prstGeom>
-          <a:noFill/>
-          <a:ln>
-            <a:noFill/>
-          </a:ln>
-        </p:spPr>
-        <p:txBody>
-          <a:bodyPr spcFirstLastPara="1" wrap="square" lIns="0" tIns="0" rIns="0" bIns="0" anchor="t" anchorCtr="0">
-            <a:spAutoFit/>
-          </a:bodyPr>
-          <a:lstStyle/>
-          <a:p>
-            <a:pPr marL="0" marR="0" lvl="0" indent="0" algn="l" rtl="0">
-              <a:spcBef>
-                <a:spcPts val="0"/>
-              </a:spcBef>
-              <a:spcAft>
-                <a:spcPts val="0"/>
-              </a:spcAft>
-              <a:buNone/>
-            </a:pPr>
-            <a:r>
-              <a:rPr lang="en-US" sz="3150" b="1" i="0" u="none" strike="noStrike" cap="none">
-                <a:solidFill>
-                  <a:srgbClr val="003366"/>
-                </a:solidFill>
-                <a:latin typeface="Roboto"/>
-                <a:ea typeface="Roboto"/>
-                <a:cs typeface="Roboto"/>
-                <a:sym typeface="Roboto"/>
-              </a:rPr>
-              <a:t>Chi Tiết Bảng: Product Colors</a:t>
-            </a:r>
-            <a:endParaRPr/>
-          </a:p>
-        </p:txBody>
-      </p:sp>
-      <p:sp>
-        <p:nvSpPr>
-          <p:cNvPr id="343" name="Google Shape;343;p24"/>
-          <p:cNvSpPr txBox="1"/>
-          <p:nvPr/>
-        </p:nvSpPr>
-        <p:spPr>
-          <a:xfrm>
-            <a:off x="628651" y="6463061"/>
-            <a:ext cx="876300" cy="323165"/>
-          </a:xfrm>
-          <a:prstGeom prst="rect">
-            <a:avLst/>
-          </a:prstGeom>
-          <a:noFill/>
-          <a:ln>
-            <a:noFill/>
-          </a:ln>
-        </p:spPr>
-        <p:txBody>
-          <a:bodyPr spcFirstLastPara="1" wrap="square" lIns="0" tIns="0" rIns="0" bIns="0" anchor="ctr" anchorCtr="0">
-            <a:spAutoFit/>
-          </a:bodyPr>
-          <a:lstStyle/>
-          <a:p>
-            <a:pPr marL="0" marR="0" lvl="0" indent="0" algn="l" rtl="0">
-              <a:spcBef>
-                <a:spcPts val="0"/>
-              </a:spcBef>
-              <a:spcAft>
-                <a:spcPts val="0"/>
-              </a:spcAft>
-              <a:buNone/>
-            </a:pPr>
-            <a:r>
-              <a:rPr lang="en-US" sz="1050" b="1" i="0" u="none" strike="noStrike" cap="none">
-                <a:solidFill>
-                  <a:srgbClr val="003366"/>
-                </a:solidFill>
-                <a:latin typeface="Open Sans SemiBold"/>
-                <a:ea typeface="Open Sans SemiBold"/>
-                <a:cs typeface="Open Sans SemiBold"/>
-                <a:sym typeface="Open Sans SemiBold"/>
-              </a:rPr>
-              <a:t>Mytee Studio</a:t>
-            </a:r>
-            <a:endParaRPr/>
-          </a:p>
-        </p:txBody>
-      </p:sp>
-      <p:sp>
-        <p:nvSpPr>
-          <p:cNvPr id="344" name="Google Shape;344;p24"/>
-          <p:cNvSpPr txBox="1"/>
-          <p:nvPr/>
-        </p:nvSpPr>
-        <p:spPr>
-          <a:xfrm>
-            <a:off x="11306180" y="6534156"/>
-            <a:ext cx="504825" cy="161583"/>
-          </a:xfrm>
-          <a:prstGeom prst="rect">
-            <a:avLst/>
-          </a:prstGeom>
-          <a:noFill/>
-          <a:ln>
-            <a:noFill/>
-          </a:ln>
-        </p:spPr>
-        <p:txBody>
-          <a:bodyPr spcFirstLastPara="1" wrap="square" lIns="0" tIns="0" rIns="0" bIns="0" anchor="t" anchorCtr="0">
-            <a:spAutoFit/>
-          </a:bodyPr>
-          <a:lstStyle/>
-          <a:p>
-            <a:pPr marL="0" marR="0" lvl="0" indent="0" algn="l" rtl="0">
-              <a:spcBef>
-                <a:spcPts val="0"/>
-              </a:spcBef>
-              <a:spcAft>
-                <a:spcPts val="0"/>
-              </a:spcAft>
-              <a:buNone/>
-            </a:pPr>
-            <a:r>
-              <a:rPr lang="en-US" sz="1050" b="0" i="0" u="none" strike="noStrike" cap="none">
-                <a:solidFill>
-                  <a:srgbClr val="64748B"/>
-                </a:solidFill>
-                <a:latin typeface="Open Sans"/>
-                <a:ea typeface="Open Sans"/>
-                <a:cs typeface="Open Sans"/>
-                <a:sym typeface="Open Sans"/>
-              </a:rPr>
-              <a:t>Slide 12</a:t>
-            </a:r>
-            <a:endParaRPr/>
-          </a:p>
-        </p:txBody>
-      </p:sp>
-      <p:sp>
-        <p:nvSpPr>
-          <p:cNvPr id="345" name="Google Shape;345;p24"/>
-          <p:cNvSpPr/>
-          <p:nvPr/>
-        </p:nvSpPr>
-        <p:spPr>
-          <a:xfrm>
-            <a:off x="2933703" y="595312"/>
-            <a:ext cx="571500" cy="38100"/>
-          </a:xfrm>
-          <a:prstGeom prst="rect">
-            <a:avLst/>
-          </a:prstGeom>
-          <a:solidFill>
-            <a:srgbClr val="F59E0B"/>
-          </a:solidFill>
-          <a:ln>
-            <a:noFill/>
-          </a:ln>
-        </p:spPr>
-        <p:txBody>
-          <a:bodyPr spcFirstLastPara="1" wrap="square" lIns="91425" tIns="45700" rIns="91425" bIns="45700" anchor="ctr" anchorCtr="0">
-            <a:noAutofit/>
-          </a:bodyPr>
-          <a:lstStyle/>
-          <a:p>
-            <a:pPr marL="0" marR="0" lvl="0" indent="0" algn="ctr" rtl="0">
-              <a:spcBef>
-                <a:spcPts val="0"/>
-              </a:spcBef>
-              <a:spcAft>
-                <a:spcPts val="0"/>
-              </a:spcAft>
-              <a:buNone/>
-            </a:pPr>
-            <a:endParaRPr sz="1800" b="0" i="0" u="none" strike="noStrike" cap="none">
-              <a:solidFill>
-                <a:schemeClr val="dk1"/>
-              </a:solidFill>
-              <a:latin typeface="Calibri"/>
-              <a:ea typeface="Calibri"/>
-              <a:cs typeface="Calibri"/>
-              <a:sym typeface="Calibri"/>
-            </a:endParaRPr>
-          </a:p>
-        </p:txBody>
-      </p:sp>
-      <p:pic>
-        <p:nvPicPr>
-          <p:cNvPr id="346" name="Google Shape;346;p24" descr="image.png"/>
-          <p:cNvPicPr preferRelativeResize="0"/>
-          <p:nvPr/>
-        </p:nvPicPr>
-        <p:blipFill rotWithShape="1">
-          <a:blip r:embed="rId6">
-            <a:alphaModFix/>
-          </a:blip>
-          <a:srcRect/>
-          <a:stretch/>
-        </p:blipFill>
-        <p:spPr>
-          <a:xfrm>
-            <a:off x="381000" y="6557962"/>
-            <a:ext cx="152400" cy="133350"/>
-          </a:xfrm>
-          <a:prstGeom prst="rect">
-            <a:avLst/>
-          </a:prstGeom>
-          <a:noFill/>
-          <a:ln>
-            <a:noFill/>
-          </a:ln>
-        </p:spPr>
-      </p:pic>
-      <p:sp>
-        <p:nvSpPr>
-          <p:cNvPr id="347" name="Google Shape;347;p24"/>
-          <p:cNvSpPr txBox="1"/>
-          <p:nvPr/>
-        </p:nvSpPr>
-        <p:spPr>
-          <a:xfrm>
-            <a:off x="571500" y="3381375"/>
-            <a:ext cx="5550693" cy="216085"/>
-          </a:xfrm>
-          <a:prstGeom prst="rect">
-            <a:avLst/>
-          </a:prstGeom>
-          <a:noFill/>
-          <a:ln>
-            <a:noFill/>
-          </a:ln>
-        </p:spPr>
-        <p:txBody>
-          <a:bodyPr spcFirstLastPara="1" wrap="square" lIns="0" tIns="0" rIns="0" bIns="0" anchor="t" anchorCtr="0">
-            <a:spAutoFit/>
-          </a:bodyPr>
-          <a:lstStyle/>
-          <a:p>
-            <a:pPr marL="0" marR="0" lvl="0" indent="0" algn="l" rtl="0">
-              <a:spcBef>
-                <a:spcPts val="0"/>
-              </a:spcBef>
-              <a:spcAft>
-                <a:spcPts val="0"/>
-              </a:spcAft>
-              <a:buNone/>
-            </a:pPr>
-            <a:r>
-              <a:rPr lang="en-US" sz="1404" b="1" i="0" u="none" strike="noStrike" cap="none">
-                <a:solidFill>
-                  <a:srgbClr val="000000"/>
-                </a:solidFill>
-                <a:latin typeface="Open Sans"/>
-                <a:ea typeface="Open Sans"/>
-                <a:cs typeface="Open Sans"/>
-                <a:sym typeface="Open Sans"/>
-              </a:rPr>
-              <a:t>Mục Đích</a:t>
-            </a:r>
-            <a:endParaRPr/>
-          </a:p>
-        </p:txBody>
-      </p:sp>
-      <p:sp>
-        <p:nvSpPr>
-          <p:cNvPr id="348" name="Google Shape;348;p24"/>
-          <p:cNvSpPr txBox="1"/>
-          <p:nvPr/>
-        </p:nvSpPr>
-        <p:spPr>
-          <a:xfrm>
-            <a:off x="571505" y="3619500"/>
-            <a:ext cx="5286375" cy="738664"/>
-          </a:xfrm>
-          <a:prstGeom prst="rect">
-            <a:avLst/>
-          </a:prstGeom>
-          <a:noFill/>
-          <a:ln>
-            <a:noFill/>
-          </a:ln>
-        </p:spPr>
-        <p:txBody>
-          <a:bodyPr spcFirstLastPara="1" wrap="square" lIns="0" tIns="0" rIns="0" bIns="0" anchor="t" anchorCtr="0">
-            <a:spAutoFit/>
-          </a:bodyPr>
-          <a:lstStyle/>
-          <a:p>
-            <a:pPr marL="0" marR="0" lvl="0" indent="0" algn="l" rtl="0">
-              <a:lnSpc>
-                <a:spcPct val="160000"/>
-              </a:lnSpc>
-              <a:spcBef>
-                <a:spcPts val="0"/>
-              </a:spcBef>
-              <a:spcAft>
-                <a:spcPts val="0"/>
-              </a:spcAft>
-              <a:buNone/>
-            </a:pPr>
-            <a:r>
-              <a:rPr lang="en-US" sz="1500" b="0" i="0" u="none" strike="noStrike" cap="none">
-                <a:solidFill>
-                  <a:srgbClr val="334155"/>
-                </a:solidFill>
-                <a:latin typeface="Open Sans"/>
-                <a:ea typeface="Open Sans"/>
-                <a:cs typeface="Open Sans"/>
-                <a:sym typeface="Open Sans"/>
-              </a:rPr>
-              <a:t>Quản lý các biến thể màu sắc cho từng sản phẩm và chứa ảnh phôi (Mockup) tương ứng.</a:t>
-            </a:r>
-            <a:endParaRPr/>
-          </a:p>
-        </p:txBody>
-      </p:sp>
-      <p:sp>
-        <p:nvSpPr>
-          <p:cNvPr id="349" name="Google Shape;349;p24"/>
-          <p:cNvSpPr txBox="1"/>
-          <p:nvPr/>
-        </p:nvSpPr>
-        <p:spPr>
-          <a:xfrm>
-            <a:off x="6667501" y="3090865"/>
-            <a:ext cx="4667251" cy="300082"/>
-          </a:xfrm>
-          <a:prstGeom prst="rect">
-            <a:avLst/>
-          </a:prstGeom>
-          <a:noFill/>
-          <a:ln>
-            <a:noFill/>
-          </a:ln>
-        </p:spPr>
-        <p:txBody>
-          <a:bodyPr spcFirstLastPara="1" wrap="square" lIns="0" tIns="0" rIns="0" bIns="0" anchor="t" anchorCtr="0">
-            <a:spAutoFit/>
-          </a:bodyPr>
-          <a:lstStyle/>
-          <a:p>
-            <a:pPr marL="0" marR="0" lvl="0" indent="0" algn="l" rtl="0">
-              <a:spcBef>
-                <a:spcPts val="0"/>
-              </a:spcBef>
-              <a:spcAft>
-                <a:spcPts val="0"/>
-              </a:spcAft>
-              <a:buNone/>
-            </a:pPr>
-            <a:r>
-              <a:rPr lang="en-US" sz="975" b="1" i="0" u="none" strike="noStrike" cap="none">
-                <a:solidFill>
-                  <a:srgbClr val="005B96"/>
-                </a:solidFill>
-                <a:latin typeface="Arial"/>
-                <a:ea typeface="Arial"/>
-                <a:cs typeface="Arial"/>
-                <a:sym typeface="Arial"/>
-              </a:rPr>
-              <a:t>product_id</a:t>
-            </a:r>
-            <a:r>
-              <a:rPr lang="en-US" sz="975" b="0" i="0" u="none" strike="noStrike" cap="none">
-                <a:solidFill>
-                  <a:srgbClr val="000000"/>
-                </a:solidFill>
-                <a:latin typeface="Arial"/>
-                <a:ea typeface="Arial"/>
-                <a:cs typeface="Arial"/>
-                <a:sym typeface="Arial"/>
-              </a:rPr>
-              <a:t> FK -&gt; products </a:t>
-            </a:r>
-            <a:r>
-              <a:rPr lang="en-US" sz="975" b="1" i="0" u="none" strike="noStrike" cap="none">
-                <a:solidFill>
-                  <a:srgbClr val="005B96"/>
-                </a:solidFill>
-                <a:latin typeface="Arial"/>
-                <a:ea typeface="Arial"/>
-                <a:cs typeface="Arial"/>
-                <a:sym typeface="Arial"/>
-              </a:rPr>
-              <a:t>color_name</a:t>
-            </a:r>
-            <a:r>
-              <a:rPr lang="en-US" sz="975" b="0" i="0" u="none" strike="noStrike" cap="none">
-                <a:solidFill>
-                  <a:srgbClr val="000000"/>
-                </a:solidFill>
-                <a:latin typeface="Arial"/>
-                <a:ea typeface="Arial"/>
-                <a:cs typeface="Arial"/>
-                <a:sym typeface="Arial"/>
-              </a:rPr>
-              <a:t> Tên màu (VD: Red) </a:t>
-            </a:r>
-            <a:r>
-              <a:rPr lang="en-US" sz="975" b="1" i="0" u="none" strike="noStrike" cap="none">
-                <a:solidFill>
-                  <a:srgbClr val="005B96"/>
-                </a:solidFill>
-                <a:latin typeface="Arial"/>
-                <a:ea typeface="Arial"/>
-                <a:cs typeface="Arial"/>
-                <a:sym typeface="Arial"/>
-              </a:rPr>
-              <a:t>hex_code</a:t>
-            </a:r>
-            <a:r>
-              <a:rPr lang="en-US" sz="975" b="0" i="0" u="none" strike="noStrike" cap="none">
-                <a:solidFill>
-                  <a:srgbClr val="000000"/>
-                </a:solidFill>
-                <a:latin typeface="Arial"/>
-                <a:ea typeface="Arial"/>
-                <a:cs typeface="Arial"/>
-                <a:sym typeface="Arial"/>
-              </a:rPr>
-              <a:t> Mã màu (#FF0000) </a:t>
-            </a:r>
-            <a:r>
-              <a:rPr lang="en-US" sz="975" b="1" i="0" u="none" strike="noStrike" cap="none">
-                <a:solidFill>
-                  <a:srgbClr val="005B96"/>
-                </a:solidFill>
-                <a:latin typeface="Arial"/>
-                <a:ea typeface="Arial"/>
-                <a:cs typeface="Arial"/>
-                <a:sym typeface="Arial"/>
-              </a:rPr>
-              <a:t>front_img</a:t>
-            </a:r>
-            <a:r>
-              <a:rPr lang="en-US" sz="975" b="0" i="0" u="none" strike="noStrike" cap="none">
-                <a:solidFill>
-                  <a:srgbClr val="000000"/>
-                </a:solidFill>
-                <a:latin typeface="Arial"/>
-                <a:ea typeface="Arial"/>
-                <a:cs typeface="Arial"/>
-                <a:sym typeface="Arial"/>
-              </a:rPr>
-              <a:t> URL ảnh mặt trước </a:t>
-            </a:r>
-            <a:r>
-              <a:rPr lang="en-US" sz="975" b="1" i="0" u="none" strike="noStrike" cap="none">
-                <a:solidFill>
-                  <a:srgbClr val="005B96"/>
-                </a:solidFill>
-                <a:latin typeface="Arial"/>
-                <a:ea typeface="Arial"/>
-                <a:cs typeface="Arial"/>
-                <a:sym typeface="Arial"/>
-              </a:rPr>
-              <a:t>back_img</a:t>
-            </a:r>
-            <a:r>
-              <a:rPr lang="en-US" sz="975" b="0" i="0" u="none" strike="noStrike" cap="none">
-                <a:solidFill>
-                  <a:srgbClr val="000000"/>
-                </a:solidFill>
-                <a:latin typeface="Arial"/>
-                <a:ea typeface="Arial"/>
-                <a:cs typeface="Arial"/>
-                <a:sym typeface="Arial"/>
-              </a:rPr>
-              <a:t> URL ảnh mặt sau</a:t>
-            </a:r>
-            <a:endParaRPr/>
-          </a:p>
-        </p:txBody>
-      </p:sp>
-    </p:spTree>
-  </p:cSld>
-  <p:clrMapOvr>
-    <a:masterClrMapping/>
-  </p:clrMapOvr>
-</p:sld>
-</file>
-
-<file path=ppt/slides/slide13.xml><?xml version="1.0" encoding="utf-8"?>
-<p:sld xmlns:a="http://schemas.openxmlformats.org/drawingml/2006/main" xmlns:r="http://schemas.openxmlformats.org/officeDocument/2006/relationships" xmlns:p="http://schemas.openxmlformats.org/presentationml/2006/main">
-  <p:cSld>
-    <p:bg>
-      <p:bgPr>
-        <a:solidFill>
-          <a:srgbClr val="FFFFFF"/>
-        </a:solidFill>
-        <a:effectLst/>
-      </p:bgPr>
-    </p:bg>
-    <p:spTree>
-      <p:nvGrpSpPr>
-        <p:cNvPr id="1" name="Shape 353"/>
-        <p:cNvGrpSpPr/>
-        <p:nvPr/>
-      </p:nvGrpSpPr>
-      <p:grpSpPr>
-        <a:xfrm>
-          <a:off x="0" y="0"/>
-          <a:ext cx="0" cy="0"/>
-          <a:chOff x="0" y="0"/>
-          <a:chExt cx="0" cy="0"/>
-        </a:xfrm>
-      </p:grpSpPr>
-      <p:pic>
-        <p:nvPicPr>
-          <p:cNvPr id="354" name="Google Shape;354;p25" descr="image.png"/>
-          <p:cNvPicPr preferRelativeResize="0"/>
-          <p:nvPr/>
-        </p:nvPicPr>
-        <p:blipFill rotWithShape="1">
-          <a:blip r:embed="rId3">
-            <a:alphaModFix/>
-          </a:blip>
-          <a:srcRect/>
-          <a:stretch/>
-        </p:blipFill>
-        <p:spPr>
-          <a:xfrm>
-            <a:off x="0" y="0"/>
-            <a:ext cx="12192000" cy="6858000"/>
-          </a:xfrm>
-          <a:prstGeom prst="rect">
-            <a:avLst/>
-          </a:prstGeom>
-          <a:noFill/>
-          <a:ln>
-            <a:noFill/>
-          </a:ln>
-        </p:spPr>
-      </p:pic>
-      <p:pic>
-        <p:nvPicPr>
-          <p:cNvPr id="355" name="Google Shape;355;p25" descr="image.png"/>
-          <p:cNvPicPr preferRelativeResize="0"/>
-          <p:nvPr/>
-        </p:nvPicPr>
-        <p:blipFill rotWithShape="1">
-          <a:blip r:embed="rId4">
-            <a:alphaModFix/>
-          </a:blip>
-          <a:srcRect/>
-          <a:stretch/>
-        </p:blipFill>
-        <p:spPr>
-          <a:xfrm>
-            <a:off x="571500" y="2128837"/>
-            <a:ext cx="11049000" cy="3352800"/>
-          </a:xfrm>
-          <a:prstGeom prst="rect">
-            <a:avLst/>
-          </a:prstGeom>
-          <a:noFill/>
-          <a:ln>
-            <a:noFill/>
-          </a:ln>
-        </p:spPr>
-      </p:pic>
-      <p:pic>
-        <p:nvPicPr>
-          <p:cNvPr id="356" name="Google Shape;356;p25" descr="image.png"/>
-          <p:cNvPicPr preferRelativeResize="0"/>
-          <p:nvPr/>
-        </p:nvPicPr>
-        <p:blipFill rotWithShape="1">
-          <a:blip r:embed="rId5">
-            <a:alphaModFix/>
-          </a:blip>
-          <a:srcRect/>
-          <a:stretch/>
-        </p:blipFill>
-        <p:spPr>
-          <a:xfrm>
-            <a:off x="866777" y="3328987"/>
-            <a:ext cx="10458451" cy="1409700"/>
-          </a:xfrm>
-          <a:prstGeom prst="rect">
-            <a:avLst/>
-          </a:prstGeom>
-          <a:noFill/>
-          <a:ln>
-            <a:noFill/>
-          </a:ln>
-        </p:spPr>
-      </p:pic>
-      <p:pic>
-        <p:nvPicPr>
-          <p:cNvPr id="357" name="Google Shape;357;p25" descr="image.png"/>
-          <p:cNvPicPr preferRelativeResize="0"/>
-          <p:nvPr/>
-        </p:nvPicPr>
-        <p:blipFill rotWithShape="1">
-          <a:blip r:embed="rId6">
-            <a:alphaModFix/>
-          </a:blip>
-          <a:srcRect/>
-          <a:stretch/>
-        </p:blipFill>
-        <p:spPr>
-          <a:xfrm>
-            <a:off x="0" y="6381750"/>
-            <a:ext cx="12192000" cy="476250"/>
-          </a:xfrm>
-          <a:prstGeom prst="rect">
-            <a:avLst/>
-          </a:prstGeom>
-          <a:noFill/>
-          <a:ln>
-            <a:noFill/>
-          </a:ln>
-        </p:spPr>
-      </p:pic>
-      <p:sp>
-        <p:nvSpPr>
-          <p:cNvPr id="358" name="Google Shape;358;p25"/>
-          <p:cNvSpPr txBox="1"/>
-          <p:nvPr/>
-        </p:nvSpPr>
-        <p:spPr>
-          <a:xfrm>
-            <a:off x="571500" y="381001"/>
-            <a:ext cx="5267325" cy="969496"/>
-          </a:xfrm>
-          <a:prstGeom prst="rect">
-            <a:avLst/>
-          </a:prstGeom>
-          <a:noFill/>
-          <a:ln>
-            <a:noFill/>
-          </a:ln>
-        </p:spPr>
-        <p:txBody>
-          <a:bodyPr spcFirstLastPara="1" wrap="square" lIns="0" tIns="0" rIns="0" bIns="0" anchor="t" anchorCtr="0">
-            <a:spAutoFit/>
-          </a:bodyPr>
-          <a:lstStyle/>
-          <a:p>
-            <a:pPr marL="0" marR="0" lvl="0" indent="0" algn="l" rtl="0">
-              <a:spcBef>
-                <a:spcPts val="0"/>
-              </a:spcBef>
-              <a:spcAft>
-                <a:spcPts val="0"/>
-              </a:spcAft>
-              <a:buNone/>
-            </a:pPr>
-            <a:r>
-              <a:rPr lang="en-US" sz="3150" b="1" i="0" u="none" strike="noStrike" cap="none">
-                <a:solidFill>
-                  <a:srgbClr val="003366"/>
-                </a:solidFill>
-                <a:latin typeface="Roboto"/>
-                <a:ea typeface="Roboto"/>
-                <a:cs typeface="Roboto"/>
-                <a:sym typeface="Roboto"/>
-              </a:rPr>
-              <a:t>Chi Tiết Bảng: Saved Designs</a:t>
-            </a:r>
-            <a:endParaRPr/>
-          </a:p>
-        </p:txBody>
-      </p:sp>
-      <p:sp>
-        <p:nvSpPr>
-          <p:cNvPr id="359" name="Google Shape;359;p25"/>
-          <p:cNvSpPr txBox="1"/>
-          <p:nvPr/>
-        </p:nvSpPr>
-        <p:spPr>
-          <a:xfrm>
-            <a:off x="628651" y="6463061"/>
-            <a:ext cx="876300" cy="323165"/>
-          </a:xfrm>
-          <a:prstGeom prst="rect">
-            <a:avLst/>
-          </a:prstGeom>
-          <a:noFill/>
-          <a:ln>
-            <a:noFill/>
-          </a:ln>
-        </p:spPr>
-        <p:txBody>
-          <a:bodyPr spcFirstLastPara="1" wrap="square" lIns="0" tIns="0" rIns="0" bIns="0" anchor="ctr" anchorCtr="0">
-            <a:spAutoFit/>
-          </a:bodyPr>
-          <a:lstStyle/>
-          <a:p>
-            <a:pPr marL="0" marR="0" lvl="0" indent="0" algn="l" rtl="0">
-              <a:spcBef>
-                <a:spcPts val="0"/>
-              </a:spcBef>
-              <a:spcAft>
-                <a:spcPts val="0"/>
-              </a:spcAft>
-              <a:buNone/>
-            </a:pPr>
-            <a:r>
-              <a:rPr lang="en-US" sz="1050" b="1" i="0" u="none" strike="noStrike" cap="none">
-                <a:solidFill>
-                  <a:srgbClr val="003366"/>
-                </a:solidFill>
-                <a:latin typeface="Open Sans SemiBold"/>
-                <a:ea typeface="Open Sans SemiBold"/>
-                <a:cs typeface="Open Sans SemiBold"/>
-                <a:sym typeface="Open Sans SemiBold"/>
-              </a:rPr>
-              <a:t>Mytee Studio</a:t>
-            </a:r>
-            <a:endParaRPr/>
-          </a:p>
-        </p:txBody>
-      </p:sp>
-      <p:sp>
-        <p:nvSpPr>
-          <p:cNvPr id="360" name="Google Shape;360;p25"/>
-          <p:cNvSpPr txBox="1"/>
-          <p:nvPr/>
-        </p:nvSpPr>
-        <p:spPr>
-          <a:xfrm>
-            <a:off x="11306180" y="6534156"/>
-            <a:ext cx="504825" cy="161583"/>
-          </a:xfrm>
-          <a:prstGeom prst="rect">
-            <a:avLst/>
-          </a:prstGeom>
-          <a:noFill/>
-          <a:ln>
-            <a:noFill/>
-          </a:ln>
-        </p:spPr>
-        <p:txBody>
-          <a:bodyPr spcFirstLastPara="1" wrap="square" lIns="0" tIns="0" rIns="0" bIns="0" anchor="t" anchorCtr="0">
-            <a:spAutoFit/>
-          </a:bodyPr>
-          <a:lstStyle/>
-          <a:p>
-            <a:pPr marL="0" marR="0" lvl="0" indent="0" algn="l" rtl="0">
-              <a:spcBef>
-                <a:spcPts val="0"/>
-              </a:spcBef>
-              <a:spcAft>
-                <a:spcPts val="0"/>
-              </a:spcAft>
-              <a:buNone/>
-            </a:pPr>
-            <a:r>
-              <a:rPr lang="en-US" sz="1050" b="0" i="0" u="none" strike="noStrike" cap="none">
-                <a:solidFill>
-                  <a:srgbClr val="64748B"/>
-                </a:solidFill>
-                <a:latin typeface="Open Sans"/>
-                <a:ea typeface="Open Sans"/>
-                <a:cs typeface="Open Sans"/>
-                <a:sym typeface="Open Sans"/>
-              </a:rPr>
-              <a:t>Slide 13</a:t>
-            </a:r>
-            <a:endParaRPr/>
-          </a:p>
-        </p:txBody>
-      </p:sp>
-      <p:sp>
-        <p:nvSpPr>
-          <p:cNvPr id="361" name="Google Shape;361;p25"/>
-          <p:cNvSpPr/>
-          <p:nvPr/>
-        </p:nvSpPr>
-        <p:spPr>
-          <a:xfrm>
-            <a:off x="2919414" y="595312"/>
-            <a:ext cx="571500" cy="38100"/>
-          </a:xfrm>
-          <a:prstGeom prst="rect">
-            <a:avLst/>
-          </a:prstGeom>
-          <a:solidFill>
-            <a:srgbClr val="F59E0B"/>
-          </a:solidFill>
-          <a:ln>
-            <a:noFill/>
-          </a:ln>
-        </p:spPr>
-        <p:txBody>
-          <a:bodyPr spcFirstLastPara="1" wrap="square" lIns="91425" tIns="45700" rIns="91425" bIns="45700" anchor="ctr" anchorCtr="0">
-            <a:noAutofit/>
-          </a:bodyPr>
-          <a:lstStyle/>
-          <a:p>
-            <a:pPr marL="0" marR="0" lvl="0" indent="0" algn="ctr" rtl="0">
-              <a:spcBef>
-                <a:spcPts val="0"/>
-              </a:spcBef>
-              <a:spcAft>
-                <a:spcPts val="0"/>
-              </a:spcAft>
-              <a:buNone/>
-            </a:pPr>
-            <a:endParaRPr sz="1800" b="0" i="0" u="none" strike="noStrike" cap="none">
-              <a:solidFill>
-                <a:schemeClr val="dk1"/>
-              </a:solidFill>
-              <a:latin typeface="Calibri"/>
-              <a:ea typeface="Calibri"/>
-              <a:cs typeface="Calibri"/>
-              <a:sym typeface="Calibri"/>
-            </a:endParaRPr>
-          </a:p>
-        </p:txBody>
-      </p:sp>
-      <p:sp>
-        <p:nvSpPr>
-          <p:cNvPr id="362" name="Google Shape;362;p25"/>
-          <p:cNvSpPr txBox="1"/>
-          <p:nvPr/>
-        </p:nvSpPr>
-        <p:spPr>
-          <a:xfrm>
-            <a:off x="866775" y="2424117"/>
-            <a:ext cx="10981372" cy="276999"/>
-          </a:xfrm>
-          <a:prstGeom prst="rect">
-            <a:avLst/>
-          </a:prstGeom>
-          <a:noFill/>
-          <a:ln>
-            <a:noFill/>
-          </a:ln>
-        </p:spPr>
-        <p:txBody>
-          <a:bodyPr spcFirstLastPara="1" wrap="square" lIns="0" tIns="0" rIns="0" bIns="0" anchor="t" anchorCtr="0">
-            <a:spAutoFit/>
-          </a:bodyPr>
-          <a:lstStyle/>
-          <a:p>
-            <a:pPr marL="0" marR="0" lvl="0" indent="0" algn="l" rtl="0">
-              <a:spcBef>
-                <a:spcPts val="0"/>
-              </a:spcBef>
-              <a:spcAft>
-                <a:spcPts val="0"/>
-              </a:spcAft>
-              <a:buNone/>
-            </a:pPr>
-            <a:r>
-              <a:rPr lang="en-US" sz="1800" b="1" i="0" u="none" strike="noStrike" cap="none">
-                <a:solidFill>
-                  <a:srgbClr val="E11D48"/>
-                </a:solidFill>
-                <a:latin typeface="Roboto"/>
-                <a:ea typeface="Roboto"/>
-                <a:cs typeface="Roboto"/>
-                <a:sym typeface="Roboto"/>
-              </a:rPr>
-              <a:t>Quan Trọng Nhất</a:t>
-            </a:r>
-            <a:endParaRPr/>
-          </a:p>
-        </p:txBody>
-      </p:sp>
-      <p:sp>
-        <p:nvSpPr>
-          <p:cNvPr id="363" name="Google Shape;363;p25"/>
-          <p:cNvSpPr txBox="1"/>
-          <p:nvPr/>
-        </p:nvSpPr>
-        <p:spPr>
-          <a:xfrm>
-            <a:off x="866777" y="2833687"/>
-            <a:ext cx="10458451" cy="369332"/>
-          </a:xfrm>
-          <a:prstGeom prst="rect">
-            <a:avLst/>
-          </a:prstGeom>
-          <a:noFill/>
-          <a:ln>
-            <a:noFill/>
-          </a:ln>
-        </p:spPr>
-        <p:txBody>
-          <a:bodyPr spcFirstLastPara="1" wrap="square" lIns="0" tIns="0" rIns="0" bIns="0" anchor="t" anchorCtr="0">
-            <a:spAutoFit/>
-          </a:bodyPr>
-          <a:lstStyle/>
-          <a:p>
-            <a:pPr marL="0" marR="0" lvl="0" indent="0" algn="l" rtl="0">
-              <a:lnSpc>
-                <a:spcPct val="160000"/>
-              </a:lnSpc>
-              <a:spcBef>
-                <a:spcPts val="0"/>
-              </a:spcBef>
-              <a:spcAft>
-                <a:spcPts val="0"/>
-              </a:spcAft>
-              <a:buNone/>
-            </a:pPr>
-            <a:r>
-              <a:rPr lang="en-US" sz="1500" b="0" i="0" u="none" strike="noStrike" cap="none">
-                <a:solidFill>
-                  <a:srgbClr val="334155"/>
-                </a:solidFill>
-                <a:latin typeface="Open Sans"/>
-                <a:ea typeface="Open Sans"/>
-                <a:cs typeface="Open Sans"/>
-                <a:sym typeface="Open Sans"/>
-              </a:rPr>
-              <a:t>Lưu trữ dữ liệu thiết kế từ Canvas.</a:t>
-            </a:r>
-            <a:endParaRPr/>
-          </a:p>
-        </p:txBody>
-      </p:sp>
-      <p:sp>
-        <p:nvSpPr>
-          <p:cNvPr id="364" name="Google Shape;364;p25"/>
-          <p:cNvSpPr txBox="1"/>
-          <p:nvPr/>
-        </p:nvSpPr>
-        <p:spPr>
-          <a:xfrm>
-            <a:off x="866777" y="4881562"/>
-            <a:ext cx="10458451" cy="369332"/>
-          </a:xfrm>
-          <a:prstGeom prst="rect">
-            <a:avLst/>
-          </a:prstGeom>
-          <a:noFill/>
-          <a:ln>
-            <a:noFill/>
-          </a:ln>
-        </p:spPr>
-        <p:txBody>
-          <a:bodyPr spcFirstLastPara="1" wrap="square" lIns="0" tIns="0" rIns="0" bIns="0" anchor="t" anchorCtr="0">
-            <a:spAutoFit/>
-          </a:bodyPr>
-          <a:lstStyle/>
-          <a:p>
-            <a:pPr marL="0" marR="0" lvl="0" indent="0" algn="l" rtl="0">
-              <a:lnSpc>
-                <a:spcPct val="160000"/>
-              </a:lnSpc>
-              <a:spcBef>
-                <a:spcPts val="0"/>
-              </a:spcBef>
-              <a:spcAft>
-                <a:spcPts val="0"/>
-              </a:spcAft>
-              <a:buNone/>
-            </a:pPr>
-            <a:r>
-              <a:rPr lang="en-US" sz="1500" b="0" i="0" u="none" strike="noStrike" cap="none">
-                <a:solidFill>
-                  <a:srgbClr val="334155"/>
-                </a:solidFill>
-                <a:latin typeface="Open Sans"/>
-                <a:ea typeface="Open Sans"/>
-                <a:cs typeface="Open Sans"/>
-                <a:sym typeface="Open Sans"/>
-              </a:rPr>
-              <a:t>Dữ liệu JSON này cho phép Admin "Re-render" lại thiết kế để in ấn.</a:t>
-            </a:r>
-            <a:endParaRPr/>
-          </a:p>
-        </p:txBody>
-      </p:sp>
-      <p:pic>
-        <p:nvPicPr>
-          <p:cNvPr id="365" name="Google Shape;365;p25" descr="image.png"/>
-          <p:cNvPicPr preferRelativeResize="0"/>
-          <p:nvPr/>
-        </p:nvPicPr>
-        <p:blipFill rotWithShape="1">
-          <a:blip r:embed="rId7">
-            <a:alphaModFix/>
-          </a:blip>
-          <a:srcRect/>
-          <a:stretch/>
-        </p:blipFill>
-        <p:spPr>
-          <a:xfrm>
-            <a:off x="381000" y="6557962"/>
-            <a:ext cx="152400" cy="133350"/>
-          </a:xfrm>
-          <a:prstGeom prst="rect">
-            <a:avLst/>
-          </a:prstGeom>
-          <a:noFill/>
-          <a:ln>
-            <a:noFill/>
-          </a:ln>
-        </p:spPr>
-      </p:pic>
-    </p:spTree>
-  </p:cSld>
-  <p:clrMapOvr>
-    <a:masterClrMapping/>
-  </p:clrMapOvr>
-</p:sld>
-</file>
-
-<file path=ppt/slides/slide14.xml><?xml version="1.0" encoding="utf-8"?>
-<p:sld xmlns:a="http://schemas.openxmlformats.org/drawingml/2006/main" xmlns:r="http://schemas.openxmlformats.org/officeDocument/2006/relationships" xmlns:p="http://schemas.openxmlformats.org/presentationml/2006/main">
-  <p:cSld>
-    <p:bg>
-      <p:bgPr>
-        <a:solidFill>
-          <a:srgbClr val="FFFFFF"/>
-        </a:solidFill>
-        <a:effectLst/>
-      </p:bgPr>
-    </p:bg>
     <p:spTree>
       <p:nvGrpSpPr>
         <p:cNvPr id="1" name="Shape 369"/>
@@ -10073,7 +6815,7 @@
       </p:pic>
       <p:pic>
         <p:nvPicPr>
-          <p:cNvPr id="371" name="Google Shape;371;p26" descr="image.png"/>
+          <p:cNvPr id="373" name="Google Shape;373;p26" descr="image.png"/>
           <p:cNvPicPr preferRelativeResize="0"/>
           <p:nvPr/>
         </p:nvPicPr>
@@ -10086,8 +6828,8 @@
         </p:blipFill>
         <p:spPr>
           <a:xfrm>
-            <a:off x="571505" y="2505080"/>
-            <a:ext cx="5286375" cy="2600325"/>
+            <a:off x="0" y="6381750"/>
+            <a:ext cx="12192000" cy="476250"/>
           </a:xfrm>
           <a:prstGeom prst="rect">
             <a:avLst/>
@@ -10098,9 +6840,153 @@
           </a:ln>
         </p:spPr>
       </p:pic>
+      <p:sp>
+        <p:nvSpPr>
+          <p:cNvPr id="374" name="Google Shape;374;p26"/>
+          <p:cNvSpPr txBox="1"/>
+          <p:nvPr/>
+        </p:nvSpPr>
+        <p:spPr>
+          <a:xfrm>
+            <a:off x="571501" y="381001"/>
+            <a:ext cx="3829051" cy="915635"/>
+          </a:xfrm>
+          <a:prstGeom prst="rect">
+            <a:avLst/>
+          </a:prstGeom>
+          <a:noFill/>
+          <a:ln>
+            <a:noFill/>
+          </a:ln>
+        </p:spPr>
+        <p:txBody>
+          <a:bodyPr spcFirstLastPara="1" wrap="square" lIns="0" tIns="0" rIns="0" bIns="0" anchor="t" anchorCtr="0">
+            <a:spAutoFit/>
+          </a:bodyPr>
+          <a:lstStyle/>
+          <a:p>
+            <a:r>
+              <a:rPr lang="vi-VN" sz="3150" b="1" dirty="0" smtClean="0">
+                <a:solidFill>
+                  <a:srgbClr val="003366"/>
+                </a:solidFill>
+                <a:latin typeface="Roboto"/>
+                <a:ea typeface="Roboto"/>
+                <a:cs typeface="Roboto"/>
+                <a:sym typeface="Roboto"/>
+              </a:rPr>
+              <a:t>Sơ </a:t>
+            </a:r>
+            <a:r>
+              <a:rPr lang="vi-VN" sz="3150" b="1" dirty="0">
+                <a:solidFill>
+                  <a:srgbClr val="003366"/>
+                </a:solidFill>
+                <a:latin typeface="Roboto"/>
+                <a:ea typeface="Roboto"/>
+                <a:cs typeface="Roboto"/>
+                <a:sym typeface="Roboto"/>
+              </a:rPr>
+              <a:t>đồ DFD mức </a:t>
+            </a:r>
+            <a:r>
+              <a:rPr lang="en-US" sz="3150" b="1" dirty="0" smtClean="0">
+                <a:solidFill>
+                  <a:srgbClr val="003366"/>
+                </a:solidFill>
+                <a:latin typeface="Roboto"/>
+                <a:ea typeface="Roboto"/>
+                <a:cs typeface="Roboto"/>
+                <a:sym typeface="Roboto"/>
+              </a:rPr>
+              <a:t>2</a:t>
+            </a:r>
+            <a:endParaRPr lang="vi-VN" sz="3150" b="1" dirty="0">
+              <a:solidFill>
+                <a:srgbClr val="003366"/>
+              </a:solidFill>
+              <a:latin typeface="Roboto"/>
+              <a:ea typeface="Roboto"/>
+              <a:cs typeface="Roboto"/>
+              <a:sym typeface="Roboto"/>
+            </a:endParaRPr>
+          </a:p>
+          <a:p>
+            <a:endParaRPr lang="en-GB" b="1" dirty="0" smtClean="0">
+              <a:solidFill>
+                <a:schemeClr val="accent1">
+                  <a:lumMod val="75000"/>
+                </a:schemeClr>
+              </a:solidFill>
+            </a:endParaRPr>
+          </a:p>
+          <a:p>
+            <a:pPr marL="0" marR="0" lvl="0" indent="0" algn="l" rtl="0">
+              <a:spcBef>
+                <a:spcPts val="0"/>
+              </a:spcBef>
+              <a:spcAft>
+                <a:spcPts val="0"/>
+              </a:spcAft>
+              <a:buNone/>
+            </a:pPr>
+            <a:endParaRPr dirty="0"/>
+          </a:p>
+        </p:txBody>
+      </p:sp>
+      <p:sp>
+        <p:nvSpPr>
+          <p:cNvPr id="375" name="Google Shape;375;p26"/>
+          <p:cNvSpPr txBox="1"/>
+          <p:nvPr/>
+        </p:nvSpPr>
+        <p:spPr>
+          <a:xfrm>
+            <a:off x="628651" y="6463061"/>
+            <a:ext cx="876300" cy="323165"/>
+          </a:xfrm>
+          <a:prstGeom prst="rect">
+            <a:avLst/>
+          </a:prstGeom>
+          <a:noFill/>
+          <a:ln>
+            <a:noFill/>
+          </a:ln>
+        </p:spPr>
+        <p:txBody>
+          <a:bodyPr spcFirstLastPara="1" wrap="square" lIns="0" tIns="0" rIns="0" bIns="0" anchor="ctr" anchorCtr="0">
+            <a:spAutoFit/>
+          </a:bodyPr>
+          <a:lstStyle/>
+          <a:p>
+            <a:pPr marL="0" marR="0" lvl="0" indent="0" algn="l" rtl="0">
+              <a:spcBef>
+                <a:spcPts val="0"/>
+              </a:spcBef>
+              <a:spcAft>
+                <a:spcPts val="0"/>
+              </a:spcAft>
+              <a:buNone/>
+            </a:pPr>
+            <a:r>
+              <a:rPr lang="en-US" sz="1050" b="1" i="0" u="none" strike="noStrike" cap="none">
+                <a:solidFill>
+                  <a:srgbClr val="003366"/>
+                </a:solidFill>
+                <a:latin typeface="Open Sans SemiBold"/>
+                <a:ea typeface="Open Sans SemiBold"/>
+                <a:cs typeface="Open Sans SemiBold"/>
+                <a:sym typeface="Open Sans SemiBold"/>
+              </a:rPr>
+              <a:t>Mytee Studio</a:t>
+            </a:r>
+            <a:endParaRPr/>
+          </a:p>
+        </p:txBody>
+      </p:sp>
       <p:pic>
         <p:nvPicPr>
-          <p:cNvPr id="372" name="Google Shape;372;p26" descr="image.png"/>
+          <p:cNvPr id="378" name="Google Shape;378;p26" descr="image.png"/>
           <p:cNvPicPr preferRelativeResize="0"/>
           <p:nvPr/>
         </p:nvPicPr>
@@ -10113,8 +6999,8 @@
         </p:blipFill>
         <p:spPr>
           <a:xfrm>
-            <a:off x="6334129" y="2505080"/>
-            <a:ext cx="5286375" cy="2600325"/>
+            <a:off x="381000" y="6557962"/>
+            <a:ext cx="152400" cy="133350"/>
           </a:xfrm>
           <a:prstGeom prst="rect">
             <a:avLst/>
@@ -10127,1351 +7013,70 @@
       </p:pic>
       <p:pic>
         <p:nvPicPr>
-          <p:cNvPr id="373" name="Google Shape;373;p26" descr="image.png"/>
-          <p:cNvPicPr preferRelativeResize="0"/>
+          <p:cNvPr id="8" name="Picture 7"/>
+          <p:cNvPicPr/>
           <p:nvPr/>
         </p:nvPicPr>
-        <p:blipFill rotWithShape="1">
-          <a:blip r:embed="rId6">
-            <a:alphaModFix/>
-          </a:blip>
-          <a:srcRect/>
-          <a:stretch/>
+        <p:blipFill>
+          <a:blip r:embed="rId6"/>
+          <a:stretch>
+            <a:fillRect/>
+          </a:stretch>
         </p:blipFill>
         <p:spPr>
           <a:xfrm>
-            <a:off x="0" y="6381750"/>
-            <a:ext cx="12192000" cy="476250"/>
-          </a:xfrm>
-          <a:prstGeom prst="rect">
-            <a:avLst/>
-          </a:prstGeom>
-          <a:noFill/>
-          <a:ln>
-            <a:noFill/>
-          </a:ln>
+            <a:off x="1273215" y="1330516"/>
+            <a:ext cx="9479666" cy="1792766"/>
+          </a:xfrm>
+          <a:prstGeom prst="rect">
+            <a:avLst/>
+          </a:prstGeom>
         </p:spPr>
       </p:pic>
-      <p:sp>
-        <p:nvSpPr>
-          <p:cNvPr id="374" name="Google Shape;374;p26"/>
-          <p:cNvSpPr txBox="1"/>
-          <p:nvPr/>
-        </p:nvSpPr>
-        <p:spPr>
-          <a:xfrm>
-            <a:off x="571501" y="381001"/>
-            <a:ext cx="3829051" cy="969496"/>
-          </a:xfrm>
-          <a:prstGeom prst="rect">
-            <a:avLst/>
-          </a:prstGeom>
-          <a:noFill/>
-          <a:ln>
-            <a:noFill/>
-          </a:ln>
-        </p:spPr>
-        <p:txBody>
-          <a:bodyPr spcFirstLastPara="1" wrap="square" lIns="0" tIns="0" rIns="0" bIns="0" anchor="t" anchorCtr="0">
-            <a:spAutoFit/>
-          </a:bodyPr>
-          <a:lstStyle/>
-          <a:p>
-            <a:pPr marL="0" marR="0" lvl="0" indent="0" algn="l" rtl="0">
-              <a:spcBef>
-                <a:spcPts val="0"/>
-              </a:spcBef>
-              <a:spcAft>
-                <a:spcPts val="0"/>
-              </a:spcAft>
-              <a:buNone/>
-            </a:pPr>
-            <a:r>
-              <a:rPr lang="en-US" sz="3150" b="1" i="0" u="none" strike="noStrike" cap="none">
-                <a:solidFill>
-                  <a:srgbClr val="003366"/>
-                </a:solidFill>
-                <a:latin typeface="Roboto"/>
-                <a:ea typeface="Roboto"/>
-                <a:cs typeface="Roboto"/>
-                <a:sym typeface="Roboto"/>
-              </a:rPr>
-              <a:t>Chi Tiết Bảng: Orders</a:t>
-            </a:r>
-            <a:endParaRPr/>
-          </a:p>
-        </p:txBody>
-      </p:sp>
-      <p:sp>
-        <p:nvSpPr>
-          <p:cNvPr id="375" name="Google Shape;375;p26"/>
-          <p:cNvSpPr txBox="1"/>
-          <p:nvPr/>
-        </p:nvSpPr>
-        <p:spPr>
-          <a:xfrm>
-            <a:off x="628651" y="6463061"/>
-            <a:ext cx="876300" cy="323165"/>
-          </a:xfrm>
-          <a:prstGeom prst="rect">
-            <a:avLst/>
-          </a:prstGeom>
-          <a:noFill/>
-          <a:ln>
-            <a:noFill/>
-          </a:ln>
-        </p:spPr>
-        <p:txBody>
-          <a:bodyPr spcFirstLastPara="1" wrap="square" lIns="0" tIns="0" rIns="0" bIns="0" anchor="ctr" anchorCtr="0">
-            <a:spAutoFit/>
-          </a:bodyPr>
-          <a:lstStyle/>
-          <a:p>
-            <a:pPr marL="0" marR="0" lvl="0" indent="0" algn="l" rtl="0">
-              <a:spcBef>
-                <a:spcPts val="0"/>
-              </a:spcBef>
-              <a:spcAft>
-                <a:spcPts val="0"/>
-              </a:spcAft>
-              <a:buNone/>
-            </a:pPr>
-            <a:r>
-              <a:rPr lang="en-US" sz="1050" b="1" i="0" u="none" strike="noStrike" cap="none">
-                <a:solidFill>
-                  <a:srgbClr val="003366"/>
-                </a:solidFill>
-                <a:latin typeface="Open Sans SemiBold"/>
-                <a:ea typeface="Open Sans SemiBold"/>
-                <a:cs typeface="Open Sans SemiBold"/>
-                <a:sym typeface="Open Sans SemiBold"/>
-              </a:rPr>
-              <a:t>Mytee Studio</a:t>
-            </a:r>
-            <a:endParaRPr/>
-          </a:p>
-        </p:txBody>
-      </p:sp>
-      <p:sp>
-        <p:nvSpPr>
-          <p:cNvPr id="376" name="Google Shape;376;p26"/>
-          <p:cNvSpPr txBox="1"/>
-          <p:nvPr/>
-        </p:nvSpPr>
-        <p:spPr>
-          <a:xfrm>
-            <a:off x="11306180" y="6534156"/>
-            <a:ext cx="504825" cy="161583"/>
-          </a:xfrm>
-          <a:prstGeom prst="rect">
-            <a:avLst/>
-          </a:prstGeom>
-          <a:noFill/>
-          <a:ln>
-            <a:noFill/>
-          </a:ln>
-        </p:spPr>
-        <p:txBody>
-          <a:bodyPr spcFirstLastPara="1" wrap="square" lIns="0" tIns="0" rIns="0" bIns="0" anchor="t" anchorCtr="0">
-            <a:spAutoFit/>
-          </a:bodyPr>
-          <a:lstStyle/>
-          <a:p>
-            <a:pPr marL="0" marR="0" lvl="0" indent="0" algn="l" rtl="0">
-              <a:spcBef>
-                <a:spcPts val="0"/>
-              </a:spcBef>
-              <a:spcAft>
-                <a:spcPts val="0"/>
-              </a:spcAft>
-              <a:buNone/>
-            </a:pPr>
-            <a:r>
-              <a:rPr lang="en-US" sz="1050" b="0" i="0" u="none" strike="noStrike" cap="none">
-                <a:solidFill>
-                  <a:srgbClr val="64748B"/>
-                </a:solidFill>
-                <a:latin typeface="Open Sans"/>
-                <a:ea typeface="Open Sans"/>
-                <a:cs typeface="Open Sans"/>
-                <a:sym typeface="Open Sans"/>
-              </a:rPr>
-              <a:t>Slide 14</a:t>
-            </a:r>
-            <a:endParaRPr/>
-          </a:p>
-        </p:txBody>
-      </p:sp>
-      <p:sp>
-        <p:nvSpPr>
-          <p:cNvPr id="377" name="Google Shape;377;p26"/>
-          <p:cNvSpPr/>
-          <p:nvPr/>
-        </p:nvSpPr>
-        <p:spPr>
-          <a:xfrm>
-            <a:off x="2200275" y="595312"/>
-            <a:ext cx="571500" cy="38100"/>
-          </a:xfrm>
-          <a:prstGeom prst="rect">
-            <a:avLst/>
-          </a:prstGeom>
-          <a:solidFill>
-            <a:srgbClr val="F59E0B"/>
-          </a:solidFill>
-          <a:ln>
-            <a:noFill/>
-          </a:ln>
-        </p:spPr>
-        <p:txBody>
-          <a:bodyPr spcFirstLastPara="1" wrap="square" lIns="91425" tIns="45700" rIns="91425" bIns="45700" anchor="ctr" anchorCtr="0">
-            <a:noAutofit/>
-          </a:bodyPr>
-          <a:lstStyle/>
-          <a:p>
-            <a:pPr marL="0" marR="0" lvl="0" indent="0" algn="ctr" rtl="0">
-              <a:spcBef>
-                <a:spcPts val="0"/>
-              </a:spcBef>
-              <a:spcAft>
-                <a:spcPts val="0"/>
-              </a:spcAft>
-              <a:buNone/>
-            </a:pPr>
-            <a:endParaRPr sz="1800" b="0" i="0" u="none" strike="noStrike" cap="none">
-              <a:solidFill>
-                <a:schemeClr val="dk1"/>
-              </a:solidFill>
-              <a:latin typeface="Calibri"/>
-              <a:ea typeface="Calibri"/>
-              <a:cs typeface="Calibri"/>
-              <a:sym typeface="Calibri"/>
-            </a:endParaRPr>
-          </a:p>
-        </p:txBody>
-      </p:sp>
       <p:pic>
         <p:nvPicPr>
-          <p:cNvPr id="378" name="Google Shape;378;p26" descr="image.png"/>
-          <p:cNvPicPr preferRelativeResize="0"/>
+          <p:cNvPr id="9" name="Picture 8"/>
+          <p:cNvPicPr/>
           <p:nvPr/>
         </p:nvPicPr>
-        <p:blipFill rotWithShape="1">
-          <a:blip r:embed="rId7">
-            <a:alphaModFix/>
-          </a:blip>
-          <a:srcRect/>
-          <a:stretch/>
+        <p:blipFill>
+          <a:blip r:embed="rId7"/>
+          <a:stretch>
+            <a:fillRect/>
+          </a:stretch>
         </p:blipFill>
         <p:spPr>
           <a:xfrm>
-            <a:off x="381000" y="6557962"/>
-            <a:ext cx="152400" cy="133350"/>
-          </a:xfrm>
-          <a:prstGeom prst="rect">
-            <a:avLst/>
-          </a:prstGeom>
-          <a:noFill/>
-          <a:ln>
-            <a:noFill/>
-          </a:ln>
+            <a:off x="1273215" y="2922114"/>
+            <a:ext cx="9287446" cy="3425917"/>
+          </a:xfrm>
+          <a:prstGeom prst="rect">
+            <a:avLst/>
+          </a:prstGeom>
         </p:spPr>
       </p:pic>
-      <p:sp>
-        <p:nvSpPr>
-          <p:cNvPr id="379" name="Google Shape;379;p26"/>
-          <p:cNvSpPr txBox="1"/>
-          <p:nvPr/>
-        </p:nvSpPr>
-        <p:spPr>
-          <a:xfrm>
-            <a:off x="904875" y="2790830"/>
-            <a:ext cx="4900612" cy="276999"/>
-          </a:xfrm>
-          <a:prstGeom prst="rect">
-            <a:avLst/>
-          </a:prstGeom>
-          <a:noFill/>
-          <a:ln>
-            <a:noFill/>
-          </a:ln>
-        </p:spPr>
-        <p:txBody>
-          <a:bodyPr spcFirstLastPara="1" wrap="square" lIns="0" tIns="0" rIns="0" bIns="0" anchor="t" anchorCtr="0">
-            <a:spAutoFit/>
-          </a:bodyPr>
-          <a:lstStyle/>
-          <a:p>
-            <a:pPr marL="0" marR="0" lvl="0" indent="0" algn="l" rtl="0">
-              <a:spcBef>
-                <a:spcPts val="0"/>
-              </a:spcBef>
-              <a:spcAft>
-                <a:spcPts val="0"/>
-              </a:spcAft>
-              <a:buNone/>
-            </a:pPr>
-            <a:r>
-              <a:rPr lang="en-US" sz="1800" b="1" i="0" u="none" strike="noStrike" cap="none">
-                <a:solidFill>
-                  <a:srgbClr val="003366"/>
-                </a:solidFill>
-                <a:latin typeface="Roboto"/>
-                <a:ea typeface="Roboto"/>
-                <a:cs typeface="Roboto"/>
-                <a:sym typeface="Roboto"/>
-              </a:rPr>
-              <a:t>Bảng Orders</a:t>
-            </a:r>
-            <a:endParaRPr/>
-          </a:p>
-        </p:txBody>
-      </p:sp>
-      <p:sp>
-        <p:nvSpPr>
-          <p:cNvPr id="380" name="Google Shape;380;p26"/>
-          <p:cNvSpPr txBox="1"/>
-          <p:nvPr/>
-        </p:nvSpPr>
-        <p:spPr>
-          <a:xfrm>
-            <a:off x="904877" y="3200400"/>
-            <a:ext cx="4667251" cy="369332"/>
-          </a:xfrm>
-          <a:prstGeom prst="rect">
-            <a:avLst/>
-          </a:prstGeom>
-          <a:noFill/>
-          <a:ln>
-            <a:noFill/>
-          </a:ln>
-        </p:spPr>
-        <p:txBody>
-          <a:bodyPr spcFirstLastPara="1" wrap="square" lIns="0" tIns="0" rIns="0" bIns="0" anchor="t" anchorCtr="0">
-            <a:spAutoFit/>
-          </a:bodyPr>
-          <a:lstStyle/>
-          <a:p>
-            <a:pPr marL="0" marR="0" lvl="0" indent="0" algn="l" rtl="0">
-              <a:lnSpc>
-                <a:spcPct val="160000"/>
-              </a:lnSpc>
-              <a:spcBef>
-                <a:spcPts val="0"/>
-              </a:spcBef>
-              <a:spcAft>
-                <a:spcPts val="0"/>
-              </a:spcAft>
-              <a:buNone/>
-            </a:pPr>
-            <a:r>
-              <a:rPr lang="en-US" sz="1500" b="0" i="0" u="none" strike="noStrike" cap="none">
-                <a:solidFill>
-                  <a:srgbClr val="334155"/>
-                </a:solidFill>
-                <a:latin typeface="Open Sans"/>
-                <a:ea typeface="Open Sans"/>
-                <a:cs typeface="Open Sans"/>
-                <a:sym typeface="Open Sans"/>
-              </a:rPr>
-              <a:t>Lưu thông tin tổng quan đơn hàng:</a:t>
-            </a:r>
-            <a:endParaRPr/>
-          </a:p>
-        </p:txBody>
-      </p:sp>
-      <p:sp>
-        <p:nvSpPr>
-          <p:cNvPr id="381" name="Google Shape;381;p26"/>
-          <p:cNvSpPr txBox="1"/>
-          <p:nvPr/>
-        </p:nvSpPr>
-        <p:spPr>
-          <a:xfrm>
-            <a:off x="6667503" y="2790830"/>
-            <a:ext cx="4900612" cy="276999"/>
-          </a:xfrm>
-          <a:prstGeom prst="rect">
-            <a:avLst/>
-          </a:prstGeom>
-          <a:noFill/>
-          <a:ln>
-            <a:noFill/>
-          </a:ln>
-        </p:spPr>
-        <p:txBody>
-          <a:bodyPr spcFirstLastPara="1" wrap="square" lIns="0" tIns="0" rIns="0" bIns="0" anchor="t" anchorCtr="0">
-            <a:spAutoFit/>
-          </a:bodyPr>
-          <a:lstStyle/>
-          <a:p>
-            <a:pPr marL="0" marR="0" lvl="0" indent="0" algn="l" rtl="0">
-              <a:spcBef>
-                <a:spcPts val="0"/>
-              </a:spcBef>
-              <a:spcAft>
-                <a:spcPts val="0"/>
-              </a:spcAft>
-              <a:buNone/>
-            </a:pPr>
-            <a:r>
-              <a:rPr lang="en-US" sz="1800" b="1" i="0" u="none" strike="noStrike" cap="none">
-                <a:solidFill>
-                  <a:srgbClr val="003366"/>
-                </a:solidFill>
-                <a:latin typeface="Roboto"/>
-                <a:ea typeface="Roboto"/>
-                <a:cs typeface="Roboto"/>
-                <a:sym typeface="Roboto"/>
-              </a:rPr>
-              <a:t>Bảng Order Items</a:t>
-            </a:r>
-            <a:endParaRPr/>
-          </a:p>
-        </p:txBody>
-      </p:sp>
-      <p:sp>
-        <p:nvSpPr>
-          <p:cNvPr id="382" name="Google Shape;382;p26"/>
-          <p:cNvSpPr txBox="1"/>
-          <p:nvPr/>
-        </p:nvSpPr>
-        <p:spPr>
-          <a:xfrm>
-            <a:off x="6667501" y="3200400"/>
-            <a:ext cx="4667251" cy="369332"/>
-          </a:xfrm>
-          <a:prstGeom prst="rect">
-            <a:avLst/>
-          </a:prstGeom>
-          <a:noFill/>
-          <a:ln>
-            <a:noFill/>
-          </a:ln>
-        </p:spPr>
-        <p:txBody>
-          <a:bodyPr spcFirstLastPara="1" wrap="square" lIns="0" tIns="0" rIns="0" bIns="0" anchor="t" anchorCtr="0">
-            <a:spAutoFit/>
-          </a:bodyPr>
-          <a:lstStyle/>
-          <a:p>
-            <a:pPr marL="0" marR="0" lvl="0" indent="0" algn="l" rtl="0">
-              <a:lnSpc>
-                <a:spcPct val="160000"/>
-              </a:lnSpc>
-              <a:spcBef>
-                <a:spcPts val="0"/>
-              </a:spcBef>
-              <a:spcAft>
-                <a:spcPts val="0"/>
-              </a:spcAft>
-              <a:buNone/>
-            </a:pPr>
-            <a:r>
-              <a:rPr lang="en-US" sz="1500" b="0" i="0" u="none" strike="noStrike" cap="none">
-                <a:solidFill>
-                  <a:srgbClr val="334155"/>
-                </a:solidFill>
-                <a:latin typeface="Open Sans"/>
-                <a:ea typeface="Open Sans"/>
-                <a:cs typeface="Open Sans"/>
-                <a:sym typeface="Open Sans"/>
-              </a:rPr>
-              <a:t>Lưu chi tiết từng món hàng:</a:t>
-            </a:r>
-            <a:endParaRPr/>
-          </a:p>
-        </p:txBody>
-      </p:sp>
-      <p:sp>
-        <p:nvSpPr>
-          <p:cNvPr id="383" name="Google Shape;383;p26"/>
-          <p:cNvSpPr txBox="1"/>
-          <p:nvPr/>
-        </p:nvSpPr>
-        <p:spPr>
-          <a:xfrm>
-            <a:off x="828675" y="3600450"/>
-            <a:ext cx="76200" cy="230832"/>
-          </a:xfrm>
-          <a:prstGeom prst="rect">
-            <a:avLst/>
-          </a:prstGeom>
-          <a:noFill/>
-          <a:ln>
-            <a:noFill/>
-          </a:ln>
-        </p:spPr>
-        <p:txBody>
-          <a:bodyPr spcFirstLastPara="1" wrap="square" lIns="0" tIns="0" rIns="0" bIns="0" anchor="t" anchorCtr="0">
-            <a:spAutoFit/>
-          </a:bodyPr>
-          <a:lstStyle/>
-          <a:p>
-            <a:pPr marL="0" marR="0" lvl="0" indent="0" algn="l" rtl="0">
-              <a:spcBef>
-                <a:spcPts val="0"/>
-              </a:spcBef>
-              <a:spcAft>
-                <a:spcPts val="0"/>
-              </a:spcAft>
-              <a:buNone/>
-            </a:pPr>
-            <a:r>
-              <a:rPr lang="en-US" sz="1500" b="0" i="0" u="none" strike="noStrike" cap="none">
-                <a:solidFill>
-                  <a:srgbClr val="334155"/>
-                </a:solidFill>
-                <a:latin typeface="Open Sans"/>
-                <a:ea typeface="Open Sans"/>
-                <a:cs typeface="Open Sans"/>
-                <a:sym typeface="Open Sans"/>
-              </a:rPr>
-              <a:t>•</a:t>
-            </a:r>
-            <a:endParaRPr/>
-          </a:p>
-        </p:txBody>
-      </p:sp>
-      <p:sp>
-        <p:nvSpPr>
-          <p:cNvPr id="384" name="Google Shape;384;p26"/>
-          <p:cNvSpPr txBox="1"/>
-          <p:nvPr/>
-        </p:nvSpPr>
-        <p:spPr>
-          <a:xfrm>
-            <a:off x="904877" y="3600450"/>
-            <a:ext cx="4667251" cy="369332"/>
-          </a:xfrm>
-          <a:prstGeom prst="rect">
-            <a:avLst/>
-          </a:prstGeom>
-          <a:noFill/>
-          <a:ln>
-            <a:noFill/>
-          </a:ln>
-        </p:spPr>
-        <p:txBody>
-          <a:bodyPr spcFirstLastPara="1" wrap="square" lIns="76200" tIns="0" rIns="0" bIns="0" anchor="t" anchorCtr="0">
-            <a:spAutoFit/>
-          </a:bodyPr>
-          <a:lstStyle/>
-          <a:p>
-            <a:pPr marL="0" marR="0" lvl="0" indent="0" algn="l" rtl="0">
-              <a:lnSpc>
-                <a:spcPct val="160000"/>
-              </a:lnSpc>
-              <a:spcBef>
-                <a:spcPts val="0"/>
-              </a:spcBef>
-              <a:spcAft>
-                <a:spcPts val="0"/>
-              </a:spcAft>
-              <a:buNone/>
-            </a:pPr>
-            <a:r>
-              <a:rPr lang="en-US" sz="1500" b="0" i="0" u="none" strike="noStrike" cap="none">
-                <a:solidFill>
-                  <a:srgbClr val="334155"/>
-                </a:solidFill>
-                <a:latin typeface="Open Sans"/>
-                <a:ea typeface="Open Sans"/>
-                <a:cs typeface="Open Sans"/>
-                <a:sym typeface="Open Sans"/>
-              </a:rPr>
-              <a:t>User ID</a:t>
-            </a:r>
-            <a:endParaRPr/>
-          </a:p>
-        </p:txBody>
-      </p:sp>
-      <p:sp>
-        <p:nvSpPr>
-          <p:cNvPr id="385" name="Google Shape;385;p26"/>
-          <p:cNvSpPr txBox="1"/>
-          <p:nvPr/>
-        </p:nvSpPr>
-        <p:spPr>
-          <a:xfrm>
-            <a:off x="828675" y="3905250"/>
-            <a:ext cx="76200" cy="230832"/>
-          </a:xfrm>
-          <a:prstGeom prst="rect">
-            <a:avLst/>
-          </a:prstGeom>
-          <a:noFill/>
-          <a:ln>
-            <a:noFill/>
-          </a:ln>
-        </p:spPr>
-        <p:txBody>
-          <a:bodyPr spcFirstLastPara="1" wrap="square" lIns="0" tIns="0" rIns="0" bIns="0" anchor="t" anchorCtr="0">
-            <a:spAutoFit/>
-          </a:bodyPr>
-          <a:lstStyle/>
-          <a:p>
-            <a:pPr marL="0" marR="0" lvl="0" indent="0" algn="l" rtl="0">
-              <a:spcBef>
-                <a:spcPts val="0"/>
-              </a:spcBef>
-              <a:spcAft>
-                <a:spcPts val="0"/>
-              </a:spcAft>
-              <a:buNone/>
-            </a:pPr>
-            <a:r>
-              <a:rPr lang="en-US" sz="1500" b="0" i="0" u="none" strike="noStrike" cap="none">
-                <a:solidFill>
-                  <a:srgbClr val="334155"/>
-                </a:solidFill>
-                <a:latin typeface="Open Sans"/>
-                <a:ea typeface="Open Sans"/>
-                <a:cs typeface="Open Sans"/>
-                <a:sym typeface="Open Sans"/>
-              </a:rPr>
-              <a:t>•</a:t>
-            </a:r>
-            <a:endParaRPr/>
-          </a:p>
-        </p:txBody>
-      </p:sp>
-      <p:sp>
-        <p:nvSpPr>
-          <p:cNvPr id="386" name="Google Shape;386;p26"/>
-          <p:cNvSpPr txBox="1"/>
-          <p:nvPr/>
-        </p:nvSpPr>
-        <p:spPr>
-          <a:xfrm>
-            <a:off x="904877" y="3905250"/>
-            <a:ext cx="4667251" cy="369332"/>
-          </a:xfrm>
-          <a:prstGeom prst="rect">
-            <a:avLst/>
-          </a:prstGeom>
-          <a:noFill/>
-          <a:ln>
-            <a:noFill/>
-          </a:ln>
-        </p:spPr>
-        <p:txBody>
-          <a:bodyPr spcFirstLastPara="1" wrap="square" lIns="76200" tIns="0" rIns="0" bIns="0" anchor="t" anchorCtr="0">
-            <a:spAutoFit/>
-          </a:bodyPr>
-          <a:lstStyle/>
-          <a:p>
-            <a:pPr marL="0" marR="0" lvl="0" indent="0" algn="l" rtl="0">
-              <a:lnSpc>
-                <a:spcPct val="160000"/>
-              </a:lnSpc>
-              <a:spcBef>
-                <a:spcPts val="0"/>
-              </a:spcBef>
-              <a:spcAft>
-                <a:spcPts val="0"/>
-              </a:spcAft>
-              <a:buNone/>
-            </a:pPr>
-            <a:r>
-              <a:rPr lang="en-US" sz="1500" b="0" i="0" u="none" strike="noStrike" cap="none" dirty="0">
-                <a:solidFill>
-                  <a:srgbClr val="334155"/>
-                </a:solidFill>
-                <a:latin typeface="Open Sans"/>
-                <a:ea typeface="Open Sans"/>
-                <a:cs typeface="Open Sans"/>
-                <a:sym typeface="Open Sans"/>
-              </a:rPr>
-              <a:t>Total Price (</a:t>
-            </a:r>
-            <a:r>
-              <a:rPr lang="en-US" sz="1500" b="0" i="0" u="none" strike="noStrike" cap="none" dirty="0" err="1">
-                <a:solidFill>
-                  <a:srgbClr val="334155"/>
-                </a:solidFill>
-                <a:latin typeface="Open Sans"/>
-                <a:ea typeface="Open Sans"/>
-                <a:cs typeface="Open Sans"/>
-                <a:sym typeface="Open Sans"/>
-              </a:rPr>
-              <a:t>Tổng</a:t>
-            </a:r>
-            <a:r>
-              <a:rPr lang="en-US" sz="1500" b="0" i="0" u="none" strike="noStrike" cap="none" dirty="0">
-                <a:solidFill>
-                  <a:srgbClr val="334155"/>
-                </a:solidFill>
-                <a:latin typeface="Open Sans"/>
-                <a:ea typeface="Open Sans"/>
-                <a:cs typeface="Open Sans"/>
-                <a:sym typeface="Open Sans"/>
-              </a:rPr>
-              <a:t> </a:t>
-            </a:r>
-            <a:r>
-              <a:rPr lang="en-US" sz="1500" b="0" i="0" u="none" strike="noStrike" cap="none" dirty="0" err="1">
-                <a:solidFill>
-                  <a:srgbClr val="334155"/>
-                </a:solidFill>
-                <a:latin typeface="Open Sans"/>
-                <a:ea typeface="Open Sans"/>
-                <a:cs typeface="Open Sans"/>
-                <a:sym typeface="Open Sans"/>
-              </a:rPr>
-              <a:t>tiền</a:t>
-            </a:r>
-            <a:r>
-              <a:rPr lang="en-US" sz="1500" b="0" i="0" u="none" strike="noStrike" cap="none" dirty="0">
-                <a:solidFill>
-                  <a:srgbClr val="334155"/>
-                </a:solidFill>
-                <a:latin typeface="Open Sans"/>
-                <a:ea typeface="Open Sans"/>
-                <a:cs typeface="Open Sans"/>
-                <a:sym typeface="Open Sans"/>
-              </a:rPr>
-              <a:t>)</a:t>
-            </a:r>
-            <a:endParaRPr dirty="0"/>
-          </a:p>
-        </p:txBody>
-      </p:sp>
-      <p:sp>
-        <p:nvSpPr>
-          <p:cNvPr id="387" name="Google Shape;387;p26"/>
-          <p:cNvSpPr txBox="1"/>
-          <p:nvPr/>
-        </p:nvSpPr>
-        <p:spPr>
-          <a:xfrm>
-            <a:off x="828675" y="4210050"/>
-            <a:ext cx="76200" cy="230832"/>
-          </a:xfrm>
-          <a:prstGeom prst="rect">
-            <a:avLst/>
-          </a:prstGeom>
-          <a:noFill/>
-          <a:ln>
-            <a:noFill/>
-          </a:ln>
-        </p:spPr>
-        <p:txBody>
-          <a:bodyPr spcFirstLastPara="1" wrap="square" lIns="0" tIns="0" rIns="0" bIns="0" anchor="t" anchorCtr="0">
-            <a:spAutoFit/>
-          </a:bodyPr>
-          <a:lstStyle/>
-          <a:p>
-            <a:pPr marL="0" marR="0" lvl="0" indent="0" algn="l" rtl="0">
-              <a:spcBef>
-                <a:spcPts val="0"/>
-              </a:spcBef>
-              <a:spcAft>
-                <a:spcPts val="0"/>
-              </a:spcAft>
-              <a:buNone/>
-            </a:pPr>
-            <a:r>
-              <a:rPr lang="en-US" sz="1500" b="0" i="0" u="none" strike="noStrike" cap="none">
-                <a:solidFill>
-                  <a:srgbClr val="334155"/>
-                </a:solidFill>
-                <a:latin typeface="Open Sans"/>
-                <a:ea typeface="Open Sans"/>
-                <a:cs typeface="Open Sans"/>
-                <a:sym typeface="Open Sans"/>
-              </a:rPr>
-              <a:t>•</a:t>
-            </a:r>
-            <a:endParaRPr/>
-          </a:p>
-        </p:txBody>
-      </p:sp>
-      <p:sp>
-        <p:nvSpPr>
-          <p:cNvPr id="388" name="Google Shape;388;p26"/>
-          <p:cNvSpPr txBox="1"/>
-          <p:nvPr/>
-        </p:nvSpPr>
-        <p:spPr>
-          <a:xfrm>
-            <a:off x="904877" y="4210050"/>
-            <a:ext cx="4667251" cy="369332"/>
-          </a:xfrm>
-          <a:prstGeom prst="rect">
-            <a:avLst/>
-          </a:prstGeom>
-          <a:noFill/>
-          <a:ln>
-            <a:noFill/>
-          </a:ln>
-        </p:spPr>
-        <p:txBody>
-          <a:bodyPr spcFirstLastPara="1" wrap="square" lIns="76200" tIns="0" rIns="0" bIns="0" anchor="t" anchorCtr="0">
-            <a:spAutoFit/>
-          </a:bodyPr>
-          <a:lstStyle/>
-          <a:p>
-            <a:pPr marL="0" marR="0" lvl="0" indent="0" algn="l" rtl="0">
-              <a:lnSpc>
-                <a:spcPct val="160000"/>
-              </a:lnSpc>
-              <a:spcBef>
-                <a:spcPts val="0"/>
-              </a:spcBef>
-              <a:spcAft>
-                <a:spcPts val="0"/>
-              </a:spcAft>
-              <a:buNone/>
-            </a:pPr>
-            <a:r>
-              <a:rPr lang="en-US" sz="1500" b="0" i="0" u="none" strike="noStrike" cap="none">
-                <a:solidFill>
-                  <a:srgbClr val="334155"/>
-                </a:solidFill>
-                <a:latin typeface="Open Sans"/>
-                <a:ea typeface="Open Sans"/>
-                <a:cs typeface="Open Sans"/>
-                <a:sym typeface="Open Sans"/>
-              </a:rPr>
-              <a:t>Shipping Address (Địa chỉ)</a:t>
-            </a:r>
-            <a:endParaRPr/>
-          </a:p>
-        </p:txBody>
-      </p:sp>
-      <p:sp>
-        <p:nvSpPr>
-          <p:cNvPr id="389" name="Google Shape;389;p26"/>
-          <p:cNvSpPr txBox="1"/>
-          <p:nvPr/>
-        </p:nvSpPr>
-        <p:spPr>
-          <a:xfrm>
-            <a:off x="828675" y="4514850"/>
-            <a:ext cx="76200" cy="230832"/>
-          </a:xfrm>
-          <a:prstGeom prst="rect">
-            <a:avLst/>
-          </a:prstGeom>
-          <a:noFill/>
-          <a:ln>
-            <a:noFill/>
-          </a:ln>
-        </p:spPr>
-        <p:txBody>
-          <a:bodyPr spcFirstLastPara="1" wrap="square" lIns="0" tIns="0" rIns="0" bIns="0" anchor="t" anchorCtr="0">
-            <a:spAutoFit/>
-          </a:bodyPr>
-          <a:lstStyle/>
-          <a:p>
-            <a:pPr marL="0" marR="0" lvl="0" indent="0" algn="l" rtl="0">
-              <a:spcBef>
-                <a:spcPts val="0"/>
-              </a:spcBef>
-              <a:spcAft>
-                <a:spcPts val="0"/>
-              </a:spcAft>
-              <a:buNone/>
-            </a:pPr>
-            <a:r>
-              <a:rPr lang="en-US" sz="1500" b="0" i="0" u="none" strike="noStrike" cap="none">
-                <a:solidFill>
-                  <a:srgbClr val="334155"/>
-                </a:solidFill>
-                <a:latin typeface="Open Sans"/>
-                <a:ea typeface="Open Sans"/>
-                <a:cs typeface="Open Sans"/>
-                <a:sym typeface="Open Sans"/>
-              </a:rPr>
-              <a:t>•</a:t>
-            </a:r>
-            <a:endParaRPr/>
-          </a:p>
-        </p:txBody>
-      </p:sp>
-      <p:sp>
-        <p:nvSpPr>
-          <p:cNvPr id="390" name="Google Shape;390;p26"/>
-          <p:cNvSpPr txBox="1"/>
-          <p:nvPr/>
-        </p:nvSpPr>
-        <p:spPr>
-          <a:xfrm>
-            <a:off x="904877" y="4514850"/>
-            <a:ext cx="4667251" cy="369332"/>
-          </a:xfrm>
-          <a:prstGeom prst="rect">
-            <a:avLst/>
-          </a:prstGeom>
-          <a:noFill/>
-          <a:ln>
-            <a:noFill/>
-          </a:ln>
-        </p:spPr>
-        <p:txBody>
-          <a:bodyPr spcFirstLastPara="1" wrap="square" lIns="76200" tIns="0" rIns="0" bIns="0" anchor="t" anchorCtr="0">
-            <a:spAutoFit/>
-          </a:bodyPr>
-          <a:lstStyle/>
-          <a:p>
-            <a:pPr marL="0" marR="0" lvl="0" indent="0" algn="l" rtl="0">
-              <a:lnSpc>
-                <a:spcPct val="160000"/>
-              </a:lnSpc>
-              <a:spcBef>
-                <a:spcPts val="0"/>
-              </a:spcBef>
-              <a:spcAft>
-                <a:spcPts val="0"/>
-              </a:spcAft>
-              <a:buNone/>
-            </a:pPr>
-            <a:r>
-              <a:rPr lang="en-US" sz="1500" b="0" i="0" u="none" strike="noStrike" cap="none">
-                <a:solidFill>
-                  <a:srgbClr val="334155"/>
-                </a:solidFill>
-                <a:latin typeface="Open Sans"/>
-                <a:ea typeface="Open Sans"/>
-                <a:cs typeface="Open Sans"/>
-                <a:sym typeface="Open Sans"/>
-              </a:rPr>
-              <a:t>Status (Pending, Processing, Done)</a:t>
-            </a:r>
-            <a:endParaRPr/>
-          </a:p>
-        </p:txBody>
-      </p:sp>
-      <p:sp>
-        <p:nvSpPr>
-          <p:cNvPr id="391" name="Google Shape;391;p26"/>
-          <p:cNvSpPr txBox="1"/>
-          <p:nvPr/>
-        </p:nvSpPr>
-        <p:spPr>
-          <a:xfrm>
-            <a:off x="6591300" y="3600450"/>
-            <a:ext cx="76200" cy="230832"/>
-          </a:xfrm>
-          <a:prstGeom prst="rect">
-            <a:avLst/>
-          </a:prstGeom>
-          <a:noFill/>
-          <a:ln>
-            <a:noFill/>
-          </a:ln>
-        </p:spPr>
-        <p:txBody>
-          <a:bodyPr spcFirstLastPara="1" wrap="square" lIns="0" tIns="0" rIns="0" bIns="0" anchor="t" anchorCtr="0">
-            <a:spAutoFit/>
-          </a:bodyPr>
-          <a:lstStyle/>
-          <a:p>
-            <a:pPr marL="0" marR="0" lvl="0" indent="0" algn="l" rtl="0">
-              <a:spcBef>
-                <a:spcPts val="0"/>
-              </a:spcBef>
-              <a:spcAft>
-                <a:spcPts val="0"/>
-              </a:spcAft>
-              <a:buNone/>
-            </a:pPr>
-            <a:r>
-              <a:rPr lang="en-US" sz="1500" b="0" i="0" u="none" strike="noStrike" cap="none">
-                <a:solidFill>
-                  <a:srgbClr val="334155"/>
-                </a:solidFill>
-                <a:latin typeface="Open Sans"/>
-                <a:ea typeface="Open Sans"/>
-                <a:cs typeface="Open Sans"/>
-                <a:sym typeface="Open Sans"/>
-              </a:rPr>
-              <a:t>•</a:t>
-            </a:r>
-            <a:endParaRPr/>
-          </a:p>
-        </p:txBody>
-      </p:sp>
-      <p:sp>
-        <p:nvSpPr>
-          <p:cNvPr id="392" name="Google Shape;392;p26"/>
-          <p:cNvSpPr txBox="1"/>
-          <p:nvPr/>
-        </p:nvSpPr>
-        <p:spPr>
-          <a:xfrm>
-            <a:off x="6667501" y="3600450"/>
-            <a:ext cx="4667251" cy="369332"/>
-          </a:xfrm>
-          <a:prstGeom prst="rect">
-            <a:avLst/>
-          </a:prstGeom>
-          <a:noFill/>
-          <a:ln>
-            <a:noFill/>
-          </a:ln>
-        </p:spPr>
-        <p:txBody>
-          <a:bodyPr spcFirstLastPara="1" wrap="square" lIns="76200" tIns="0" rIns="0" bIns="0" anchor="t" anchorCtr="0">
-            <a:spAutoFit/>
-          </a:bodyPr>
-          <a:lstStyle/>
-          <a:p>
-            <a:pPr marL="0" marR="0" lvl="0" indent="0" algn="l" rtl="0">
-              <a:lnSpc>
-                <a:spcPct val="160000"/>
-              </a:lnSpc>
-              <a:spcBef>
-                <a:spcPts val="0"/>
-              </a:spcBef>
-              <a:spcAft>
-                <a:spcPts val="0"/>
-              </a:spcAft>
-              <a:buNone/>
-            </a:pPr>
-            <a:r>
-              <a:rPr lang="en-US" sz="1500" b="0" i="0" u="none" strike="noStrike" cap="none">
-                <a:solidFill>
-                  <a:srgbClr val="334155"/>
-                </a:solidFill>
-                <a:latin typeface="Open Sans"/>
-                <a:ea typeface="Open Sans"/>
-                <a:cs typeface="Open Sans"/>
-                <a:sym typeface="Open Sans"/>
-              </a:rPr>
-              <a:t>Order ID</a:t>
-            </a:r>
-            <a:endParaRPr/>
-          </a:p>
-        </p:txBody>
-      </p:sp>
-      <p:sp>
-        <p:nvSpPr>
-          <p:cNvPr id="393" name="Google Shape;393;p26"/>
-          <p:cNvSpPr txBox="1"/>
-          <p:nvPr/>
-        </p:nvSpPr>
-        <p:spPr>
-          <a:xfrm>
-            <a:off x="6591300" y="3905250"/>
-            <a:ext cx="76200" cy="230832"/>
-          </a:xfrm>
-          <a:prstGeom prst="rect">
-            <a:avLst/>
-          </a:prstGeom>
-          <a:noFill/>
-          <a:ln>
-            <a:noFill/>
-          </a:ln>
-        </p:spPr>
-        <p:txBody>
-          <a:bodyPr spcFirstLastPara="1" wrap="square" lIns="0" tIns="0" rIns="0" bIns="0" anchor="t" anchorCtr="0">
-            <a:spAutoFit/>
-          </a:bodyPr>
-          <a:lstStyle/>
-          <a:p>
-            <a:pPr marL="0" marR="0" lvl="0" indent="0" algn="l" rtl="0">
-              <a:spcBef>
-                <a:spcPts val="0"/>
-              </a:spcBef>
-              <a:spcAft>
-                <a:spcPts val="0"/>
-              </a:spcAft>
-              <a:buNone/>
-            </a:pPr>
-            <a:r>
-              <a:rPr lang="en-US" sz="1500" b="0" i="0" u="none" strike="noStrike" cap="none">
-                <a:solidFill>
-                  <a:srgbClr val="334155"/>
-                </a:solidFill>
-                <a:latin typeface="Open Sans"/>
-                <a:ea typeface="Open Sans"/>
-                <a:cs typeface="Open Sans"/>
-                <a:sym typeface="Open Sans"/>
-              </a:rPr>
-              <a:t>•</a:t>
-            </a:r>
-            <a:endParaRPr/>
-          </a:p>
-        </p:txBody>
-      </p:sp>
-      <p:sp>
-        <p:nvSpPr>
-          <p:cNvPr id="394" name="Google Shape;394;p26"/>
-          <p:cNvSpPr txBox="1"/>
-          <p:nvPr/>
-        </p:nvSpPr>
-        <p:spPr>
-          <a:xfrm>
-            <a:off x="6667501" y="3905250"/>
-            <a:ext cx="4667251" cy="369332"/>
-          </a:xfrm>
-          <a:prstGeom prst="rect">
-            <a:avLst/>
-          </a:prstGeom>
-          <a:noFill/>
-          <a:ln>
-            <a:noFill/>
-          </a:ln>
-        </p:spPr>
-        <p:txBody>
-          <a:bodyPr spcFirstLastPara="1" wrap="square" lIns="76200" tIns="0" rIns="0" bIns="0" anchor="t" anchorCtr="0">
-            <a:spAutoFit/>
-          </a:bodyPr>
-          <a:lstStyle/>
-          <a:p>
-            <a:pPr marL="0" marR="0" lvl="0" indent="0" algn="l" rtl="0">
-              <a:lnSpc>
-                <a:spcPct val="160000"/>
-              </a:lnSpc>
-              <a:spcBef>
-                <a:spcPts val="0"/>
-              </a:spcBef>
-              <a:spcAft>
-                <a:spcPts val="0"/>
-              </a:spcAft>
-              <a:buNone/>
-            </a:pPr>
-            <a:r>
-              <a:rPr lang="en-US" sz="1500" b="1" i="0" u="none" strike="noStrike" cap="none">
-                <a:solidFill>
-                  <a:srgbClr val="005B96"/>
-                </a:solidFill>
-                <a:latin typeface="Open Sans"/>
-                <a:ea typeface="Open Sans"/>
-                <a:cs typeface="Open Sans"/>
-                <a:sym typeface="Open Sans"/>
-              </a:rPr>
-              <a:t>Design ID</a:t>
-            </a:r>
-            <a:r>
-              <a:rPr lang="en-US" sz="1500" b="0" i="0" u="none" strike="noStrike" cap="none">
-                <a:solidFill>
-                  <a:srgbClr val="334155"/>
-                </a:solidFill>
-                <a:latin typeface="Open Sans"/>
-                <a:ea typeface="Open Sans"/>
-                <a:cs typeface="Open Sans"/>
-                <a:sym typeface="Open Sans"/>
-              </a:rPr>
-              <a:t> (Liên kết bản thiết kế)</a:t>
-            </a:r>
-            <a:endParaRPr/>
-          </a:p>
-        </p:txBody>
-      </p:sp>
-      <p:sp>
-        <p:nvSpPr>
-          <p:cNvPr id="395" name="Google Shape;395;p26"/>
-          <p:cNvSpPr txBox="1"/>
-          <p:nvPr/>
-        </p:nvSpPr>
-        <p:spPr>
-          <a:xfrm>
-            <a:off x="6591300" y="4210050"/>
-            <a:ext cx="76200" cy="230832"/>
-          </a:xfrm>
-          <a:prstGeom prst="rect">
-            <a:avLst/>
-          </a:prstGeom>
-          <a:noFill/>
-          <a:ln>
-            <a:noFill/>
-          </a:ln>
-        </p:spPr>
-        <p:txBody>
-          <a:bodyPr spcFirstLastPara="1" wrap="square" lIns="0" tIns="0" rIns="0" bIns="0" anchor="t" anchorCtr="0">
-            <a:spAutoFit/>
-          </a:bodyPr>
-          <a:lstStyle/>
-          <a:p>
-            <a:pPr marL="0" marR="0" lvl="0" indent="0" algn="l" rtl="0">
-              <a:spcBef>
-                <a:spcPts val="0"/>
-              </a:spcBef>
-              <a:spcAft>
-                <a:spcPts val="0"/>
-              </a:spcAft>
-              <a:buNone/>
-            </a:pPr>
-            <a:r>
-              <a:rPr lang="en-US" sz="1500" b="0" i="0" u="none" strike="noStrike" cap="none">
-                <a:solidFill>
-                  <a:srgbClr val="334155"/>
-                </a:solidFill>
-                <a:latin typeface="Open Sans"/>
-                <a:ea typeface="Open Sans"/>
-                <a:cs typeface="Open Sans"/>
-                <a:sym typeface="Open Sans"/>
-              </a:rPr>
-              <a:t>•</a:t>
-            </a:r>
-            <a:endParaRPr/>
-          </a:p>
-        </p:txBody>
-      </p:sp>
-      <p:sp>
-        <p:nvSpPr>
-          <p:cNvPr id="396" name="Google Shape;396;p26"/>
-          <p:cNvSpPr txBox="1"/>
-          <p:nvPr/>
-        </p:nvSpPr>
-        <p:spPr>
-          <a:xfrm>
-            <a:off x="6667501" y="4210050"/>
-            <a:ext cx="4667251" cy="369332"/>
-          </a:xfrm>
-          <a:prstGeom prst="rect">
-            <a:avLst/>
-          </a:prstGeom>
-          <a:noFill/>
-          <a:ln>
-            <a:noFill/>
-          </a:ln>
-        </p:spPr>
-        <p:txBody>
-          <a:bodyPr spcFirstLastPara="1" wrap="square" lIns="76200" tIns="0" rIns="0" bIns="0" anchor="t" anchorCtr="0">
-            <a:spAutoFit/>
-          </a:bodyPr>
-          <a:lstStyle/>
-          <a:p>
-            <a:pPr marL="0" marR="0" lvl="0" indent="0" algn="l" rtl="0">
-              <a:lnSpc>
-                <a:spcPct val="160000"/>
-              </a:lnSpc>
-              <a:spcBef>
-                <a:spcPts val="0"/>
-              </a:spcBef>
-              <a:spcAft>
-                <a:spcPts val="0"/>
-              </a:spcAft>
-              <a:buNone/>
-            </a:pPr>
-            <a:r>
-              <a:rPr lang="en-US" sz="1500" b="0" i="0" u="none" strike="noStrike" cap="none">
-                <a:solidFill>
-                  <a:srgbClr val="334155"/>
-                </a:solidFill>
-                <a:latin typeface="Open Sans"/>
-                <a:ea typeface="Open Sans"/>
-                <a:cs typeface="Open Sans"/>
-                <a:sym typeface="Open Sans"/>
-              </a:rPr>
-              <a:t>Quantity, Size</a:t>
-            </a:r>
-            <a:endParaRPr/>
-          </a:p>
-        </p:txBody>
-      </p:sp>
-      <p:sp>
-        <p:nvSpPr>
-          <p:cNvPr id="397" name="Google Shape;397;p26"/>
-          <p:cNvSpPr txBox="1"/>
-          <p:nvPr/>
-        </p:nvSpPr>
-        <p:spPr>
-          <a:xfrm>
-            <a:off x="6591300" y="4514850"/>
-            <a:ext cx="76200" cy="230832"/>
-          </a:xfrm>
-          <a:prstGeom prst="rect">
-            <a:avLst/>
-          </a:prstGeom>
-          <a:noFill/>
-          <a:ln>
-            <a:noFill/>
-          </a:ln>
-        </p:spPr>
-        <p:txBody>
-          <a:bodyPr spcFirstLastPara="1" wrap="square" lIns="0" tIns="0" rIns="0" bIns="0" anchor="t" anchorCtr="0">
-            <a:spAutoFit/>
-          </a:bodyPr>
-          <a:lstStyle/>
-          <a:p>
-            <a:pPr marL="0" marR="0" lvl="0" indent="0" algn="l" rtl="0">
-              <a:spcBef>
-                <a:spcPts val="0"/>
-              </a:spcBef>
-              <a:spcAft>
-                <a:spcPts val="0"/>
-              </a:spcAft>
-              <a:buNone/>
-            </a:pPr>
-            <a:r>
-              <a:rPr lang="en-US" sz="1500" b="0" i="0" u="none" strike="noStrike" cap="none">
-                <a:solidFill>
-                  <a:srgbClr val="334155"/>
-                </a:solidFill>
-                <a:latin typeface="Open Sans"/>
-                <a:ea typeface="Open Sans"/>
-                <a:cs typeface="Open Sans"/>
-                <a:sym typeface="Open Sans"/>
-              </a:rPr>
-              <a:t>•</a:t>
-            </a:r>
-            <a:endParaRPr/>
-          </a:p>
-        </p:txBody>
-      </p:sp>
-      <p:sp>
-        <p:nvSpPr>
-          <p:cNvPr id="398" name="Google Shape;398;p26"/>
-          <p:cNvSpPr txBox="1"/>
-          <p:nvPr/>
-        </p:nvSpPr>
-        <p:spPr>
-          <a:xfrm>
-            <a:off x="6667501" y="4514850"/>
-            <a:ext cx="4667251" cy="369332"/>
-          </a:xfrm>
-          <a:prstGeom prst="rect">
-            <a:avLst/>
-          </a:prstGeom>
-          <a:noFill/>
-          <a:ln>
-            <a:noFill/>
-          </a:ln>
-        </p:spPr>
-        <p:txBody>
-          <a:bodyPr spcFirstLastPara="1" wrap="square" lIns="76200" tIns="0" rIns="0" bIns="0" anchor="t" anchorCtr="0">
-            <a:spAutoFit/>
-          </a:bodyPr>
-          <a:lstStyle/>
-          <a:p>
-            <a:pPr marL="0" marR="0" lvl="0" indent="0" algn="l" rtl="0">
-              <a:lnSpc>
-                <a:spcPct val="160000"/>
-              </a:lnSpc>
-              <a:spcBef>
-                <a:spcPts val="0"/>
-              </a:spcBef>
-              <a:spcAft>
-                <a:spcPts val="0"/>
-              </a:spcAft>
-              <a:buNone/>
-            </a:pPr>
-            <a:r>
-              <a:rPr lang="en-US" sz="1500" b="0" i="0" u="none" strike="noStrike" cap="none">
-                <a:solidFill>
-                  <a:srgbClr val="334155"/>
-                </a:solidFill>
-                <a:latin typeface="Open Sans"/>
-                <a:ea typeface="Open Sans"/>
-                <a:cs typeface="Open Sans"/>
-                <a:sym typeface="Open Sans"/>
-              </a:rPr>
-              <a:t>Unit Price</a:t>
-            </a:r>
-            <a:endParaRPr/>
-          </a:p>
-        </p:txBody>
-      </p:sp>
     </p:spTree>
+    <p:extLst>
+      <p:ext uri="{BB962C8B-B14F-4D97-AF65-F5344CB8AC3E}">
+        <p14:creationId xmlns:p14="http://schemas.microsoft.com/office/powerpoint/2010/main" val="269763583"/>
+      </p:ext>
+    </p:extLst>
   </p:cSld>
   <p:clrMapOvr>
     <a:masterClrMapping/>
   </p:clrMapOvr>
+  <mc:AlternateContent xmlns:mc="http://schemas.openxmlformats.org/markup-compatibility/2006" xmlns:p14="http://schemas.microsoft.com/office/powerpoint/2010/main">
+    <mc:Choice Requires="p14">
+      <p:transition spd="slow" p14:dur="1600">
+        <p14:gallery dir="l"/>
+      </p:transition>
+    </mc:Choice>
+    <mc:Fallback xmlns="">
+      <p:transition spd="slow">
+        <p:fade/>
+      </p:transition>
+    </mc:Fallback>
+  </mc:AlternateContent>
   <p:timing>
     <p:tnLst>
       <p:par>
@@ -11482,7 +7087,425 @@
 </p:sld>
 </file>
 
-<file path=ppt/slides/slide15.xml><?xml version="1.0" encoding="utf-8"?>
+<file path=ppt/slides/slide11.xml><?xml version="1.0" encoding="utf-8"?>
+<p:sld xmlns:a="http://schemas.openxmlformats.org/drawingml/2006/main" xmlns:r="http://schemas.openxmlformats.org/officeDocument/2006/relationships" xmlns:p="http://schemas.openxmlformats.org/presentationml/2006/main">
+  <p:cSld>
+    <p:spTree>
+      <p:nvGrpSpPr>
+        <p:cNvPr id="1" name="Shape 369"/>
+        <p:cNvGrpSpPr/>
+        <p:nvPr/>
+      </p:nvGrpSpPr>
+      <p:grpSpPr>
+        <a:xfrm>
+          <a:off x="0" y="0"/>
+          <a:ext cx="0" cy="0"/>
+          <a:chOff x="0" y="0"/>
+          <a:chExt cx="0" cy="0"/>
+        </a:xfrm>
+      </p:grpSpPr>
+      <p:pic>
+        <p:nvPicPr>
+          <p:cNvPr id="370" name="Google Shape;370;p26" descr="image.png"/>
+          <p:cNvPicPr preferRelativeResize="0"/>
+          <p:nvPr/>
+        </p:nvPicPr>
+        <p:blipFill rotWithShape="1">
+          <a:blip r:embed="rId3">
+            <a:alphaModFix/>
+          </a:blip>
+          <a:srcRect/>
+          <a:stretch/>
+        </p:blipFill>
+        <p:spPr>
+          <a:xfrm>
+            <a:off x="0" y="0"/>
+            <a:ext cx="12192000" cy="6858000"/>
+          </a:xfrm>
+          <a:prstGeom prst="rect">
+            <a:avLst/>
+          </a:prstGeom>
+          <a:noFill/>
+          <a:ln>
+            <a:noFill/>
+          </a:ln>
+        </p:spPr>
+      </p:pic>
+      <p:pic>
+        <p:nvPicPr>
+          <p:cNvPr id="373" name="Google Shape;373;p26" descr="image.png"/>
+          <p:cNvPicPr preferRelativeResize="0"/>
+          <p:nvPr/>
+        </p:nvPicPr>
+        <p:blipFill rotWithShape="1">
+          <a:blip r:embed="rId4">
+            <a:alphaModFix/>
+          </a:blip>
+          <a:srcRect/>
+          <a:stretch/>
+        </p:blipFill>
+        <p:spPr>
+          <a:xfrm>
+            <a:off x="0" y="6381750"/>
+            <a:ext cx="12192000" cy="476250"/>
+          </a:xfrm>
+          <a:prstGeom prst="rect">
+            <a:avLst/>
+          </a:prstGeom>
+          <a:noFill/>
+          <a:ln>
+            <a:noFill/>
+          </a:ln>
+        </p:spPr>
+      </p:pic>
+      <p:sp>
+        <p:nvSpPr>
+          <p:cNvPr id="374" name="Google Shape;374;p26"/>
+          <p:cNvSpPr txBox="1"/>
+          <p:nvPr/>
+        </p:nvSpPr>
+        <p:spPr>
+          <a:xfrm>
+            <a:off x="571501" y="381001"/>
+            <a:ext cx="3829051" cy="915635"/>
+          </a:xfrm>
+          <a:prstGeom prst="rect">
+            <a:avLst/>
+          </a:prstGeom>
+          <a:noFill/>
+          <a:ln>
+            <a:noFill/>
+          </a:ln>
+        </p:spPr>
+        <p:txBody>
+          <a:bodyPr spcFirstLastPara="1" wrap="square" lIns="0" tIns="0" rIns="0" bIns="0" anchor="t" anchorCtr="0">
+            <a:spAutoFit/>
+          </a:bodyPr>
+          <a:lstStyle/>
+          <a:p>
+            <a:r>
+              <a:rPr lang="vi-VN" sz="3150" b="1" dirty="0" smtClean="0">
+                <a:solidFill>
+                  <a:srgbClr val="003366"/>
+                </a:solidFill>
+                <a:latin typeface="Roboto"/>
+                <a:ea typeface="Roboto"/>
+                <a:cs typeface="Roboto"/>
+                <a:sym typeface="Roboto"/>
+              </a:rPr>
+              <a:t>Tính </a:t>
+            </a:r>
+            <a:r>
+              <a:rPr lang="vi-VN" sz="3150" b="1" dirty="0">
+                <a:solidFill>
+                  <a:srgbClr val="003366"/>
+                </a:solidFill>
+                <a:latin typeface="Roboto"/>
+                <a:ea typeface="Roboto"/>
+                <a:cs typeface="Roboto"/>
+                <a:sym typeface="Roboto"/>
+              </a:rPr>
+              <a:t>phi chức năng</a:t>
+            </a:r>
+          </a:p>
+          <a:p>
+            <a:endParaRPr lang="en-GB" b="1" dirty="0" smtClean="0">
+              <a:solidFill>
+                <a:schemeClr val="accent1">
+                  <a:lumMod val="75000"/>
+                </a:schemeClr>
+              </a:solidFill>
+            </a:endParaRPr>
+          </a:p>
+          <a:p>
+            <a:pPr marL="0" marR="0" lvl="0" indent="0" algn="l" rtl="0">
+              <a:spcBef>
+                <a:spcPts val="0"/>
+              </a:spcBef>
+              <a:spcAft>
+                <a:spcPts val="0"/>
+              </a:spcAft>
+              <a:buNone/>
+            </a:pPr>
+            <a:endParaRPr dirty="0"/>
+          </a:p>
+        </p:txBody>
+      </p:sp>
+      <p:sp>
+        <p:nvSpPr>
+          <p:cNvPr id="375" name="Google Shape;375;p26"/>
+          <p:cNvSpPr txBox="1"/>
+          <p:nvPr/>
+        </p:nvSpPr>
+        <p:spPr>
+          <a:xfrm>
+            <a:off x="628651" y="6463061"/>
+            <a:ext cx="876300" cy="323165"/>
+          </a:xfrm>
+          <a:prstGeom prst="rect">
+            <a:avLst/>
+          </a:prstGeom>
+          <a:noFill/>
+          <a:ln>
+            <a:noFill/>
+          </a:ln>
+        </p:spPr>
+        <p:txBody>
+          <a:bodyPr spcFirstLastPara="1" wrap="square" lIns="0" tIns="0" rIns="0" bIns="0" anchor="ctr" anchorCtr="0">
+            <a:spAutoFit/>
+          </a:bodyPr>
+          <a:lstStyle/>
+          <a:p>
+            <a:pPr marL="0" marR="0" lvl="0" indent="0" algn="l" rtl="0">
+              <a:spcBef>
+                <a:spcPts val="0"/>
+              </a:spcBef>
+              <a:spcAft>
+                <a:spcPts val="0"/>
+              </a:spcAft>
+              <a:buNone/>
+            </a:pPr>
+            <a:r>
+              <a:rPr lang="en-US" sz="1050" b="1" i="0" u="none" strike="noStrike" cap="none">
+                <a:solidFill>
+                  <a:srgbClr val="003366"/>
+                </a:solidFill>
+                <a:latin typeface="Open Sans SemiBold"/>
+                <a:ea typeface="Open Sans SemiBold"/>
+                <a:cs typeface="Open Sans SemiBold"/>
+                <a:sym typeface="Open Sans SemiBold"/>
+              </a:rPr>
+              <a:t>Mytee Studio</a:t>
+            </a:r>
+            <a:endParaRPr/>
+          </a:p>
+        </p:txBody>
+      </p:sp>
+      <p:pic>
+        <p:nvPicPr>
+          <p:cNvPr id="378" name="Google Shape;378;p26" descr="image.png"/>
+          <p:cNvPicPr preferRelativeResize="0"/>
+          <p:nvPr/>
+        </p:nvPicPr>
+        <p:blipFill rotWithShape="1">
+          <a:blip r:embed="rId5">
+            <a:alphaModFix/>
+          </a:blip>
+          <a:srcRect/>
+          <a:stretch/>
+        </p:blipFill>
+        <p:spPr>
+          <a:xfrm>
+            <a:off x="381000" y="6557962"/>
+            <a:ext cx="152400" cy="133350"/>
+          </a:xfrm>
+          <a:prstGeom prst="rect">
+            <a:avLst/>
+          </a:prstGeom>
+          <a:noFill/>
+          <a:ln>
+            <a:noFill/>
+          </a:ln>
+        </p:spPr>
+      </p:pic>
+      <p:sp>
+        <p:nvSpPr>
+          <p:cNvPr id="31" name="TextBox 30">
+            <a:extLst>
+              <a:ext uri="{FF2B5EF4-FFF2-40B4-BE49-F238E27FC236}">
+                <a16:creationId xmlns="" xmlns:a16="http://schemas.microsoft.com/office/drawing/2014/main" id="{4B4CBC1C-9D79-49B6-AF0B-997325C28134}"/>
+              </a:ext>
+            </a:extLst>
+          </p:cNvPr>
+          <p:cNvSpPr txBox="1"/>
+          <p:nvPr/>
+        </p:nvSpPr>
+        <p:spPr>
+          <a:xfrm>
+            <a:off x="868680" y="1457444"/>
+            <a:ext cx="7269480" cy="2677656"/>
+          </a:xfrm>
+          <a:prstGeom prst="rect">
+            <a:avLst/>
+          </a:prstGeom>
+          <a:noFill/>
+        </p:spPr>
+        <p:txBody>
+          <a:bodyPr wrap="square">
+            <a:spAutoFit/>
+          </a:bodyPr>
+          <a:lstStyle/>
+          <a:p>
+            <a:r>
+              <a:rPr lang="en-US" sz="2400" b="1" dirty="0" smtClean="0">
+                <a:solidFill>
+                  <a:srgbClr val="000000"/>
+                </a:solidFill>
+                <a:latin typeface="Arial" panose="020B0604020202020204" pitchFamily="34" charset="0"/>
+              </a:rPr>
+              <a:t>Web </a:t>
+            </a:r>
+            <a:r>
+              <a:rPr lang="en-US" sz="2400" b="1" dirty="0" err="1" smtClean="0">
+                <a:solidFill>
+                  <a:srgbClr val="000000"/>
+                </a:solidFill>
+                <a:latin typeface="Arial" panose="020B0604020202020204" pitchFamily="34" charset="0"/>
+              </a:rPr>
+              <a:t>phải</a:t>
+            </a:r>
+            <a:r>
+              <a:rPr lang="en-US" sz="2400" b="1" dirty="0" smtClean="0">
+                <a:solidFill>
+                  <a:srgbClr val="000000"/>
+                </a:solidFill>
+                <a:latin typeface="Arial" panose="020B0604020202020204" pitchFamily="34" charset="0"/>
+              </a:rPr>
+              <a:t> </a:t>
+            </a:r>
+            <a:r>
+              <a:rPr lang="en-US" sz="2400" b="1" dirty="0" err="1" smtClean="0">
+                <a:solidFill>
+                  <a:srgbClr val="000000"/>
+                </a:solidFill>
+                <a:latin typeface="Arial" panose="020B0604020202020204" pitchFamily="34" charset="0"/>
+              </a:rPr>
+              <a:t>đảm</a:t>
+            </a:r>
+            <a:r>
+              <a:rPr lang="en-US" sz="2400" b="1" dirty="0" smtClean="0">
+                <a:solidFill>
+                  <a:srgbClr val="000000"/>
+                </a:solidFill>
+                <a:latin typeface="Arial" panose="020B0604020202020204" pitchFamily="34" charset="0"/>
+              </a:rPr>
+              <a:t> </a:t>
+            </a:r>
+            <a:r>
+              <a:rPr lang="en-US" sz="2400" b="1" dirty="0" err="1" smtClean="0">
+                <a:solidFill>
+                  <a:srgbClr val="000000"/>
+                </a:solidFill>
+                <a:latin typeface="Arial" panose="020B0604020202020204" pitchFamily="34" charset="0"/>
+              </a:rPr>
+              <a:t>bảo</a:t>
+            </a:r>
+            <a:r>
+              <a:rPr lang="vi-VN" sz="2400" b="1" dirty="0" smtClean="0">
+                <a:solidFill>
+                  <a:srgbClr val="000000"/>
+                </a:solidFill>
+                <a:latin typeface="Arial" panose="020B0604020202020204" pitchFamily="34" charset="0"/>
+              </a:rPr>
+              <a:t>:</a:t>
+            </a:r>
+            <a:endParaRPr lang="en-US" sz="2400" b="1" i="0" u="none" strike="noStrike" dirty="0">
+              <a:solidFill>
+                <a:srgbClr val="000000"/>
+              </a:solidFill>
+              <a:effectLst/>
+              <a:latin typeface="Arial" panose="020B0604020202020204" pitchFamily="34" charset="0"/>
+            </a:endParaRPr>
+          </a:p>
+          <a:p>
+            <a:pPr rtl="0">
+              <a:spcBef>
+                <a:spcPts val="0"/>
+              </a:spcBef>
+              <a:spcAft>
+                <a:spcPts val="0"/>
+              </a:spcAft>
+            </a:pPr>
+            <a:endParaRPr lang="vi-VN" sz="2400" b="0" dirty="0">
+              <a:effectLst/>
+            </a:endParaRPr>
+          </a:p>
+          <a:p>
+            <a:pPr fontAlgn="base">
+              <a:buFont typeface="Arial" panose="020B0604020202020204" pitchFamily="34" charset="0"/>
+              <a:buChar char="•"/>
+            </a:pPr>
+            <a:r>
+              <a:rPr lang="vi-VN" sz="2400" dirty="0" smtClean="0"/>
+              <a:t>Hiệu </a:t>
+            </a:r>
+            <a:r>
+              <a:rPr lang="vi-VN" sz="2400" dirty="0"/>
+              <a:t>suất: Hệ thống xử lý nhanh, hỗ trợ nhiều người truy cập đồng thời</a:t>
+            </a:r>
+            <a:r>
+              <a:rPr lang="vi-VN" sz="2400" dirty="0" smtClean="0"/>
+              <a:t>.</a:t>
+            </a:r>
+            <a:endParaRPr lang="vi-VN" sz="2400" dirty="0"/>
+          </a:p>
+          <a:p>
+            <a:pPr fontAlgn="base">
+              <a:buFont typeface="Arial" panose="020B0604020202020204" pitchFamily="34" charset="0"/>
+              <a:buChar char="•"/>
+            </a:pPr>
+            <a:r>
+              <a:rPr lang="vi-VN" sz="2400" dirty="0"/>
+              <a:t>Bảo mật: Bảo vệ thông tin cá nhân và giao dịch</a:t>
+            </a:r>
+            <a:r>
+              <a:rPr lang="vi-VN" sz="2400" dirty="0" smtClean="0"/>
+              <a:t>.</a:t>
+            </a:r>
+            <a:endParaRPr lang="vi-VN" sz="2400" dirty="0"/>
+          </a:p>
+          <a:p>
+            <a:pPr fontAlgn="base">
+              <a:buFont typeface="Arial" panose="020B0604020202020204" pitchFamily="34" charset="0"/>
+              <a:buChar char="•"/>
+            </a:pPr>
+            <a:r>
+              <a:rPr lang="vi-VN" sz="2400" dirty="0"/>
+              <a:t>Tương thích đa thiết bị: Hỗ trợ trình duyệt phổ biến và giao diện di động. </a:t>
+            </a:r>
+            <a:endParaRPr lang="en-US" sz="2400" b="0" i="0" u="none" strike="noStrike" dirty="0">
+              <a:solidFill>
+                <a:srgbClr val="000000"/>
+              </a:solidFill>
+              <a:effectLst/>
+              <a:latin typeface="Arial" panose="020B0604020202020204" pitchFamily="34" charset="0"/>
+            </a:endParaRPr>
+          </a:p>
+        </p:txBody>
+      </p:sp>
+    </p:spTree>
+    <p:extLst>
+      <p:ext uri="{BB962C8B-B14F-4D97-AF65-F5344CB8AC3E}">
+        <p14:creationId xmlns:p14="http://schemas.microsoft.com/office/powerpoint/2010/main" val="269763583"/>
+      </p:ext>
+    </p:extLst>
+  </p:cSld>
+  <p:clrMapOvr>
+    <a:masterClrMapping/>
+  </p:clrMapOvr>
+  <mc:AlternateContent xmlns:mc="http://schemas.openxmlformats.org/markup-compatibility/2006" xmlns:p14="http://schemas.microsoft.com/office/powerpoint/2010/main">
+    <mc:Choice Requires="p14">
+      <p:transition spd="slow" p14:dur="1600">
+        <p14:gallery dir="l"/>
+      </p:transition>
+    </mc:Choice>
+    <mc:Fallback xmlns="">
+      <p:transition spd="slow">
+        <p:fade/>
+      </p:transition>
+    </mc:Fallback>
+  </mc:AlternateContent>
+  <p:timing>
+    <p:tnLst>
+      <p:par>
+        <p:cTn id="1" dur="indefinite" restart="never" nodeType="tmRoot"/>
+      </p:par>
+    </p:tnLst>
+  </p:timing>
+</p:sld>
+</file>
+
+<file path=ppt/slides/slide12.xml><?xml version="1.0" encoding="utf-8"?>
 <p:sld xmlns:a="http://schemas.openxmlformats.org/drawingml/2006/main" xmlns:r="http://schemas.openxmlformats.org/officeDocument/2006/relationships" xmlns:p="http://schemas.openxmlformats.org/presentationml/2006/main">
   <p:cSld>
     <p:bg>
@@ -12576,6 +8599,18 @@
   <p:clrMapOvr>
     <a:masterClrMapping/>
   </p:clrMapOvr>
+  <mc:AlternateContent xmlns:mc="http://schemas.openxmlformats.org/markup-compatibility/2006" xmlns:p14="http://schemas.microsoft.com/office/powerpoint/2010/main">
+    <mc:Choice Requires="p14">
+      <p:transition spd="slow" p14:dur="1100">
+        <p14:switch dir="r"/>
+      </p:transition>
+    </mc:Choice>
+    <mc:Fallback xmlns="">
+      <p:transition spd="slow">
+        <p:fade/>
+      </p:transition>
+    </mc:Fallback>
+  </mc:AlternateContent>
   <p:timing>
     <p:tnLst>
       <p:par>
@@ -12586,7 +8621,7 @@
 </p:sld>
 </file>
 
-<file path=ppt/slides/slide16.xml><?xml version="1.0" encoding="utf-8"?>
+<file path=ppt/slides/slide13.xml><?xml version="1.0" encoding="utf-8"?>
 <p:sld xmlns:a="http://schemas.openxmlformats.org/drawingml/2006/main" xmlns:r="http://schemas.openxmlformats.org/officeDocument/2006/relationships" xmlns:p="http://schemas.openxmlformats.org/presentationml/2006/main">
   <p:cSld>
     <p:bg>
@@ -13871,6 +9906,18 @@
   <p:clrMapOvr>
     <a:masterClrMapping/>
   </p:clrMapOvr>
+  <mc:AlternateContent xmlns:mc="http://schemas.openxmlformats.org/markup-compatibility/2006" xmlns:p14="http://schemas.microsoft.com/office/powerpoint/2010/main">
+    <mc:Choice Requires="p14">
+      <p:transition spd="slow" p14:dur="1500">
+        <p:split orient="vert"/>
+      </p:transition>
+    </mc:Choice>
+    <mc:Fallback xmlns="">
+      <p:transition spd="slow">
+        <p:split orient="vert"/>
+      </p:transition>
+    </mc:Fallback>
+  </mc:AlternateContent>
   <p:timing>
     <p:tnLst>
       <p:par>
@@ -13881,7 +9928,7 @@
 </p:sld>
 </file>
 
-<file path=ppt/slides/slide17.xml><?xml version="1.0" encoding="utf-8"?>
+<file path=ppt/slides/slide14.xml><?xml version="1.0" encoding="utf-8"?>
 <p:sld xmlns:a="http://schemas.openxmlformats.org/drawingml/2006/main" xmlns:r="http://schemas.openxmlformats.org/officeDocument/2006/relationships" xmlns:p="http://schemas.openxmlformats.org/presentationml/2006/main">
   <p:cSld>
     <p:bg>
@@ -13935,7 +9982,7 @@
       </p:pic>
       <p:pic>
         <p:nvPicPr>
-          <p:cNvPr id="466" name="Google Shape;466;p29" descr="image.png"/>
+          <p:cNvPr id="468" name="Google Shape;468;p29" descr="image.png"/>
           <p:cNvPicPr preferRelativeResize="0"/>
           <p:nvPr/>
         </p:nvPicPr>
@@ -13948,8 +9995,8 @@
         </p:blipFill>
         <p:spPr>
           <a:xfrm>
-            <a:off x="2603452" y="1323979"/>
-            <a:ext cx="3492549" cy="4962525"/>
+            <a:off x="0" y="6381750"/>
+            <a:ext cx="12192000" cy="476250"/>
           </a:xfrm>
           <a:prstGeom prst="rect">
             <a:avLst/>
@@ -13960,9 +10007,207 @@
           </a:ln>
         </p:spPr>
       </p:pic>
+      <p:sp>
+        <p:nvSpPr>
+          <p:cNvPr id="469" name="Google Shape;469;p29"/>
+          <p:cNvSpPr txBox="1"/>
+          <p:nvPr/>
+        </p:nvSpPr>
+        <p:spPr>
+          <a:xfrm>
+            <a:off x="571505" y="381001"/>
+            <a:ext cx="4137655" cy="484748"/>
+          </a:xfrm>
+          <a:prstGeom prst="rect">
+            <a:avLst/>
+          </a:prstGeom>
+          <a:noFill/>
+          <a:ln>
+            <a:noFill/>
+          </a:ln>
+        </p:spPr>
+        <p:txBody>
+          <a:bodyPr spcFirstLastPara="1" wrap="square" lIns="0" tIns="0" rIns="0" bIns="0" anchor="t" anchorCtr="0">
+            <a:spAutoFit/>
+          </a:bodyPr>
+          <a:lstStyle/>
+          <a:p>
+            <a:pPr marL="0" marR="0" lvl="0" indent="0" algn="l" rtl="0">
+              <a:spcBef>
+                <a:spcPts val="0"/>
+              </a:spcBef>
+              <a:spcAft>
+                <a:spcPts val="0"/>
+              </a:spcAft>
+              <a:buNone/>
+            </a:pPr>
+            <a:r>
+              <a:rPr lang="en-US" sz="3150" b="1" i="0" u="none" strike="noStrike" cap="none" dirty="0" err="1">
+                <a:solidFill>
+                  <a:srgbClr val="003366"/>
+                </a:solidFill>
+                <a:latin typeface="Roboto"/>
+                <a:ea typeface="Roboto"/>
+                <a:cs typeface="Roboto"/>
+                <a:sym typeface="Roboto"/>
+              </a:rPr>
+              <a:t>Hướng</a:t>
+            </a:r>
+            <a:r>
+              <a:rPr lang="en-US" sz="3150" b="1" i="0" u="none" strike="noStrike" cap="none" dirty="0">
+                <a:solidFill>
+                  <a:srgbClr val="003366"/>
+                </a:solidFill>
+                <a:latin typeface="Roboto"/>
+                <a:ea typeface="Roboto"/>
+                <a:cs typeface="Roboto"/>
+                <a:sym typeface="Roboto"/>
+              </a:rPr>
+              <a:t> </a:t>
+            </a:r>
+            <a:r>
+              <a:rPr lang="en-US" sz="3150" b="1" i="0" u="none" strike="noStrike" cap="none" dirty="0" err="1">
+                <a:solidFill>
+                  <a:srgbClr val="003366"/>
+                </a:solidFill>
+                <a:latin typeface="Roboto"/>
+                <a:ea typeface="Roboto"/>
+                <a:cs typeface="Roboto"/>
+                <a:sym typeface="Roboto"/>
+              </a:rPr>
+              <a:t>Phát</a:t>
+            </a:r>
+            <a:r>
+              <a:rPr lang="en-US" sz="3150" b="1" i="0" u="none" strike="noStrike" cap="none" dirty="0">
+                <a:solidFill>
+                  <a:srgbClr val="003366"/>
+                </a:solidFill>
+                <a:latin typeface="Roboto"/>
+                <a:ea typeface="Roboto"/>
+                <a:cs typeface="Roboto"/>
+                <a:sym typeface="Roboto"/>
+              </a:rPr>
+              <a:t> </a:t>
+            </a:r>
+            <a:r>
+              <a:rPr lang="en-US" sz="3150" b="1" i="0" u="none" strike="noStrike" cap="none" dirty="0" err="1">
+                <a:solidFill>
+                  <a:srgbClr val="003366"/>
+                </a:solidFill>
+                <a:latin typeface="Roboto"/>
+                <a:ea typeface="Roboto"/>
+                <a:cs typeface="Roboto"/>
+                <a:sym typeface="Roboto"/>
+              </a:rPr>
+              <a:t>Triển</a:t>
+            </a:r>
+            <a:endParaRPr dirty="0"/>
+          </a:p>
+        </p:txBody>
+      </p:sp>
+      <p:sp>
+        <p:nvSpPr>
+          <p:cNvPr id="470" name="Google Shape;470;p29"/>
+          <p:cNvSpPr txBox="1"/>
+          <p:nvPr/>
+        </p:nvSpPr>
+        <p:spPr>
+          <a:xfrm>
+            <a:off x="628651" y="6463061"/>
+            <a:ext cx="876300" cy="323165"/>
+          </a:xfrm>
+          <a:prstGeom prst="rect">
+            <a:avLst/>
+          </a:prstGeom>
+          <a:noFill/>
+          <a:ln>
+            <a:noFill/>
+          </a:ln>
+        </p:spPr>
+        <p:txBody>
+          <a:bodyPr spcFirstLastPara="1" wrap="square" lIns="0" tIns="0" rIns="0" bIns="0" anchor="ctr" anchorCtr="0">
+            <a:spAutoFit/>
+          </a:bodyPr>
+          <a:lstStyle/>
+          <a:p>
+            <a:pPr marL="0" marR="0" lvl="0" indent="0" algn="l" rtl="0">
+              <a:spcBef>
+                <a:spcPts val="0"/>
+              </a:spcBef>
+              <a:spcAft>
+                <a:spcPts val="0"/>
+              </a:spcAft>
+              <a:buNone/>
+            </a:pPr>
+            <a:r>
+              <a:rPr lang="en-US" sz="1050" b="1" i="0" u="none" strike="noStrike" cap="none">
+                <a:solidFill>
+                  <a:srgbClr val="003366"/>
+                </a:solidFill>
+                <a:latin typeface="Open Sans SemiBold"/>
+                <a:ea typeface="Open Sans SemiBold"/>
+                <a:cs typeface="Open Sans SemiBold"/>
+                <a:sym typeface="Open Sans SemiBold"/>
+              </a:rPr>
+              <a:t>Mytee Studio</a:t>
+            </a:r>
+            <a:endParaRPr/>
+          </a:p>
+        </p:txBody>
+      </p:sp>
+      <p:sp>
+        <p:nvSpPr>
+          <p:cNvPr id="471" name="Google Shape;471;p29"/>
+          <p:cNvSpPr txBox="1"/>
+          <p:nvPr/>
+        </p:nvSpPr>
+        <p:spPr>
+          <a:xfrm>
+            <a:off x="11306180" y="6534156"/>
+            <a:ext cx="504825" cy="161583"/>
+          </a:xfrm>
+          <a:prstGeom prst="rect">
+            <a:avLst/>
+          </a:prstGeom>
+          <a:noFill/>
+          <a:ln>
+            <a:noFill/>
+          </a:ln>
+        </p:spPr>
+        <p:txBody>
+          <a:bodyPr spcFirstLastPara="1" wrap="square" lIns="0" tIns="0" rIns="0" bIns="0" anchor="t" anchorCtr="0">
+            <a:spAutoFit/>
+          </a:bodyPr>
+          <a:lstStyle/>
+          <a:p>
+            <a:pPr marL="0" marR="0" lvl="0" indent="0" algn="l" rtl="0">
+              <a:spcBef>
+                <a:spcPts val="0"/>
+              </a:spcBef>
+              <a:spcAft>
+                <a:spcPts val="0"/>
+              </a:spcAft>
+              <a:buNone/>
+            </a:pPr>
+            <a:r>
+              <a:rPr lang="en-US" sz="1050" b="0" i="0" u="none" strike="noStrike" cap="none">
+                <a:solidFill>
+                  <a:srgbClr val="64748B"/>
+                </a:solidFill>
+                <a:latin typeface="Open Sans"/>
+                <a:ea typeface="Open Sans"/>
+                <a:cs typeface="Open Sans"/>
+                <a:sym typeface="Open Sans"/>
+              </a:rPr>
+              <a:t>Slide 17</a:t>
+            </a:r>
+            <a:endParaRPr/>
+          </a:p>
+        </p:txBody>
+      </p:sp>
       <p:pic>
         <p:nvPicPr>
-          <p:cNvPr id="467" name="Google Shape;467;p29" descr="image.png"/>
+          <p:cNvPr id="473" name="Google Shape;473;p29" descr="image.png"/>
           <p:cNvPicPr preferRelativeResize="0"/>
           <p:nvPr/>
         </p:nvPicPr>
@@ -13975,8 +10220,8 @@
         </p:blipFill>
         <p:spPr>
           <a:xfrm>
-            <a:off x="6381751" y="1323979"/>
-            <a:ext cx="3492400" cy="4962525"/>
+            <a:off x="381000" y="6557962"/>
+            <a:ext cx="152400" cy="133350"/>
           </a:xfrm>
           <a:prstGeom prst="rect">
             <a:avLst/>
@@ -13987,515 +10232,126 @@
           </a:ln>
         </p:spPr>
       </p:pic>
-      <p:pic>
-        <p:nvPicPr>
-          <p:cNvPr id="468" name="Google Shape;468;p29" descr="image.png"/>
-          <p:cNvPicPr preferRelativeResize="0"/>
-          <p:nvPr/>
-        </p:nvPicPr>
-        <p:blipFill rotWithShape="1">
-          <a:blip r:embed="rId6">
-            <a:alphaModFix/>
-          </a:blip>
-          <a:srcRect/>
-          <a:stretch/>
-        </p:blipFill>
-        <p:spPr>
-          <a:xfrm>
-            <a:off x="0" y="6381750"/>
-            <a:ext cx="12192000" cy="476250"/>
-          </a:xfrm>
-          <a:prstGeom prst="rect">
-            <a:avLst/>
-          </a:prstGeom>
-          <a:noFill/>
-          <a:ln>
-            <a:noFill/>
-          </a:ln>
-        </p:spPr>
-      </p:pic>
-      <p:sp>
-        <p:nvSpPr>
-          <p:cNvPr id="469" name="Google Shape;469;p29"/>
-          <p:cNvSpPr txBox="1"/>
-          <p:nvPr/>
-        </p:nvSpPr>
-        <p:spPr>
-          <a:xfrm>
-            <a:off x="571505" y="381001"/>
-            <a:ext cx="3152775" cy="969496"/>
-          </a:xfrm>
-          <a:prstGeom prst="rect">
-            <a:avLst/>
-          </a:prstGeom>
-          <a:noFill/>
-          <a:ln>
-            <a:noFill/>
-          </a:ln>
-        </p:spPr>
-        <p:txBody>
-          <a:bodyPr spcFirstLastPara="1" wrap="square" lIns="0" tIns="0" rIns="0" bIns="0" anchor="t" anchorCtr="0">
+      <p:sp>
+        <p:nvSpPr>
+          <p:cNvPr id="3" name="Rectangle 2"/>
+          <p:cNvSpPr/>
+          <p:nvPr/>
+        </p:nvSpPr>
+        <p:spPr>
+          <a:xfrm>
+            <a:off x="1066800" y="1697058"/>
+            <a:ext cx="9357360" cy="3785652"/>
+          </a:xfrm>
+          <a:prstGeom prst="rect">
+            <a:avLst/>
+          </a:prstGeom>
+        </p:spPr>
+        <p:txBody>
+          <a:bodyPr wrap="square">
             <a:spAutoFit/>
           </a:bodyPr>
           <a:lstStyle/>
           <a:p>
-            <a:pPr marL="0" marR="0" lvl="0" indent="0" algn="l" rtl="0">
-              <a:spcBef>
-                <a:spcPts val="0"/>
-              </a:spcBef>
-              <a:spcAft>
-                <a:spcPts val="0"/>
-              </a:spcAft>
-              <a:buNone/>
-            </a:pPr>
-            <a:r>
-              <a:rPr lang="en-US" sz="3150" b="1" i="0" u="none" strike="noStrike" cap="none">
-                <a:solidFill>
-                  <a:srgbClr val="003366"/>
-                </a:solidFill>
-                <a:latin typeface="Roboto"/>
-                <a:ea typeface="Roboto"/>
-                <a:cs typeface="Roboto"/>
-                <a:sym typeface="Roboto"/>
-              </a:rPr>
-              <a:t>Hướng Phát Triển</a:t>
-            </a:r>
-            <a:endParaRPr/>
-          </a:p>
-        </p:txBody>
-      </p:sp>
-      <p:sp>
-        <p:nvSpPr>
-          <p:cNvPr id="470" name="Google Shape;470;p29"/>
-          <p:cNvSpPr txBox="1"/>
-          <p:nvPr/>
-        </p:nvSpPr>
-        <p:spPr>
-          <a:xfrm>
-            <a:off x="628651" y="6463061"/>
-            <a:ext cx="876300" cy="323165"/>
-          </a:xfrm>
-          <a:prstGeom prst="rect">
-            <a:avLst/>
-          </a:prstGeom>
-          <a:noFill/>
-          <a:ln>
-            <a:noFill/>
-          </a:ln>
-        </p:spPr>
-        <p:txBody>
-          <a:bodyPr spcFirstLastPara="1" wrap="square" lIns="0" tIns="0" rIns="0" bIns="0" anchor="ctr" anchorCtr="0">
-            <a:spAutoFit/>
-          </a:bodyPr>
-          <a:lstStyle/>
-          <a:p>
-            <a:pPr marL="0" marR="0" lvl="0" indent="0" algn="l" rtl="0">
-              <a:spcBef>
-                <a:spcPts val="0"/>
-              </a:spcBef>
-              <a:spcAft>
-                <a:spcPts val="0"/>
-              </a:spcAft>
-              <a:buNone/>
-            </a:pPr>
-            <a:r>
-              <a:rPr lang="en-US" sz="1050" b="1" i="0" u="none" strike="noStrike" cap="none">
-                <a:solidFill>
-                  <a:srgbClr val="003366"/>
-                </a:solidFill>
-                <a:latin typeface="Open Sans SemiBold"/>
-                <a:ea typeface="Open Sans SemiBold"/>
-                <a:cs typeface="Open Sans SemiBold"/>
-                <a:sym typeface="Open Sans SemiBold"/>
-              </a:rPr>
-              <a:t>Mytee Studio</a:t>
-            </a:r>
-            <a:endParaRPr/>
-          </a:p>
-        </p:txBody>
-      </p:sp>
-      <p:sp>
-        <p:nvSpPr>
-          <p:cNvPr id="471" name="Google Shape;471;p29"/>
-          <p:cNvSpPr txBox="1"/>
-          <p:nvPr/>
-        </p:nvSpPr>
-        <p:spPr>
-          <a:xfrm>
-            <a:off x="11306180" y="6534156"/>
-            <a:ext cx="504825" cy="161583"/>
-          </a:xfrm>
-          <a:prstGeom prst="rect">
-            <a:avLst/>
-          </a:prstGeom>
-          <a:noFill/>
-          <a:ln>
-            <a:noFill/>
-          </a:ln>
-        </p:spPr>
-        <p:txBody>
-          <a:bodyPr spcFirstLastPara="1" wrap="square" lIns="0" tIns="0" rIns="0" bIns="0" anchor="t" anchorCtr="0">
-            <a:spAutoFit/>
-          </a:bodyPr>
-          <a:lstStyle/>
-          <a:p>
-            <a:pPr marL="0" marR="0" lvl="0" indent="0" algn="l" rtl="0">
-              <a:spcBef>
-                <a:spcPts val="0"/>
-              </a:spcBef>
-              <a:spcAft>
-                <a:spcPts val="0"/>
-              </a:spcAft>
-              <a:buNone/>
-            </a:pPr>
-            <a:r>
-              <a:rPr lang="en-US" sz="1050" b="0" i="0" u="none" strike="noStrike" cap="none">
-                <a:solidFill>
-                  <a:srgbClr val="64748B"/>
-                </a:solidFill>
-                <a:latin typeface="Open Sans"/>
-                <a:ea typeface="Open Sans"/>
-                <a:cs typeface="Open Sans"/>
-                <a:sym typeface="Open Sans"/>
-              </a:rPr>
-              <a:t>Slide 17</a:t>
-            </a:r>
-            <a:endParaRPr/>
-          </a:p>
-        </p:txBody>
-      </p:sp>
-      <p:sp>
-        <p:nvSpPr>
-          <p:cNvPr id="472" name="Google Shape;472;p29"/>
-          <p:cNvSpPr/>
-          <p:nvPr/>
-        </p:nvSpPr>
-        <p:spPr>
-          <a:xfrm>
-            <a:off x="1862139" y="595312"/>
-            <a:ext cx="571500" cy="38100"/>
-          </a:xfrm>
-          <a:prstGeom prst="rect">
-            <a:avLst/>
-          </a:prstGeom>
-          <a:solidFill>
-            <a:srgbClr val="F59E0B"/>
-          </a:solidFill>
-          <a:ln>
-            <a:noFill/>
-          </a:ln>
-        </p:spPr>
-        <p:txBody>
-          <a:bodyPr spcFirstLastPara="1" wrap="square" lIns="91425" tIns="45700" rIns="91425" bIns="45700" anchor="ctr" anchorCtr="0">
-            <a:noAutofit/>
-          </a:bodyPr>
-          <a:lstStyle/>
-          <a:p>
-            <a:pPr marL="0" marR="0" lvl="0" indent="0" algn="ctr" rtl="0">
-              <a:spcBef>
-                <a:spcPts val="0"/>
-              </a:spcBef>
-              <a:spcAft>
-                <a:spcPts val="0"/>
-              </a:spcAft>
-              <a:buNone/>
-            </a:pPr>
-            <a:endParaRPr sz="1800" b="0" i="0" u="none" strike="noStrike" cap="none">
-              <a:solidFill>
-                <a:schemeClr val="dk1"/>
-              </a:solidFill>
-              <a:latin typeface="Calibri"/>
-              <a:ea typeface="Calibri"/>
-              <a:cs typeface="Calibri"/>
-              <a:sym typeface="Calibri"/>
-            </a:endParaRPr>
-          </a:p>
-        </p:txBody>
-      </p:sp>
-      <p:pic>
-        <p:nvPicPr>
-          <p:cNvPr id="473" name="Google Shape;473;p29" descr="image.png"/>
-          <p:cNvPicPr preferRelativeResize="0"/>
-          <p:nvPr/>
-        </p:nvPicPr>
-        <p:blipFill rotWithShape="1">
-          <a:blip r:embed="rId7">
-            <a:alphaModFix/>
-          </a:blip>
-          <a:srcRect/>
-          <a:stretch/>
-        </p:blipFill>
-        <p:spPr>
-          <a:xfrm>
-            <a:off x="381000" y="6557962"/>
-            <a:ext cx="152400" cy="133350"/>
-          </a:xfrm>
-          <a:prstGeom prst="rect">
-            <a:avLst/>
-          </a:prstGeom>
-          <a:noFill/>
-          <a:ln>
-            <a:noFill/>
-          </a:ln>
-        </p:spPr>
-      </p:pic>
-      <p:pic>
-        <p:nvPicPr>
-          <p:cNvPr id="477" name="Google Shape;477;p29" descr="image.png"/>
-          <p:cNvPicPr preferRelativeResize="0"/>
-          <p:nvPr/>
-        </p:nvPicPr>
-        <p:blipFill rotWithShape="1">
-          <a:blip r:embed="rId8">
-            <a:alphaModFix/>
-          </a:blip>
-          <a:srcRect/>
-          <a:stretch/>
-        </p:blipFill>
-        <p:spPr>
-          <a:xfrm>
-            <a:off x="2936825" y="1609724"/>
-            <a:ext cx="476251" cy="381000"/>
-          </a:xfrm>
-          <a:prstGeom prst="rect">
-            <a:avLst/>
-          </a:prstGeom>
-          <a:noFill/>
-          <a:ln>
-            <a:noFill/>
-          </a:ln>
-        </p:spPr>
-      </p:pic>
-      <p:sp>
-        <p:nvSpPr>
-          <p:cNvPr id="478" name="Google Shape;478;p29"/>
-          <p:cNvSpPr txBox="1"/>
-          <p:nvPr/>
-        </p:nvSpPr>
-        <p:spPr>
-          <a:xfrm>
-            <a:off x="2936829" y="2181229"/>
-            <a:ext cx="3017095" cy="276999"/>
-          </a:xfrm>
-          <a:prstGeom prst="rect">
-            <a:avLst/>
-          </a:prstGeom>
-          <a:noFill/>
-          <a:ln>
-            <a:noFill/>
-          </a:ln>
-        </p:spPr>
-        <p:txBody>
-          <a:bodyPr spcFirstLastPara="1" wrap="square" lIns="0" tIns="0" rIns="0" bIns="0" anchor="t" anchorCtr="0">
-            <a:spAutoFit/>
-          </a:bodyPr>
-          <a:lstStyle/>
-          <a:p>
-            <a:pPr marL="0" marR="0" lvl="0" indent="0" algn="l" rtl="0">
-              <a:spcBef>
-                <a:spcPts val="0"/>
-              </a:spcBef>
-              <a:spcAft>
-                <a:spcPts val="0"/>
-              </a:spcAft>
-              <a:buNone/>
-            </a:pPr>
-            <a:r>
-              <a:rPr lang="en-US" sz="1800" b="1" i="0" u="none" strike="noStrike" cap="none">
-                <a:solidFill>
-                  <a:srgbClr val="003366"/>
-                </a:solidFill>
-                <a:latin typeface="Roboto"/>
-                <a:ea typeface="Roboto"/>
-                <a:cs typeface="Roboto"/>
-                <a:sym typeface="Roboto"/>
-              </a:rPr>
-              <a:t>Quản Lý Kho</a:t>
-            </a:r>
-            <a:endParaRPr/>
-          </a:p>
-        </p:txBody>
-      </p:sp>
-      <p:sp>
-        <p:nvSpPr>
-          <p:cNvPr id="479" name="Google Shape;479;p29"/>
-          <p:cNvSpPr txBox="1"/>
-          <p:nvPr/>
-        </p:nvSpPr>
-        <p:spPr>
-          <a:xfrm>
-            <a:off x="2936825" y="2590799"/>
-            <a:ext cx="2873424" cy="738664"/>
-          </a:xfrm>
-          <a:prstGeom prst="rect">
-            <a:avLst/>
-          </a:prstGeom>
-          <a:noFill/>
-          <a:ln>
-            <a:noFill/>
-          </a:ln>
-        </p:spPr>
-        <p:txBody>
-          <a:bodyPr spcFirstLastPara="1" wrap="square" lIns="0" tIns="0" rIns="0" bIns="0" anchor="t" anchorCtr="0">
-            <a:spAutoFit/>
-          </a:bodyPr>
-          <a:lstStyle/>
-          <a:p>
-            <a:pPr marL="0" marR="0" lvl="0" indent="0" algn="l" rtl="0">
-              <a:lnSpc>
-                <a:spcPct val="160000"/>
-              </a:lnSpc>
-              <a:spcBef>
-                <a:spcPts val="0"/>
-              </a:spcBef>
-              <a:spcAft>
-                <a:spcPts val="0"/>
-              </a:spcAft>
-              <a:buNone/>
-            </a:pPr>
-            <a:r>
-              <a:rPr lang="en-US" sz="1500" b="0" i="0" u="none" strike="noStrike" cap="none">
-                <a:solidFill>
-                  <a:srgbClr val="334155"/>
-                </a:solidFill>
-                <a:latin typeface="Open Sans"/>
-                <a:ea typeface="Open Sans"/>
-                <a:cs typeface="Open Sans"/>
-                <a:sym typeface="Open Sans"/>
-              </a:rPr>
-              <a:t>Tự động trừ tồn kho phôi áo khi có đơn hàng mới.</a:t>
-            </a:r>
-            <a:endParaRPr/>
-          </a:p>
-        </p:txBody>
-      </p:sp>
-      <p:pic>
-        <p:nvPicPr>
-          <p:cNvPr id="480" name="Google Shape;480;p29" descr="image.png"/>
-          <p:cNvPicPr preferRelativeResize="0"/>
-          <p:nvPr/>
-        </p:nvPicPr>
-        <p:blipFill rotWithShape="1">
-          <a:blip r:embed="rId9">
-            <a:alphaModFix/>
-          </a:blip>
-          <a:srcRect/>
-          <a:stretch/>
-        </p:blipFill>
-        <p:spPr>
-          <a:xfrm>
-            <a:off x="6715129" y="1609724"/>
-            <a:ext cx="428625" cy="381000"/>
-          </a:xfrm>
-          <a:prstGeom prst="rect">
-            <a:avLst/>
-          </a:prstGeom>
-          <a:noFill/>
-          <a:ln>
-            <a:noFill/>
-          </a:ln>
-        </p:spPr>
-      </p:pic>
-      <p:sp>
-        <p:nvSpPr>
-          <p:cNvPr id="481" name="Google Shape;481;p29"/>
-          <p:cNvSpPr txBox="1"/>
-          <p:nvPr/>
-        </p:nvSpPr>
-        <p:spPr>
-          <a:xfrm>
-            <a:off x="6715125" y="2181229"/>
-            <a:ext cx="3016939" cy="276999"/>
-          </a:xfrm>
-          <a:prstGeom prst="rect">
-            <a:avLst/>
-          </a:prstGeom>
-          <a:noFill/>
-          <a:ln>
-            <a:noFill/>
-          </a:ln>
-        </p:spPr>
-        <p:txBody>
-          <a:bodyPr spcFirstLastPara="1" wrap="square" lIns="0" tIns="0" rIns="0" bIns="0" anchor="t" anchorCtr="0">
-            <a:spAutoFit/>
-          </a:bodyPr>
-          <a:lstStyle/>
-          <a:p>
-            <a:pPr marL="0" marR="0" lvl="0" indent="0" algn="l" rtl="0">
-              <a:spcBef>
-                <a:spcPts val="0"/>
-              </a:spcBef>
-              <a:spcAft>
-                <a:spcPts val="0"/>
-              </a:spcAft>
-              <a:buNone/>
-            </a:pPr>
-            <a:r>
-              <a:rPr lang="en-US" sz="1800" b="1" i="0" u="none" strike="noStrike" cap="none">
-                <a:solidFill>
-                  <a:srgbClr val="003366"/>
-                </a:solidFill>
-                <a:latin typeface="Roboto"/>
-                <a:ea typeface="Roboto"/>
-                <a:cs typeface="Roboto"/>
-                <a:sym typeface="Roboto"/>
-              </a:rPr>
-              <a:t>AI Suggestion</a:t>
-            </a:r>
-            <a:endParaRPr/>
-          </a:p>
-        </p:txBody>
-      </p:sp>
-      <p:sp>
-        <p:nvSpPr>
-          <p:cNvPr id="482" name="Google Shape;482;p29"/>
-          <p:cNvSpPr txBox="1"/>
-          <p:nvPr/>
-        </p:nvSpPr>
-        <p:spPr>
-          <a:xfrm>
-            <a:off x="6715125" y="2590799"/>
-            <a:ext cx="2873275" cy="738664"/>
-          </a:xfrm>
-          <a:prstGeom prst="rect">
-            <a:avLst/>
-          </a:prstGeom>
-          <a:noFill/>
-          <a:ln>
-            <a:noFill/>
-          </a:ln>
-        </p:spPr>
-        <p:txBody>
-          <a:bodyPr spcFirstLastPara="1" wrap="square" lIns="0" tIns="0" rIns="0" bIns="0" anchor="t" anchorCtr="0">
-            <a:spAutoFit/>
-          </a:bodyPr>
-          <a:lstStyle/>
-          <a:p>
-            <a:pPr marL="0" marR="0" lvl="0" indent="0" algn="l" rtl="0">
-              <a:lnSpc>
-                <a:spcPct val="160000"/>
-              </a:lnSpc>
-              <a:spcBef>
-                <a:spcPts val="0"/>
-              </a:spcBef>
-              <a:spcAft>
-                <a:spcPts val="0"/>
-              </a:spcAft>
-              <a:buNone/>
-            </a:pPr>
-            <a:r>
-              <a:rPr lang="en-US" sz="1500" b="0" i="0" u="none" strike="noStrike" cap="none">
-                <a:solidFill>
-                  <a:srgbClr val="334155"/>
-                </a:solidFill>
-                <a:latin typeface="Open Sans"/>
-                <a:ea typeface="Open Sans"/>
-                <a:cs typeface="Open Sans"/>
-                <a:sym typeface="Open Sans"/>
-              </a:rPr>
-              <a:t>Gợi ý mẫu thiết kế tự động dựa trên sở thích khách hàng.</a:t>
-            </a:r>
-            <a:endParaRPr/>
+            <a:r>
+              <a:rPr lang="vi-VN" sz="2400" b="1" dirty="0">
+                <a:solidFill>
+                  <a:srgbClr val="002060"/>
+                </a:solidFill>
+              </a:rPr>
+              <a:t>Tích hợp AI</a:t>
+            </a:r>
+            <a:r>
+              <a:rPr lang="vi-VN" sz="2400" dirty="0">
+                <a:solidFill>
+                  <a:srgbClr val="002060"/>
+                </a:solidFill>
+              </a:rPr>
+              <a:t>:</a:t>
+            </a:r>
+            <a:r>
+              <a:rPr lang="vi-VN" sz="2400" dirty="0"/>
+              <a:t> Sử dụng trí tuệ nhân tạo để gợi ý thiết kế, tối ưu hóa vị trí in. </a:t>
+            </a:r>
+          </a:p>
+          <a:p>
+            <a:r>
+              <a:rPr lang="vi-VN" sz="2400" b="1" dirty="0" smtClean="0">
+                <a:solidFill>
+                  <a:srgbClr val="002060"/>
+                </a:solidFill>
+              </a:rPr>
+              <a:t>Đa </a:t>
+            </a:r>
+            <a:r>
+              <a:rPr lang="vi-VN" sz="2400" b="1" dirty="0">
+                <a:solidFill>
+                  <a:srgbClr val="002060"/>
+                </a:solidFill>
+              </a:rPr>
+              <a:t>dạng hóa sản phẩm</a:t>
+            </a:r>
+            <a:r>
+              <a:rPr lang="vi-VN" sz="2400" dirty="0"/>
+              <a:t>: Mở rộng sang các sản phẩm in ấn khác như áo hoodie, cốc sứ, </a:t>
+            </a:r>
+          </a:p>
+          <a:p>
+            <a:r>
+              <a:rPr lang="vi-VN" sz="2400" dirty="0"/>
+              <a:t>ốp điện thoại. </a:t>
+            </a:r>
+          </a:p>
+          <a:p>
+            <a:r>
+              <a:rPr lang="vi-VN" sz="2400" b="1" dirty="0" smtClean="0">
+                <a:solidFill>
+                  <a:srgbClr val="002060"/>
+                </a:solidFill>
+              </a:rPr>
+              <a:t>Tích </a:t>
+            </a:r>
+            <a:r>
+              <a:rPr lang="vi-VN" sz="2400" b="1" dirty="0">
+                <a:solidFill>
+                  <a:srgbClr val="002060"/>
+                </a:solidFill>
+              </a:rPr>
+              <a:t>hợp với mạng xã hội</a:t>
+            </a:r>
+            <a:r>
+              <a:rPr lang="vi-VN" sz="2400" dirty="0"/>
+              <a:t>: Cho phép chia sẻ thiết kế lên mạng xã hội, tạo hiệu ứng lan </a:t>
+            </a:r>
+          </a:p>
+          <a:p>
+            <a:r>
+              <a:rPr lang="vi-VN" sz="2400" dirty="0"/>
+              <a:t>truyền. </a:t>
+            </a:r>
+          </a:p>
+          <a:p>
+            <a:r>
+              <a:rPr lang="vi-VN" sz="2400" b="1" dirty="0" smtClean="0">
+                <a:solidFill>
+                  <a:srgbClr val="002060"/>
+                </a:solidFill>
+              </a:rPr>
+              <a:t>Cá </a:t>
+            </a:r>
+            <a:r>
+              <a:rPr lang="vi-VN" sz="2400" b="1" dirty="0">
+                <a:solidFill>
+                  <a:srgbClr val="002060"/>
+                </a:solidFill>
+              </a:rPr>
+              <a:t>nhân hóa trải nghiệm:</a:t>
+            </a:r>
+            <a:r>
+              <a:rPr lang="vi-VN" sz="2400" dirty="0"/>
+              <a:t> Dựa trên lịch sử mua hàng để gợi ý sản phẩm phù hợp.</a:t>
+            </a:r>
+            <a:endParaRPr lang="en-US" sz="2400" dirty="0"/>
           </a:p>
         </p:txBody>
       </p:sp>
@@ -14504,6 +10360,9 @@
   <p:clrMapOvr>
     <a:masterClrMapping/>
   </p:clrMapOvr>
+  <p:transition spd="slow">
+    <p:randomBar dir="vert"/>
+  </p:transition>
   <p:timing>
     <p:tnLst>
       <p:par>
@@ -14514,7 +10373,7 @@
 </p:sld>
 </file>
 
-<file path=ppt/slides/slide18.xml><?xml version="1.0" encoding="utf-8"?>
+<file path=ppt/slides/slide15.xml><?xml version="1.0" encoding="utf-8"?>
 <p:sld xmlns:a="http://schemas.openxmlformats.org/drawingml/2006/main" xmlns:r="http://schemas.openxmlformats.org/officeDocument/2006/relationships" xmlns:p="http://schemas.openxmlformats.org/presentationml/2006/main">
   <p:cSld>
     <p:bg>
@@ -14778,6 +10637,9 @@
   <p:clrMapOvr>
     <a:masterClrMapping/>
   </p:clrMapOvr>
+  <p:transition spd="slow">
+    <p:push dir="u"/>
+  </p:transition>
   <p:timing>
     <p:tnLst>
       <p:par>
@@ -15093,56 +10955,6 @@
           </a:p>
         </p:txBody>
       </p:sp>
-      <p:sp>
-        <p:nvSpPr>
-          <p:cNvPr id="108" name="Google Shape;108;p14"/>
-          <p:cNvSpPr txBox="1"/>
-          <p:nvPr/>
-        </p:nvSpPr>
-        <p:spPr>
-          <a:xfrm>
-            <a:off x="11382380" y="6534156"/>
-            <a:ext cx="428625" cy="161583"/>
-          </a:xfrm>
-          <a:prstGeom prst="rect">
-            <a:avLst/>
-          </a:prstGeom>
-          <a:noFill/>
-          <a:ln>
-            <a:noFill/>
-          </a:ln>
-        </p:spPr>
-        <p:txBody>
-          <a:bodyPr spcFirstLastPara="1" wrap="square" lIns="0" tIns="0" rIns="0" bIns="0" anchor="t" anchorCtr="0">
-            <a:spAutoFit/>
-          </a:bodyPr>
-          <a:lstStyle/>
-          <a:p>
-            <a:pPr marL="0" marR="0" lvl="0" indent="0" algn="l" rtl="0">
-              <a:spcBef>
-                <a:spcPts val="0"/>
-              </a:spcBef>
-              <a:spcAft>
-                <a:spcPts val="0"/>
-              </a:spcAft>
-              <a:buNone/>
-            </a:pPr>
-            <a:r>
-              <a:rPr lang="en-US" sz="1050" b="0" i="0" u="none" strike="noStrike" cap="none" dirty="0">
-                <a:solidFill>
-                  <a:srgbClr val="64748B"/>
-                </a:solidFill>
-                <a:latin typeface="Open Sans"/>
-                <a:ea typeface="Open Sans"/>
-                <a:cs typeface="Open Sans"/>
-                <a:sym typeface="Open Sans"/>
-              </a:rPr>
-              <a:t>Slide 2</a:t>
-            </a:r>
-            <a:endParaRPr dirty="0"/>
-          </a:p>
-        </p:txBody>
-      </p:sp>
       <p:pic>
         <p:nvPicPr>
           <p:cNvPr id="110" name="Google Shape;110;p14" descr="image.png"/>
@@ -15565,6 +11377,18 @@
   <p:clrMapOvr>
     <a:masterClrMapping/>
   </p:clrMapOvr>
+  <mc:AlternateContent xmlns:mc="http://schemas.openxmlformats.org/markup-compatibility/2006" xmlns:p14="http://schemas.microsoft.com/office/powerpoint/2010/main">
+    <mc:Choice Requires="p14">
+      <p:transition spd="slow" p14:dur="3400">
+        <p14:reveal/>
+      </p:transition>
+    </mc:Choice>
+    <mc:Fallback xmlns="">
+      <p:transition spd="slow">
+        <p:fade/>
+      </p:transition>
+    </mc:Fallback>
+  </mc:AlternateContent>
   <p:timing>
     <p:tnLst>
       <p:par>
@@ -15716,7 +11540,7 @@
               <a:buNone/>
             </a:pPr>
             <a:r>
-              <a:rPr lang="en-US" sz="3150" b="1" i="0" u="none" strike="noStrike" cap="none">
+              <a:rPr lang="en-US" sz="3150" b="1" i="0" u="none" strike="noStrike" cap="none" dirty="0" err="1">
                 <a:solidFill>
                   <a:srgbClr val="003366"/>
                 </a:solidFill>
@@ -15725,9 +11549,81 @@
                 <a:cs typeface="Roboto"/>
                 <a:sym typeface="Roboto"/>
               </a:rPr>
-              <a:t>Mục Tiêu Đề Tài</a:t>
-            </a:r>
-            <a:endParaRPr/>
+              <a:t>Mục</a:t>
+            </a:r>
+            <a:r>
+              <a:rPr lang="en-US" sz="3150" b="1" i="0" u="none" strike="noStrike" cap="none" dirty="0">
+                <a:solidFill>
+                  <a:srgbClr val="003366"/>
+                </a:solidFill>
+                <a:latin typeface="Roboto"/>
+                <a:ea typeface="Roboto"/>
+                <a:cs typeface="Roboto"/>
+                <a:sym typeface="Roboto"/>
+              </a:rPr>
+              <a:t> </a:t>
+            </a:r>
+            <a:r>
+              <a:rPr lang="en-US" sz="3150" b="1" i="0" u="none" strike="noStrike" cap="none" dirty="0" err="1">
+                <a:solidFill>
+                  <a:srgbClr val="003366"/>
+                </a:solidFill>
+                <a:latin typeface="Roboto"/>
+                <a:ea typeface="Roboto"/>
+                <a:cs typeface="Roboto"/>
+                <a:sym typeface="Roboto"/>
+              </a:rPr>
+              <a:t>Tiêu</a:t>
+            </a:r>
+            <a:r>
+              <a:rPr lang="en-US" sz="3150" b="1" i="0" u="none" strike="noStrike" cap="none" dirty="0">
+                <a:solidFill>
+                  <a:srgbClr val="003366"/>
+                </a:solidFill>
+                <a:latin typeface="Roboto"/>
+                <a:ea typeface="Roboto"/>
+                <a:cs typeface="Roboto"/>
+                <a:sym typeface="Roboto"/>
+              </a:rPr>
+              <a:t> </a:t>
+            </a:r>
+            <a:r>
+              <a:rPr lang="en-US" sz="3150" b="1" i="0" u="none" strike="noStrike" cap="none" dirty="0" err="1">
+                <a:solidFill>
+                  <a:srgbClr val="003366"/>
+                </a:solidFill>
+                <a:latin typeface="Roboto"/>
+                <a:ea typeface="Roboto"/>
+                <a:cs typeface="Roboto"/>
+                <a:sym typeface="Roboto"/>
+              </a:rPr>
+              <a:t>Đề</a:t>
+            </a:r>
+            <a:r>
+              <a:rPr lang="en-US" sz="3150" b="1" i="0" u="none" strike="noStrike" cap="none" dirty="0">
+                <a:solidFill>
+                  <a:srgbClr val="003366"/>
+                </a:solidFill>
+                <a:latin typeface="Roboto"/>
+                <a:ea typeface="Roboto"/>
+                <a:cs typeface="Roboto"/>
+                <a:sym typeface="Roboto"/>
+              </a:rPr>
+              <a:t> </a:t>
+            </a:r>
+            <a:r>
+              <a:rPr lang="en-US" sz="3150" b="1" i="0" u="none" strike="noStrike" cap="none" dirty="0" err="1">
+                <a:solidFill>
+                  <a:srgbClr val="003366"/>
+                </a:solidFill>
+                <a:latin typeface="Roboto"/>
+                <a:ea typeface="Roboto"/>
+                <a:cs typeface="Roboto"/>
+                <a:sym typeface="Roboto"/>
+              </a:rPr>
+              <a:t>Tài</a:t>
+            </a:r>
+            <a:endParaRPr dirty="0"/>
           </a:p>
         </p:txBody>
       </p:sp>
@@ -15778,104 +11674,6 @@
               <a:t>Mytee Studio</a:t>
             </a:r>
             <a:endParaRPr/>
-          </a:p>
-        </p:txBody>
-      </p:sp>
-      <p:sp>
-        <p:nvSpPr>
-          <p:cNvPr id="129" name="Google Shape;129;p15"/>
-          <p:cNvSpPr txBox="1"/>
-          <p:nvPr/>
-        </p:nvSpPr>
-        <p:spPr>
-          <a:xfrm>
-            <a:off x="11382380" y="6534156"/>
-            <a:ext cx="428625" cy="161583"/>
-          </a:xfrm>
-          <a:prstGeom prst="rect">
-            <a:avLst/>
-          </a:prstGeom>
-          <a:noFill/>
-          <a:ln>
-            <a:noFill/>
-          </a:ln>
-        </p:spPr>
-        <p:txBody>
-          <a:bodyPr spcFirstLastPara="1" wrap="square" lIns="0" tIns="0" rIns="0" bIns="0" anchor="t" anchorCtr="0">
-            <a:spAutoFit/>
-          </a:bodyPr>
-          <a:lstStyle/>
-          <a:p>
-            <a:pPr marL="0" marR="0" lvl="0" indent="0" algn="l" rtl="0">
-              <a:spcBef>
-                <a:spcPts val="0"/>
-              </a:spcBef>
-              <a:spcAft>
-                <a:spcPts val="0"/>
-              </a:spcAft>
-              <a:buNone/>
-            </a:pPr>
-            <a:r>
-              <a:rPr lang="en-US" sz="1050" b="0" i="0" u="none" strike="noStrike" cap="none">
-                <a:solidFill>
-                  <a:srgbClr val="64748B"/>
-                </a:solidFill>
-                <a:latin typeface="Open Sans"/>
-                <a:ea typeface="Open Sans"/>
-                <a:cs typeface="Open Sans"/>
-                <a:sym typeface="Open Sans"/>
-              </a:rPr>
-              <a:t>Slide 3</a:t>
-            </a:r>
-            <a:endParaRPr/>
-          </a:p>
-        </p:txBody>
-      </p:sp>
-      <p:sp>
-        <p:nvSpPr>
-          <p:cNvPr id="130" name="Google Shape;130;p15"/>
-          <p:cNvSpPr/>
-          <p:nvPr/>
-        </p:nvSpPr>
-        <p:spPr>
-          <a:xfrm>
-            <a:off x="1724027" y="595312"/>
-            <a:ext cx="571500" cy="38100"/>
-          </a:xfrm>
-          <a:prstGeom prst="rect">
-            <a:avLst/>
-          </a:prstGeom>
-          <a:solidFill>
-            <a:srgbClr val="F59E0B"/>
-          </a:solidFill>
-          <a:ln>
-            <a:noFill/>
-          </a:ln>
-        </p:spPr>
-        <p:txBody>
-          <a:bodyPr spcFirstLastPara="1" wrap="square" lIns="91425" tIns="45700" rIns="91425" bIns="45700" anchor="ctr" anchorCtr="0">
-            <a:noAutofit/>
-          </a:bodyPr>
-          <a:lstStyle/>
-          <a:p>
-            <a:pPr marL="0" marR="0" lvl="0" indent="0" algn="ctr" rtl="0">
-              <a:spcBef>
-                <a:spcPts val="0"/>
-              </a:spcBef>
-              <a:spcAft>
-                <a:spcPts val="0"/>
-              </a:spcAft>
-              <a:buNone/>
-            </a:pPr>
-            <a:endParaRPr sz="1800" b="0" i="0" u="none" strike="noStrike" cap="none">
-              <a:solidFill>
-                <a:schemeClr val="dk1"/>
-              </a:solidFill>
-              <a:latin typeface="Calibri"/>
-              <a:ea typeface="Calibri"/>
-              <a:cs typeface="Calibri"/>
-              <a:sym typeface="Calibri"/>
-            </a:endParaRPr>
           </a:p>
         </p:txBody>
       </p:sp>
@@ -16529,6 +12327,9 @@
   <p:clrMapOvr>
     <a:masterClrMapping/>
   </p:clrMapOvr>
+  <p:transition spd="slow">
+    <p:wipe/>
+  </p:transition>
   <p:timing>
     <p:tnLst>
       <p:par>
@@ -16718,56 +12519,6 @@
           </a:p>
         </p:txBody>
       </p:sp>
-      <p:sp>
-        <p:nvSpPr>
-          <p:cNvPr id="149" name="Google Shape;149;p16"/>
-          <p:cNvSpPr txBox="1"/>
-          <p:nvPr/>
-        </p:nvSpPr>
-        <p:spPr>
-          <a:xfrm>
-            <a:off x="11382380" y="6534156"/>
-            <a:ext cx="428625" cy="161583"/>
-          </a:xfrm>
-          <a:prstGeom prst="rect">
-            <a:avLst/>
-          </a:prstGeom>
-          <a:noFill/>
-          <a:ln>
-            <a:noFill/>
-          </a:ln>
-        </p:spPr>
-        <p:txBody>
-          <a:bodyPr spcFirstLastPara="1" wrap="square" lIns="0" tIns="0" rIns="0" bIns="0" anchor="t" anchorCtr="0">
-            <a:spAutoFit/>
-          </a:bodyPr>
-          <a:lstStyle/>
-          <a:p>
-            <a:pPr marL="0" marR="0" lvl="0" indent="0" algn="l" rtl="0">
-              <a:spcBef>
-                <a:spcPts val="0"/>
-              </a:spcBef>
-              <a:spcAft>
-                <a:spcPts val="0"/>
-              </a:spcAft>
-              <a:buNone/>
-            </a:pPr>
-            <a:r>
-              <a:rPr lang="en-US" sz="1050" b="0" i="0" u="none" strike="noStrike" cap="none">
-                <a:solidFill>
-                  <a:srgbClr val="64748B"/>
-                </a:solidFill>
-                <a:latin typeface="Open Sans"/>
-                <a:ea typeface="Open Sans"/>
-                <a:cs typeface="Open Sans"/>
-                <a:sym typeface="Open Sans"/>
-              </a:rPr>
-              <a:t>Slide 4</a:t>
-            </a:r>
-            <a:endParaRPr/>
-          </a:p>
-        </p:txBody>
-      </p:sp>
       <p:pic>
         <p:nvPicPr>
           <p:cNvPr id="151" name="Google Shape;151;p16" descr="image.png"/>
@@ -17271,6 +13022,18 @@
   <p:clrMapOvr>
     <a:masterClrMapping/>
   </p:clrMapOvr>
+  <mc:AlternateContent xmlns:mc="http://schemas.openxmlformats.org/markup-compatibility/2006" xmlns:p14="http://schemas.microsoft.com/office/powerpoint/2010/main">
+    <mc:Choice Requires="p14">
+      <p:transition spd="slow" p14:dur="800">
+        <p:circle/>
+      </p:transition>
+    </mc:Choice>
+    <mc:Fallback xmlns="">
+      <p:transition spd="slow">
+        <p:circle/>
+      </p:transition>
+    </mc:Fallback>
+  </mc:AlternateContent>
   <p:timing>
     <p:tnLst>
       <p:par>
@@ -17607,56 +13370,6 @@
           </a:p>
         </p:txBody>
       </p:sp>
-      <p:sp>
-        <p:nvSpPr>
-          <p:cNvPr id="173" name="Google Shape;173;p17"/>
-          <p:cNvSpPr txBox="1"/>
-          <p:nvPr/>
-        </p:nvSpPr>
-        <p:spPr>
-          <a:xfrm>
-            <a:off x="11382380" y="6534156"/>
-            <a:ext cx="428625" cy="161583"/>
-          </a:xfrm>
-          <a:prstGeom prst="rect">
-            <a:avLst/>
-          </a:prstGeom>
-          <a:noFill/>
-          <a:ln>
-            <a:noFill/>
-          </a:ln>
-        </p:spPr>
-        <p:txBody>
-          <a:bodyPr spcFirstLastPara="1" wrap="square" lIns="0" tIns="0" rIns="0" bIns="0" anchor="t" anchorCtr="0">
-            <a:spAutoFit/>
-          </a:bodyPr>
-          <a:lstStyle/>
-          <a:p>
-            <a:pPr marL="0" marR="0" lvl="0" indent="0" algn="l" rtl="0">
-              <a:spcBef>
-                <a:spcPts val="0"/>
-              </a:spcBef>
-              <a:spcAft>
-                <a:spcPts val="0"/>
-              </a:spcAft>
-              <a:buNone/>
-            </a:pPr>
-            <a:r>
-              <a:rPr lang="en-US" sz="1050" b="0" i="0" u="none" strike="noStrike" cap="none">
-                <a:solidFill>
-                  <a:srgbClr val="64748B"/>
-                </a:solidFill>
-                <a:latin typeface="Open Sans"/>
-                <a:ea typeface="Open Sans"/>
-                <a:cs typeface="Open Sans"/>
-                <a:sym typeface="Open Sans"/>
-              </a:rPr>
-              <a:t>Slide 5</a:t>
-            </a:r>
-            <a:endParaRPr/>
-          </a:p>
-        </p:txBody>
-      </p:sp>
       <p:pic>
         <p:nvPicPr>
           <p:cNvPr id="175" name="Google Shape;175;p17" descr="image.png"/>
@@ -18307,6 +14020,9 @@
   <p:clrMapOvr>
     <a:masterClrMapping/>
   </p:clrMapOvr>
+  <p:transition spd="slow">
+    <p:randomBar dir="vert"/>
+  </p:transition>
   <p:timing>
     <p:tnLst>
       <p:par>
@@ -18496,56 +14212,6 @@
           </a:p>
         </p:txBody>
       </p:sp>
-      <p:sp>
-        <p:nvSpPr>
-          <p:cNvPr id="200" name="Google Shape;200;p18"/>
-          <p:cNvSpPr txBox="1"/>
-          <p:nvPr/>
-        </p:nvSpPr>
-        <p:spPr>
-          <a:xfrm>
-            <a:off x="11382380" y="6534156"/>
-            <a:ext cx="428625" cy="161583"/>
-          </a:xfrm>
-          <a:prstGeom prst="rect">
-            <a:avLst/>
-          </a:prstGeom>
-          <a:noFill/>
-          <a:ln>
-            <a:noFill/>
-          </a:ln>
-        </p:spPr>
-        <p:txBody>
-          <a:bodyPr spcFirstLastPara="1" wrap="square" lIns="0" tIns="0" rIns="0" bIns="0" anchor="t" anchorCtr="0">
-            <a:spAutoFit/>
-          </a:bodyPr>
-          <a:lstStyle/>
-          <a:p>
-            <a:pPr marL="0" marR="0" lvl="0" indent="0" algn="l" rtl="0">
-              <a:spcBef>
-                <a:spcPts val="0"/>
-              </a:spcBef>
-              <a:spcAft>
-                <a:spcPts val="0"/>
-              </a:spcAft>
-              <a:buNone/>
-            </a:pPr>
-            <a:r>
-              <a:rPr lang="en-US" sz="1050" b="0" i="0" u="none" strike="noStrike" cap="none">
-                <a:solidFill>
-                  <a:srgbClr val="64748B"/>
-                </a:solidFill>
-                <a:latin typeface="Open Sans"/>
-                <a:ea typeface="Open Sans"/>
-                <a:cs typeface="Open Sans"/>
-                <a:sym typeface="Open Sans"/>
-              </a:rPr>
-              <a:t>Slide 6</a:t>
-            </a:r>
-            <a:endParaRPr/>
-          </a:p>
-        </p:txBody>
-      </p:sp>
       <p:pic>
         <p:nvPicPr>
           <p:cNvPr id="202" name="Google Shape;202;p18" descr="image.png"/>
@@ -19268,6 +14934,18 @@
   <p:clrMapOvr>
     <a:masterClrMapping/>
   </p:clrMapOvr>
+  <mc:AlternateContent xmlns:mc="http://schemas.openxmlformats.org/markup-compatibility/2006" xmlns:p14="http://schemas.microsoft.com/office/powerpoint/2010/main">
+    <mc:Choice Requires="p14">
+      <p:transition spd="slow" p14:dur="1200">
+        <p:dissolve/>
+      </p:transition>
+    </mc:Choice>
+    <mc:Fallback xmlns="">
+      <p:transition spd="slow">
+        <p:dissolve/>
+      </p:transition>
+    </mc:Fallback>
+  </mc:AlternateContent>
   <p:timing>
     <p:tnLst>
       <p:par>
@@ -19279,690 +14957,6 @@
 </file>
 
 <file path=ppt/slides/slide7.xml><?xml version="1.0" encoding="utf-8"?>
-<p:sld xmlns:a="http://schemas.openxmlformats.org/drawingml/2006/main" xmlns:r="http://schemas.openxmlformats.org/officeDocument/2006/relationships" xmlns:p="http://schemas.openxmlformats.org/presentationml/2006/main">
-  <p:cSld>
-    <p:bg>
-      <p:bgPr>
-        <a:solidFill>
-          <a:srgbClr val="FFFFFF"/>
-        </a:solidFill>
-        <a:effectLst/>
-      </p:bgPr>
-    </p:bg>
-    <p:spTree>
-      <p:nvGrpSpPr>
-        <p:cNvPr id="1" name="Shape 221"/>
-        <p:cNvGrpSpPr/>
-        <p:nvPr/>
-      </p:nvGrpSpPr>
-      <p:grpSpPr>
-        <a:xfrm>
-          <a:off x="0" y="0"/>
-          <a:ext cx="0" cy="0"/>
-          <a:chOff x="0" y="0"/>
-          <a:chExt cx="0" cy="0"/>
-        </a:xfrm>
-      </p:grpSpPr>
-      <p:pic>
-        <p:nvPicPr>
-          <p:cNvPr id="222" name="Google Shape;222;p19" descr="image.png"/>
-          <p:cNvPicPr preferRelativeResize="0"/>
-          <p:nvPr/>
-        </p:nvPicPr>
-        <p:blipFill rotWithShape="1">
-          <a:blip r:embed="rId3">
-            <a:alphaModFix/>
-          </a:blip>
-          <a:srcRect/>
-          <a:stretch/>
-        </p:blipFill>
-        <p:spPr>
-          <a:xfrm>
-            <a:off x="0" y="0"/>
-            <a:ext cx="12192000" cy="6858000"/>
-          </a:xfrm>
-          <a:prstGeom prst="rect">
-            <a:avLst/>
-          </a:prstGeom>
-          <a:noFill/>
-          <a:ln>
-            <a:noFill/>
-          </a:ln>
-        </p:spPr>
-      </p:pic>
-      <p:pic>
-        <p:nvPicPr>
-          <p:cNvPr id="223" name="Google Shape;223;p19" descr="image.png"/>
-          <p:cNvPicPr preferRelativeResize="0"/>
-          <p:nvPr/>
-        </p:nvPicPr>
-        <p:blipFill rotWithShape="1">
-          <a:blip r:embed="rId4">
-            <a:alphaModFix/>
-          </a:blip>
-          <a:srcRect/>
-          <a:stretch/>
-        </p:blipFill>
-        <p:spPr>
-          <a:xfrm>
-            <a:off x="1547812" y="2737550"/>
-            <a:ext cx="3810000" cy="2135385"/>
-          </a:xfrm>
-          <a:prstGeom prst="rect">
-            <a:avLst/>
-          </a:prstGeom>
-          <a:noFill/>
-          <a:ln>
-            <a:noFill/>
-          </a:ln>
-        </p:spPr>
-      </p:pic>
-      <p:pic>
-        <p:nvPicPr>
-          <p:cNvPr id="224" name="Google Shape;224;p19" descr="image.png"/>
-          <p:cNvPicPr preferRelativeResize="0"/>
-          <p:nvPr/>
-        </p:nvPicPr>
-        <p:blipFill rotWithShape="1">
-          <a:blip r:embed="rId4">
-            <a:alphaModFix/>
-          </a:blip>
-          <a:srcRect/>
-          <a:stretch/>
-        </p:blipFill>
-        <p:spPr>
-          <a:xfrm>
-            <a:off x="6834187" y="2737550"/>
-            <a:ext cx="3810000" cy="2135385"/>
-          </a:xfrm>
-          <a:prstGeom prst="rect">
-            <a:avLst/>
-          </a:prstGeom>
-          <a:noFill/>
-          <a:ln>
-            <a:noFill/>
-          </a:ln>
-        </p:spPr>
-      </p:pic>
-      <p:pic>
-        <p:nvPicPr>
-          <p:cNvPr id="225" name="Google Shape;225;p19" descr="image.png"/>
-          <p:cNvPicPr preferRelativeResize="0"/>
-          <p:nvPr/>
-        </p:nvPicPr>
-        <p:blipFill rotWithShape="1">
-          <a:blip r:embed="rId5">
-            <a:alphaModFix/>
-          </a:blip>
-          <a:srcRect/>
-          <a:stretch/>
-        </p:blipFill>
-        <p:spPr>
-          <a:xfrm>
-            <a:off x="0" y="6381750"/>
-            <a:ext cx="12192000" cy="476250"/>
-          </a:xfrm>
-          <a:prstGeom prst="rect">
-            <a:avLst/>
-          </a:prstGeom>
-          <a:noFill/>
-          <a:ln>
-            <a:noFill/>
-          </a:ln>
-        </p:spPr>
-      </p:pic>
-      <p:sp>
-        <p:nvSpPr>
-          <p:cNvPr id="226" name="Google Shape;226;p19"/>
-          <p:cNvSpPr txBox="1"/>
-          <p:nvPr/>
-        </p:nvSpPr>
-        <p:spPr>
-          <a:xfrm>
-            <a:off x="571504" y="381001"/>
-            <a:ext cx="4695825" cy="969496"/>
-          </a:xfrm>
-          <a:prstGeom prst="rect">
-            <a:avLst/>
-          </a:prstGeom>
-          <a:noFill/>
-          <a:ln>
-            <a:noFill/>
-          </a:ln>
-        </p:spPr>
-        <p:txBody>
-          <a:bodyPr spcFirstLastPara="1" wrap="square" lIns="0" tIns="0" rIns="0" bIns="0" anchor="t" anchorCtr="0">
-            <a:spAutoFit/>
-          </a:bodyPr>
-          <a:lstStyle/>
-          <a:p>
-            <a:pPr marL="0" marR="0" lvl="0" indent="0" algn="l" rtl="0">
-              <a:spcBef>
-                <a:spcPts val="0"/>
-              </a:spcBef>
-              <a:spcAft>
-                <a:spcPts val="0"/>
-              </a:spcAft>
-              <a:buNone/>
-            </a:pPr>
-            <a:r>
-              <a:rPr lang="en-US" sz="3150" b="1" i="0" u="none" strike="noStrike" cap="none" dirty="0" err="1">
-                <a:solidFill>
-                  <a:srgbClr val="003366"/>
-                </a:solidFill>
-                <a:latin typeface="Roboto"/>
-                <a:ea typeface="Roboto"/>
-                <a:cs typeface="Roboto"/>
-                <a:sym typeface="Roboto"/>
-              </a:rPr>
-              <a:t>Sơ</a:t>
-            </a:r>
-            <a:r>
-              <a:rPr lang="en-US" sz="3150" b="1" i="0" u="none" strike="noStrike" cap="none" dirty="0">
-                <a:solidFill>
-                  <a:srgbClr val="003366"/>
-                </a:solidFill>
-                <a:latin typeface="Roboto"/>
-                <a:ea typeface="Roboto"/>
-                <a:cs typeface="Roboto"/>
-                <a:sym typeface="Roboto"/>
-              </a:rPr>
-              <a:t> </a:t>
-            </a:r>
-            <a:r>
-              <a:rPr lang="en-US" sz="3150" b="1" i="0" u="none" strike="noStrike" cap="none" dirty="0" err="1">
-                <a:solidFill>
-                  <a:srgbClr val="003366"/>
-                </a:solidFill>
-                <a:latin typeface="Roboto"/>
-                <a:ea typeface="Roboto"/>
-                <a:cs typeface="Roboto"/>
-                <a:sym typeface="Roboto"/>
-              </a:rPr>
-              <a:t>Đồ</a:t>
-            </a:r>
-            <a:r>
-              <a:rPr lang="en-US" sz="3150" b="1" i="0" u="none" strike="noStrike" cap="none" dirty="0">
-                <a:solidFill>
-                  <a:srgbClr val="003366"/>
-                </a:solidFill>
-                <a:latin typeface="Roboto"/>
-                <a:ea typeface="Roboto"/>
-                <a:cs typeface="Roboto"/>
-                <a:sym typeface="Roboto"/>
-              </a:rPr>
-              <a:t> Use Case </a:t>
-            </a:r>
-            <a:r>
-              <a:rPr lang="en-US" sz="3150" b="1" i="0" u="none" strike="noStrike" cap="none" dirty="0" err="1">
-                <a:solidFill>
-                  <a:srgbClr val="003366"/>
-                </a:solidFill>
-                <a:latin typeface="Roboto"/>
-                <a:ea typeface="Roboto"/>
-                <a:cs typeface="Roboto"/>
-                <a:sym typeface="Roboto"/>
-              </a:rPr>
-              <a:t>Hệ</a:t>
-            </a:r>
-            <a:r>
-              <a:rPr lang="en-US" sz="3150" b="1" i="0" u="none" strike="noStrike" cap="none" dirty="0">
-                <a:solidFill>
-                  <a:srgbClr val="003366"/>
-                </a:solidFill>
-                <a:latin typeface="Roboto"/>
-                <a:ea typeface="Roboto"/>
-                <a:cs typeface="Roboto"/>
-                <a:sym typeface="Roboto"/>
-              </a:rPr>
-              <a:t> </a:t>
-            </a:r>
-            <a:r>
-              <a:rPr lang="en-US" sz="3150" b="1" i="0" u="none" strike="noStrike" cap="none" dirty="0" err="1">
-                <a:solidFill>
-                  <a:srgbClr val="003366"/>
-                </a:solidFill>
-                <a:latin typeface="Roboto"/>
-                <a:ea typeface="Roboto"/>
-                <a:cs typeface="Roboto"/>
-                <a:sym typeface="Roboto"/>
-              </a:rPr>
-              <a:t>Thống</a:t>
-            </a:r>
-            <a:endParaRPr dirty="0"/>
-          </a:p>
-        </p:txBody>
-      </p:sp>
-      <p:sp>
-        <p:nvSpPr>
-          <p:cNvPr id="227" name="Google Shape;227;p19"/>
-          <p:cNvSpPr txBox="1"/>
-          <p:nvPr/>
-        </p:nvSpPr>
-        <p:spPr>
-          <a:xfrm>
-            <a:off x="628651" y="6463061"/>
-            <a:ext cx="876300" cy="323165"/>
-          </a:xfrm>
-          <a:prstGeom prst="rect">
-            <a:avLst/>
-          </a:prstGeom>
-          <a:noFill/>
-          <a:ln>
-            <a:noFill/>
-          </a:ln>
-        </p:spPr>
-        <p:txBody>
-          <a:bodyPr spcFirstLastPara="1" wrap="square" lIns="0" tIns="0" rIns="0" bIns="0" anchor="ctr" anchorCtr="0">
-            <a:spAutoFit/>
-          </a:bodyPr>
-          <a:lstStyle/>
-          <a:p>
-            <a:pPr marL="0" marR="0" lvl="0" indent="0" algn="l" rtl="0">
-              <a:spcBef>
-                <a:spcPts val="0"/>
-              </a:spcBef>
-              <a:spcAft>
-                <a:spcPts val="0"/>
-              </a:spcAft>
-              <a:buNone/>
-            </a:pPr>
-            <a:r>
-              <a:rPr lang="en-US" sz="1050" b="1" i="0" u="none" strike="noStrike" cap="none">
-                <a:solidFill>
-                  <a:srgbClr val="003366"/>
-                </a:solidFill>
-                <a:latin typeface="Open Sans SemiBold"/>
-                <a:ea typeface="Open Sans SemiBold"/>
-                <a:cs typeface="Open Sans SemiBold"/>
-                <a:sym typeface="Open Sans SemiBold"/>
-              </a:rPr>
-              <a:t>Mytee Studio</a:t>
-            </a:r>
-            <a:endParaRPr/>
-          </a:p>
-        </p:txBody>
-      </p:sp>
-      <p:sp>
-        <p:nvSpPr>
-          <p:cNvPr id="228" name="Google Shape;228;p19"/>
-          <p:cNvSpPr txBox="1"/>
-          <p:nvPr/>
-        </p:nvSpPr>
-        <p:spPr>
-          <a:xfrm>
-            <a:off x="11382380" y="6534156"/>
-            <a:ext cx="428625" cy="161583"/>
-          </a:xfrm>
-          <a:prstGeom prst="rect">
-            <a:avLst/>
-          </a:prstGeom>
-          <a:noFill/>
-          <a:ln>
-            <a:noFill/>
-          </a:ln>
-        </p:spPr>
-        <p:txBody>
-          <a:bodyPr spcFirstLastPara="1" wrap="square" lIns="0" tIns="0" rIns="0" bIns="0" anchor="t" anchorCtr="0">
-            <a:spAutoFit/>
-          </a:bodyPr>
-          <a:lstStyle/>
-          <a:p>
-            <a:pPr marL="0" marR="0" lvl="0" indent="0" algn="l" rtl="0">
-              <a:spcBef>
-                <a:spcPts val="0"/>
-              </a:spcBef>
-              <a:spcAft>
-                <a:spcPts val="0"/>
-              </a:spcAft>
-              <a:buNone/>
-            </a:pPr>
-            <a:r>
-              <a:rPr lang="en-US" sz="1050" b="0" i="0" u="none" strike="noStrike" cap="none">
-                <a:solidFill>
-                  <a:srgbClr val="64748B"/>
-                </a:solidFill>
-                <a:latin typeface="Open Sans"/>
-                <a:ea typeface="Open Sans"/>
-                <a:cs typeface="Open Sans"/>
-                <a:sym typeface="Open Sans"/>
-              </a:rPr>
-              <a:t>Slide 7</a:t>
-            </a:r>
-            <a:endParaRPr/>
-          </a:p>
-        </p:txBody>
-      </p:sp>
-      <p:pic>
-        <p:nvPicPr>
-          <p:cNvPr id="230" name="Google Shape;230;p19" descr="image.png"/>
-          <p:cNvPicPr preferRelativeResize="0"/>
-          <p:nvPr/>
-        </p:nvPicPr>
-        <p:blipFill rotWithShape="1">
-          <a:blip r:embed="rId6">
-            <a:alphaModFix/>
-          </a:blip>
-          <a:srcRect/>
-          <a:stretch/>
-        </p:blipFill>
-        <p:spPr>
-          <a:xfrm>
-            <a:off x="381000" y="6557962"/>
-            <a:ext cx="152400" cy="133350"/>
-          </a:xfrm>
-          <a:prstGeom prst="rect">
-            <a:avLst/>
-          </a:prstGeom>
-          <a:noFill/>
-          <a:ln>
-            <a:noFill/>
-          </a:ln>
-        </p:spPr>
-      </p:pic>
-      <p:pic>
-        <p:nvPicPr>
-          <p:cNvPr id="231" name="Google Shape;231;p19" descr="image.png"/>
-          <p:cNvPicPr preferRelativeResize="0"/>
-          <p:nvPr/>
-        </p:nvPicPr>
-        <p:blipFill rotWithShape="1">
-          <a:blip r:embed="rId7">
-            <a:alphaModFix/>
-          </a:blip>
-          <a:srcRect/>
-          <a:stretch/>
-        </p:blipFill>
-        <p:spPr>
-          <a:xfrm>
-            <a:off x="3267075" y="3023294"/>
-            <a:ext cx="419100" cy="476250"/>
-          </a:xfrm>
-          <a:prstGeom prst="rect">
-            <a:avLst/>
-          </a:prstGeom>
-          <a:noFill/>
-          <a:ln>
-            <a:noFill/>
-          </a:ln>
-        </p:spPr>
-      </p:pic>
-      <p:sp>
-        <p:nvSpPr>
-          <p:cNvPr id="232" name="Google Shape;232;p19"/>
-          <p:cNvSpPr txBox="1"/>
-          <p:nvPr/>
-        </p:nvSpPr>
-        <p:spPr>
-          <a:xfrm>
-            <a:off x="1801417" y="3690044"/>
-            <a:ext cx="3350419" cy="276999"/>
-          </a:xfrm>
-          <a:prstGeom prst="rect">
-            <a:avLst/>
-          </a:prstGeom>
-          <a:noFill/>
-          <a:ln>
-            <a:noFill/>
-          </a:ln>
-        </p:spPr>
-        <p:txBody>
-          <a:bodyPr spcFirstLastPara="1" wrap="square" lIns="0" tIns="0" rIns="0" bIns="0" anchor="t" anchorCtr="0">
-            <a:spAutoFit/>
-          </a:bodyPr>
-          <a:lstStyle/>
-          <a:p>
-            <a:pPr marL="0" marR="0" lvl="0" indent="0" algn="ctr" rtl="0">
-              <a:spcBef>
-                <a:spcPts val="0"/>
-              </a:spcBef>
-              <a:spcAft>
-                <a:spcPts val="0"/>
-              </a:spcAft>
-              <a:buNone/>
-            </a:pPr>
-            <a:r>
-              <a:rPr lang="en-US" sz="1800" b="1" i="0" u="none" strike="noStrike" cap="none">
-                <a:solidFill>
-                  <a:srgbClr val="003366"/>
-                </a:solidFill>
-                <a:latin typeface="Roboto"/>
-                <a:ea typeface="Roboto"/>
-                <a:cs typeface="Roboto"/>
-                <a:sym typeface="Roboto"/>
-              </a:rPr>
-              <a:t>Customer Actor</a:t>
-            </a:r>
-            <a:endParaRPr/>
-          </a:p>
-        </p:txBody>
-      </p:sp>
-      <p:sp>
-        <p:nvSpPr>
-          <p:cNvPr id="233" name="Google Shape;233;p19"/>
-          <p:cNvSpPr txBox="1"/>
-          <p:nvPr/>
-        </p:nvSpPr>
-        <p:spPr>
-          <a:xfrm>
-            <a:off x="1881189" y="4099624"/>
-            <a:ext cx="3190875" cy="590931"/>
-          </a:xfrm>
-          <a:prstGeom prst="rect">
-            <a:avLst/>
-          </a:prstGeom>
-          <a:noFill/>
-          <a:ln>
-            <a:noFill/>
-          </a:ln>
-        </p:spPr>
-        <p:txBody>
-          <a:bodyPr spcFirstLastPara="1" wrap="square" lIns="0" tIns="0" rIns="0" bIns="0" anchor="t" anchorCtr="0">
-            <a:spAutoFit/>
-          </a:bodyPr>
-          <a:lstStyle/>
-          <a:p>
-            <a:pPr marL="0" marR="0" lvl="0" indent="0" algn="ctr" rtl="0">
-              <a:lnSpc>
-                <a:spcPct val="160000"/>
-              </a:lnSpc>
-              <a:spcBef>
-                <a:spcPts val="0"/>
-              </a:spcBef>
-              <a:spcAft>
-                <a:spcPts val="0"/>
-              </a:spcAft>
-              <a:buNone/>
-            </a:pPr>
-            <a:r>
-              <a:rPr lang="en-US" sz="1200" b="0" i="0" u="none" strike="noStrike" cap="none">
-                <a:solidFill>
-                  <a:srgbClr val="334155"/>
-                </a:solidFill>
-                <a:latin typeface="Open Sans"/>
-                <a:ea typeface="Open Sans"/>
-                <a:cs typeface="Open Sans"/>
-                <a:sym typeface="Open Sans"/>
-              </a:rPr>
-              <a:t>Login, Search, Design T-Shirt, Add to Cart, Checkout, View History.</a:t>
-            </a:r>
-            <a:endParaRPr/>
-          </a:p>
-        </p:txBody>
-      </p:sp>
-      <p:pic>
-        <p:nvPicPr>
-          <p:cNvPr id="234" name="Google Shape;234;p19" descr="image.png"/>
-          <p:cNvPicPr preferRelativeResize="0"/>
-          <p:nvPr/>
-        </p:nvPicPr>
-        <p:blipFill rotWithShape="1">
-          <a:blip r:embed="rId8">
-            <a:alphaModFix/>
-          </a:blip>
-          <a:srcRect/>
-          <a:stretch/>
-        </p:blipFill>
-        <p:spPr>
-          <a:xfrm>
-            <a:off x="5929317" y="3619500"/>
-            <a:ext cx="333375" cy="381000"/>
-          </a:xfrm>
-          <a:prstGeom prst="rect">
-            <a:avLst/>
-          </a:prstGeom>
-          <a:noFill/>
-          <a:ln>
-            <a:noFill/>
-          </a:ln>
-        </p:spPr>
-      </p:pic>
-      <p:pic>
-        <p:nvPicPr>
-          <p:cNvPr id="235" name="Google Shape;235;p19" descr="image.png"/>
-          <p:cNvPicPr preferRelativeResize="0"/>
-          <p:nvPr/>
-        </p:nvPicPr>
-        <p:blipFill rotWithShape="1">
-          <a:blip r:embed="rId9">
-            <a:alphaModFix/>
-          </a:blip>
-          <a:srcRect/>
-          <a:stretch/>
-        </p:blipFill>
-        <p:spPr>
-          <a:xfrm>
-            <a:off x="8553451" y="3023294"/>
-            <a:ext cx="419100" cy="476250"/>
-          </a:xfrm>
-          <a:prstGeom prst="rect">
-            <a:avLst/>
-          </a:prstGeom>
-          <a:noFill/>
-          <a:ln>
-            <a:noFill/>
-          </a:ln>
-        </p:spPr>
-      </p:pic>
-      <p:sp>
-        <p:nvSpPr>
-          <p:cNvPr id="236" name="Google Shape;236;p19"/>
-          <p:cNvSpPr txBox="1"/>
-          <p:nvPr/>
-        </p:nvSpPr>
-        <p:spPr>
-          <a:xfrm>
-            <a:off x="7087789" y="3690044"/>
-            <a:ext cx="3350419" cy="276999"/>
-          </a:xfrm>
-          <a:prstGeom prst="rect">
-            <a:avLst/>
-          </a:prstGeom>
-          <a:noFill/>
-          <a:ln>
-            <a:noFill/>
-          </a:ln>
-        </p:spPr>
-        <p:txBody>
-          <a:bodyPr spcFirstLastPara="1" wrap="square" lIns="0" tIns="0" rIns="0" bIns="0" anchor="t" anchorCtr="0">
-            <a:spAutoFit/>
-          </a:bodyPr>
-          <a:lstStyle/>
-          <a:p>
-            <a:pPr marL="0" marR="0" lvl="0" indent="0" algn="ctr" rtl="0">
-              <a:spcBef>
-                <a:spcPts val="0"/>
-              </a:spcBef>
-              <a:spcAft>
-                <a:spcPts val="0"/>
-              </a:spcAft>
-              <a:buNone/>
-            </a:pPr>
-            <a:r>
-              <a:rPr lang="en-US" sz="1800" b="1" i="0" u="none" strike="noStrike" cap="none">
-                <a:solidFill>
-                  <a:srgbClr val="003366"/>
-                </a:solidFill>
-                <a:latin typeface="Roboto"/>
-                <a:ea typeface="Roboto"/>
-                <a:cs typeface="Roboto"/>
-                <a:sym typeface="Roboto"/>
-              </a:rPr>
-              <a:t>Admin Actor</a:t>
-            </a:r>
-            <a:endParaRPr/>
-          </a:p>
-        </p:txBody>
-      </p:sp>
-      <p:sp>
-        <p:nvSpPr>
-          <p:cNvPr id="237" name="Google Shape;237;p19"/>
-          <p:cNvSpPr txBox="1"/>
-          <p:nvPr/>
-        </p:nvSpPr>
-        <p:spPr>
-          <a:xfrm>
-            <a:off x="7167565" y="4099624"/>
-            <a:ext cx="3190875" cy="590931"/>
-          </a:xfrm>
-          <a:prstGeom prst="rect">
-            <a:avLst/>
-          </a:prstGeom>
-          <a:noFill/>
-          <a:ln>
-            <a:noFill/>
-          </a:ln>
-        </p:spPr>
-        <p:txBody>
-          <a:bodyPr spcFirstLastPara="1" wrap="square" lIns="0" tIns="0" rIns="0" bIns="0" anchor="t" anchorCtr="0">
-            <a:spAutoFit/>
-          </a:bodyPr>
-          <a:lstStyle/>
-          <a:p>
-            <a:pPr marL="0" marR="0" lvl="0" indent="0" algn="ctr" rtl="0">
-              <a:lnSpc>
-                <a:spcPct val="160000"/>
-              </a:lnSpc>
-              <a:spcBef>
-                <a:spcPts val="0"/>
-              </a:spcBef>
-              <a:spcAft>
-                <a:spcPts val="0"/>
-              </a:spcAft>
-              <a:buNone/>
-            </a:pPr>
-            <a:r>
-              <a:rPr lang="en-US" sz="1200" b="0" i="0" u="none" strike="noStrike" cap="none">
-                <a:solidFill>
-                  <a:srgbClr val="334155"/>
-                </a:solidFill>
-                <a:latin typeface="Open Sans"/>
-                <a:ea typeface="Open Sans"/>
-                <a:cs typeface="Open Sans"/>
-                <a:sym typeface="Open Sans"/>
-              </a:rPr>
-              <a:t>Manage Users, Manage Products, Process Orders, Download Designs.</a:t>
-            </a:r>
-            <a:endParaRPr/>
-          </a:p>
-        </p:txBody>
-      </p:sp>
-    </p:spTree>
-  </p:cSld>
-  <p:clrMapOvr>
-    <a:masterClrMapping/>
-  </p:clrMapOvr>
-  <p:timing>
-    <p:tnLst>
-      <p:par>
-        <p:cTn id="1" dur="indefinite" restart="never" nodeType="tmRoot"/>
-      </p:par>
-    </p:tnLst>
-  </p:timing>
-</p:sld>
-</file>
-
-<file path=ppt/slides/slide8.xml><?xml version="1.0" encoding="utf-8"?>
 <p:sld xmlns:a="http://schemas.openxmlformats.org/drawingml/2006/main" xmlns:r="http://schemas.openxmlformats.org/officeDocument/2006/relationships" xmlns:p="http://schemas.openxmlformats.org/presentationml/2006/main">
   <p:cSld>
     <p:bg>
@@ -20222,56 +15216,6 @@
           </a:p>
         </p:txBody>
       </p:sp>
-      <p:sp>
-        <p:nvSpPr>
-          <p:cNvPr id="249" name="Google Shape;249;p20"/>
-          <p:cNvSpPr txBox="1"/>
-          <p:nvPr/>
-        </p:nvSpPr>
-        <p:spPr>
-          <a:xfrm>
-            <a:off x="11382380" y="6534156"/>
-            <a:ext cx="428625" cy="161583"/>
-          </a:xfrm>
-          <a:prstGeom prst="rect">
-            <a:avLst/>
-          </a:prstGeom>
-          <a:noFill/>
-          <a:ln>
-            <a:noFill/>
-          </a:ln>
-        </p:spPr>
-        <p:txBody>
-          <a:bodyPr spcFirstLastPara="1" wrap="square" lIns="0" tIns="0" rIns="0" bIns="0" anchor="t" anchorCtr="0">
-            <a:spAutoFit/>
-          </a:bodyPr>
-          <a:lstStyle/>
-          <a:p>
-            <a:pPr marL="0" marR="0" lvl="0" indent="0" algn="l" rtl="0">
-              <a:spcBef>
-                <a:spcPts val="0"/>
-              </a:spcBef>
-              <a:spcAft>
-                <a:spcPts val="0"/>
-              </a:spcAft>
-              <a:buNone/>
-            </a:pPr>
-            <a:r>
-              <a:rPr lang="en-US" sz="1050" b="0" i="0" u="none" strike="noStrike" cap="none">
-                <a:solidFill>
-                  <a:srgbClr val="64748B"/>
-                </a:solidFill>
-                <a:latin typeface="Open Sans"/>
-                <a:ea typeface="Open Sans"/>
-                <a:cs typeface="Open Sans"/>
-                <a:sym typeface="Open Sans"/>
-              </a:rPr>
-              <a:t>Slide 8</a:t>
-            </a:r>
-            <a:endParaRPr/>
-          </a:p>
-        </p:txBody>
-      </p:sp>
       <p:pic>
         <p:nvPicPr>
           <p:cNvPr id="251" name="Google Shape;251;p20" descr="image.png"/>
@@ -20414,7 +15358,7 @@
               <a:buNone/>
             </a:pPr>
             <a:r>
-              <a:rPr lang="en-US" sz="1500" b="0" i="0" u="none" strike="noStrike" cap="none">
+              <a:rPr lang="en-US" sz="1500" b="0" i="0" u="none" strike="noStrike" cap="none" dirty="0" smtClean="0">
                 <a:solidFill>
                   <a:srgbClr val="334155"/>
                 </a:solidFill>
@@ -20423,9 +15367,21 @@
                 <a:cs typeface="Open Sans"/>
                 <a:sym typeface="Open Sans"/>
               </a:rPr>
-              <a:t>HTML5, CSS3, JS</a:t>
-            </a:r>
-            <a:endParaRPr/>
+              <a:t>HTML, CSS, </a:t>
+            </a:r>
+            <a:r>
+              <a:rPr lang="en-US" sz="1500" b="0" i="0" u="none" strike="noStrike" cap="none" dirty="0">
+                <a:solidFill>
+                  <a:srgbClr val="334155"/>
+                </a:solidFill>
+                <a:latin typeface="Open Sans"/>
+                <a:ea typeface="Open Sans"/>
+                <a:cs typeface="Open Sans"/>
+                <a:sym typeface="Open Sans"/>
+              </a:rPr>
+              <a:t>JS</a:t>
+            </a:r>
+            <a:endParaRPr dirty="0"/>
           </a:p>
         </p:txBody>
       </p:sp>
@@ -20937,6 +15893,18 @@
   <p:clrMapOvr>
     <a:masterClrMapping/>
   </p:clrMapOvr>
+  <mc:AlternateContent xmlns:mc="http://schemas.openxmlformats.org/markup-compatibility/2006" xmlns:p14="http://schemas.microsoft.com/office/powerpoint/2010/main">
+    <mc:Choice Requires="p14">
+      <p:transition spd="slow" p14:dur="1400">
+        <p14:ripple/>
+      </p:transition>
+    </mc:Choice>
+    <mc:Fallback xmlns="">
+      <p:transition spd="slow">
+        <p:fade/>
+      </p:transition>
+    </mc:Fallback>
+  </mc:AlternateContent>
   <p:timing>
     <p:tnLst>
       <p:par>
@@ -20947,7 +15915,7 @@
 </p:sld>
 </file>
 
-<file path=ppt/slides/slide9.xml><?xml version="1.0" encoding="utf-8"?>
+<file path=ppt/slides/slide8.xml><?xml version="1.0" encoding="utf-8"?>
 <p:sld xmlns:a="http://schemas.openxmlformats.org/drawingml/2006/main" xmlns:r="http://schemas.openxmlformats.org/officeDocument/2006/relationships" xmlns:p="http://schemas.openxmlformats.org/presentationml/2006/main">
   <p:cSld>
     <p:bg>
@@ -21153,56 +16121,6 @@
           </a:p>
         </p:txBody>
       </p:sp>
-      <p:sp>
-        <p:nvSpPr>
-          <p:cNvPr id="273" name="Google Shape;273;p21"/>
-          <p:cNvSpPr txBox="1"/>
-          <p:nvPr/>
-        </p:nvSpPr>
-        <p:spPr>
-          <a:xfrm>
-            <a:off x="11382380" y="6534156"/>
-            <a:ext cx="428625" cy="161583"/>
-          </a:xfrm>
-          <a:prstGeom prst="rect">
-            <a:avLst/>
-          </a:prstGeom>
-          <a:noFill/>
-          <a:ln>
-            <a:noFill/>
-          </a:ln>
-        </p:spPr>
-        <p:txBody>
-          <a:bodyPr spcFirstLastPara="1" wrap="square" lIns="0" tIns="0" rIns="0" bIns="0" anchor="t" anchorCtr="0">
-            <a:spAutoFit/>
-          </a:bodyPr>
-          <a:lstStyle/>
-          <a:p>
-            <a:pPr marL="0" marR="0" lvl="0" indent="0" algn="l" rtl="0">
-              <a:spcBef>
-                <a:spcPts val="0"/>
-              </a:spcBef>
-              <a:spcAft>
-                <a:spcPts val="0"/>
-              </a:spcAft>
-              <a:buNone/>
-            </a:pPr>
-            <a:r>
-              <a:rPr lang="en-US" sz="1050" b="0" i="0" u="none" strike="noStrike" cap="none">
-                <a:solidFill>
-                  <a:srgbClr val="64748B"/>
-                </a:solidFill>
-                <a:latin typeface="Open Sans"/>
-                <a:ea typeface="Open Sans"/>
-                <a:cs typeface="Open Sans"/>
-                <a:sym typeface="Open Sans"/>
-              </a:rPr>
-              <a:t>Slide 9</a:t>
-            </a:r>
-            <a:endParaRPr/>
-          </a:p>
-        </p:txBody>
-      </p:sp>
       <p:pic>
         <p:nvPicPr>
           <p:cNvPr id="275" name="Google Shape;275;p21" descr="image.png"/>
@@ -21770,6 +16688,287 @@
   <p:clrMapOvr>
     <a:masterClrMapping/>
   </p:clrMapOvr>
+  <p:transition spd="slow">
+    <p:cover/>
+  </p:transition>
+  <p:timing>
+    <p:tnLst>
+      <p:par>
+        <p:cTn id="1" dur="indefinite" restart="never" nodeType="tmRoot"/>
+      </p:par>
+    </p:tnLst>
+  </p:timing>
+</p:sld>
+</file>
+
+<file path=ppt/slides/slide9.xml><?xml version="1.0" encoding="utf-8"?>
+<p:sld xmlns:a="http://schemas.openxmlformats.org/drawingml/2006/main" xmlns:r="http://schemas.openxmlformats.org/officeDocument/2006/relationships" xmlns:p="http://schemas.openxmlformats.org/presentationml/2006/main">
+  <p:cSld>
+    <p:bg>
+      <p:bgPr>
+        <a:solidFill>
+          <a:srgbClr val="FFFFFF"/>
+        </a:solidFill>
+        <a:effectLst/>
+      </p:bgPr>
+    </p:bg>
+    <p:spTree>
+      <p:nvGrpSpPr>
+        <p:cNvPr id="1" name="Shape 369"/>
+        <p:cNvGrpSpPr/>
+        <p:nvPr/>
+      </p:nvGrpSpPr>
+      <p:grpSpPr>
+        <a:xfrm>
+          <a:off x="0" y="0"/>
+          <a:ext cx="0" cy="0"/>
+          <a:chOff x="0" y="0"/>
+          <a:chExt cx="0" cy="0"/>
+        </a:xfrm>
+      </p:grpSpPr>
+      <p:pic>
+        <p:nvPicPr>
+          <p:cNvPr id="370" name="Google Shape;370;p26" descr="image.png"/>
+          <p:cNvPicPr preferRelativeResize="0"/>
+          <p:nvPr/>
+        </p:nvPicPr>
+        <p:blipFill rotWithShape="1">
+          <a:blip r:embed="rId3">
+            <a:alphaModFix/>
+          </a:blip>
+          <a:srcRect/>
+          <a:stretch/>
+        </p:blipFill>
+        <p:spPr>
+          <a:xfrm>
+            <a:off x="0" y="0"/>
+            <a:ext cx="12192000" cy="6858000"/>
+          </a:xfrm>
+          <a:prstGeom prst="rect">
+            <a:avLst/>
+          </a:prstGeom>
+          <a:noFill/>
+          <a:ln>
+            <a:noFill/>
+          </a:ln>
+        </p:spPr>
+      </p:pic>
+      <p:pic>
+        <p:nvPicPr>
+          <p:cNvPr id="373" name="Google Shape;373;p26" descr="image.png"/>
+          <p:cNvPicPr preferRelativeResize="0"/>
+          <p:nvPr/>
+        </p:nvPicPr>
+        <p:blipFill rotWithShape="1">
+          <a:blip r:embed="rId4">
+            <a:alphaModFix/>
+          </a:blip>
+          <a:srcRect/>
+          <a:stretch/>
+        </p:blipFill>
+        <p:spPr>
+          <a:xfrm>
+            <a:off x="0" y="6381750"/>
+            <a:ext cx="12192000" cy="476250"/>
+          </a:xfrm>
+          <a:prstGeom prst="rect">
+            <a:avLst/>
+          </a:prstGeom>
+          <a:noFill/>
+          <a:ln>
+            <a:noFill/>
+          </a:ln>
+        </p:spPr>
+      </p:pic>
+      <p:sp>
+        <p:nvSpPr>
+          <p:cNvPr id="374" name="Google Shape;374;p26"/>
+          <p:cNvSpPr txBox="1"/>
+          <p:nvPr/>
+        </p:nvSpPr>
+        <p:spPr>
+          <a:xfrm>
+            <a:off x="571501" y="381001"/>
+            <a:ext cx="3829051" cy="915635"/>
+          </a:xfrm>
+          <a:prstGeom prst="rect">
+            <a:avLst/>
+          </a:prstGeom>
+          <a:noFill/>
+          <a:ln>
+            <a:noFill/>
+          </a:ln>
+        </p:spPr>
+        <p:txBody>
+          <a:bodyPr spcFirstLastPara="1" wrap="square" lIns="0" tIns="0" rIns="0" bIns="0" anchor="t" anchorCtr="0">
+            <a:spAutoFit/>
+          </a:bodyPr>
+          <a:lstStyle/>
+          <a:p>
+            <a:r>
+              <a:rPr lang="vi-VN" sz="3150" b="1" dirty="0" smtClean="0">
+                <a:solidFill>
+                  <a:srgbClr val="003366"/>
+                </a:solidFill>
+                <a:latin typeface="Roboto"/>
+                <a:ea typeface="Roboto"/>
+                <a:cs typeface="Roboto"/>
+                <a:sym typeface="Roboto"/>
+              </a:rPr>
+              <a:t>Sơ </a:t>
+            </a:r>
+            <a:r>
+              <a:rPr lang="vi-VN" sz="3150" b="1" dirty="0">
+                <a:solidFill>
+                  <a:srgbClr val="003366"/>
+                </a:solidFill>
+                <a:latin typeface="Roboto"/>
+                <a:ea typeface="Roboto"/>
+                <a:cs typeface="Roboto"/>
+                <a:sym typeface="Roboto"/>
+              </a:rPr>
+              <a:t>đồ DFD mức 1</a:t>
+            </a:r>
+          </a:p>
+          <a:p>
+            <a:endParaRPr lang="en-GB" b="1" dirty="0" smtClean="0">
+              <a:solidFill>
+                <a:schemeClr val="accent1">
+                  <a:lumMod val="75000"/>
+                </a:schemeClr>
+              </a:solidFill>
+            </a:endParaRPr>
+          </a:p>
+          <a:p>
+            <a:pPr marL="0" marR="0" lvl="0" indent="0" algn="l" rtl="0">
+              <a:spcBef>
+                <a:spcPts val="0"/>
+              </a:spcBef>
+              <a:spcAft>
+                <a:spcPts val="0"/>
+              </a:spcAft>
+              <a:buNone/>
+            </a:pPr>
+            <a:endParaRPr dirty="0"/>
+          </a:p>
+        </p:txBody>
+      </p:sp>
+      <p:sp>
+        <p:nvSpPr>
+          <p:cNvPr id="375" name="Google Shape;375;p26"/>
+          <p:cNvSpPr txBox="1"/>
+          <p:nvPr/>
+        </p:nvSpPr>
+        <p:spPr>
+          <a:xfrm>
+            <a:off x="628651" y="6463061"/>
+            <a:ext cx="876300" cy="323165"/>
+          </a:xfrm>
+          <a:prstGeom prst="rect">
+            <a:avLst/>
+          </a:prstGeom>
+          <a:noFill/>
+          <a:ln>
+            <a:noFill/>
+          </a:ln>
+        </p:spPr>
+        <p:txBody>
+          <a:bodyPr spcFirstLastPara="1" wrap="square" lIns="0" tIns="0" rIns="0" bIns="0" anchor="ctr" anchorCtr="0">
+            <a:spAutoFit/>
+          </a:bodyPr>
+          <a:lstStyle/>
+          <a:p>
+            <a:pPr marL="0" marR="0" lvl="0" indent="0" algn="l" rtl="0">
+              <a:spcBef>
+                <a:spcPts val="0"/>
+              </a:spcBef>
+              <a:spcAft>
+                <a:spcPts val="0"/>
+              </a:spcAft>
+              <a:buNone/>
+            </a:pPr>
+            <a:r>
+              <a:rPr lang="en-US" sz="1050" b="1" i="0" u="none" strike="noStrike" cap="none">
+                <a:solidFill>
+                  <a:srgbClr val="003366"/>
+                </a:solidFill>
+                <a:latin typeface="Open Sans SemiBold"/>
+                <a:ea typeface="Open Sans SemiBold"/>
+                <a:cs typeface="Open Sans SemiBold"/>
+                <a:sym typeface="Open Sans SemiBold"/>
+              </a:rPr>
+              <a:t>Mytee Studio</a:t>
+            </a:r>
+            <a:endParaRPr/>
+          </a:p>
+        </p:txBody>
+      </p:sp>
+      <p:pic>
+        <p:nvPicPr>
+          <p:cNvPr id="378" name="Google Shape;378;p26" descr="image.png"/>
+          <p:cNvPicPr preferRelativeResize="0"/>
+          <p:nvPr/>
+        </p:nvPicPr>
+        <p:blipFill rotWithShape="1">
+          <a:blip r:embed="rId5">
+            <a:alphaModFix/>
+          </a:blip>
+          <a:srcRect/>
+          <a:stretch/>
+        </p:blipFill>
+        <p:spPr>
+          <a:xfrm>
+            <a:off x="381000" y="6557962"/>
+            <a:ext cx="152400" cy="133350"/>
+          </a:xfrm>
+          <a:prstGeom prst="rect">
+            <a:avLst/>
+          </a:prstGeom>
+          <a:noFill/>
+          <a:ln>
+            <a:noFill/>
+          </a:ln>
+        </p:spPr>
+      </p:pic>
+      <p:pic>
+        <p:nvPicPr>
+          <p:cNvPr id="8" name="Picture 7"/>
+          <p:cNvPicPr/>
+          <p:nvPr/>
+        </p:nvPicPr>
+        <p:blipFill>
+          <a:blip r:embed="rId6"/>
+          <a:stretch>
+            <a:fillRect/>
+          </a:stretch>
+        </p:blipFill>
+        <p:spPr>
+          <a:xfrm>
+            <a:off x="833377" y="1192192"/>
+            <a:ext cx="10451939" cy="4224760"/>
+          </a:xfrm>
+          <a:prstGeom prst="rect">
+            <a:avLst/>
+          </a:prstGeom>
+        </p:spPr>
+      </p:pic>
+    </p:spTree>
+  </p:cSld>
+  <p:clrMapOvr>
+    <a:masterClrMapping/>
+  </p:clrMapOvr>
+  <mc:AlternateContent xmlns:mc="http://schemas.openxmlformats.org/markup-compatibility/2006" xmlns:p14="http://schemas.microsoft.com/office/powerpoint/2010/main">
+    <mc:Choice Requires="p14">
+      <p:transition spd="slow" p14:dur="1600">
+        <p14:gallery dir="l"/>
+      </p:transition>
+    </mc:Choice>
+    <mc:Fallback xmlns="">
+      <p:transition spd="slow">
+        <p:fade/>
+      </p:transition>
+    </mc:Fallback>
+  </mc:AlternateContent>
   <p:timing>
     <p:tnLst>
       <p:par>
